--- a/presentation.pptx
+++ b/presentation.pptx
@@ -13,6 +13,7 @@
     <p:sldId id="259" r:id="rId8"/>
     <p:sldId id="260" r:id="rId9"/>
     <p:sldId id="261" r:id="rId10"/>
+    <p:sldId id="262" r:id="rId11"/>
   </p:sldIdLst>
   <p:sldSz cx="9144000" cy="5143500"/>
   <p:notesSz cx="7772400" cy="10058400"/>
@@ -72,7 +73,7 @@
         <p:txBody>
           <a:bodyPr/>
           <a:p>
-            <a:fld id="{24582F84-218F-4D04-915F-5A6564DF223A}" type="slidenum">
+            <a:fld id="{BDECAA2D-E2AD-4D21-A491-6FF7FEEDF0FA}" type="slidenum">
               <a:t>&lt;#&gt;</a:t>
             </a:fld>
           </a:p>
@@ -100,9 +101,136 @@
           <a:chExt cx="0" cy="0"/>
         </a:xfrm>
       </p:grpSpPr>
+      <p:pic>
+        <p:nvPicPr>
+          <p:cNvPr id="29" name="Рисунок 5" descr="logo-02.jpg"/>
+          <p:cNvPicPr/>
+          <p:nvPr/>
+        </p:nvPicPr>
+        <p:blipFill>
+          <a:blip r:embed="rId2"/>
+          <a:stretch/>
+        </p:blipFill>
+        <p:spPr>
+          <a:xfrm>
+            <a:off x="114480" y="0"/>
+            <a:ext cx="1510560" cy="718560"/>
+          </a:xfrm>
+          <a:prstGeom prst="rect">
+            <a:avLst/>
+          </a:prstGeom>
+          <a:noFill/>
+          <a:ln w="0">
+            <a:noFill/>
+          </a:ln>
+        </p:spPr>
+      </p:pic>
+      <p:grpSp>
+        <p:nvGrpSpPr>
+          <p:cNvPr id="30" name="Группа 27"/>
+          <p:cNvGrpSpPr/>
+          <p:nvPr/>
+        </p:nvGrpSpPr>
+        <p:grpSpPr>
+          <a:xfrm>
+            <a:off x="360" y="5143680"/>
+            <a:ext cx="9145080" cy="1080"/>
+            <a:chOff x="360" y="5143680"/>
+            <a:chExt cx="9145080" cy="1080"/>
+          </a:xfrm>
+        </p:grpSpPr>
+        <p:cxnSp>
+          <p:nvCxnSpPr>
+            <p:cNvPr id="31" name="Прямая соединительная линия 7"/>
+            <p:cNvCxnSpPr/>
+            <p:nvPr/>
+          </p:nvCxnSpPr>
+          <p:spPr>
+            <a:xfrm flipH="1">
+              <a:off x="1836000" y="5143680"/>
+              <a:ext cx="7309800" cy="1440"/>
+            </a:xfrm>
+            <a:prstGeom prst="straightConnector1">
+              <a:avLst/>
+            </a:prstGeom>
+            <a:ln w="76200">
+              <a:solidFill>
+                <a:srgbClr val="0081A1"/>
+              </a:solidFill>
+              <a:round/>
+            </a:ln>
+          </p:spPr>
+        </p:cxnSp>
+        <p:cxnSp>
+          <p:nvCxnSpPr>
+            <p:cNvPr id="32" name="Прямая соединительная линия 9"/>
+            <p:cNvCxnSpPr/>
+            <p:nvPr/>
+          </p:nvCxnSpPr>
+          <p:spPr>
+            <a:xfrm flipH="1">
+              <a:off x="1206360" y="5143680"/>
+              <a:ext cx="649440" cy="1440"/>
+            </a:xfrm>
+            <a:prstGeom prst="straightConnector1">
+              <a:avLst/>
+            </a:prstGeom>
+            <a:ln w="76200">
+              <a:solidFill>
+                <a:srgbClr val="94C500"/>
+              </a:solidFill>
+              <a:round/>
+            </a:ln>
+          </p:spPr>
+        </p:cxnSp>
+        <p:cxnSp>
+          <p:nvCxnSpPr>
+            <p:cNvPr id="33" name="Прямая соединительная линия 11"/>
+            <p:cNvCxnSpPr/>
+            <p:nvPr/>
+          </p:nvCxnSpPr>
+          <p:spPr>
+            <a:xfrm flipH="1">
+              <a:off x="525600" y="5143680"/>
+              <a:ext cx="721800" cy="1440"/>
+            </a:xfrm>
+            <a:prstGeom prst="straightConnector1">
+              <a:avLst/>
+            </a:prstGeom>
+            <a:ln w="76200">
+              <a:solidFill>
+                <a:srgbClr val="FBC800"/>
+              </a:solidFill>
+              <a:round/>
+            </a:ln>
+          </p:spPr>
+        </p:cxnSp>
+        <p:cxnSp>
+          <p:nvCxnSpPr>
+            <p:cNvPr id="34" name="Прямая соединительная линия 12"/>
+            <p:cNvCxnSpPr/>
+            <p:nvPr/>
+          </p:nvCxnSpPr>
+          <p:spPr>
+            <a:xfrm flipH="1">
+              <a:off x="360" y="5143680"/>
+              <a:ext cx="612720" cy="1440"/>
+            </a:xfrm>
+            <a:prstGeom prst="straightConnector1">
+              <a:avLst/>
+            </a:prstGeom>
+            <a:ln w="76200">
+              <a:solidFill>
+                <a:srgbClr val="E42A00"/>
+              </a:solidFill>
+              <a:round/>
+            </a:ln>
+          </p:spPr>
+        </p:cxnSp>
+      </p:grpSp>
       <p:sp>
         <p:nvSpPr>
-          <p:cNvPr id="40" name="PlaceHolder 1"/>
+          <p:cNvPr id="35" name="PlaceHolder 1"/>
           <p:cNvSpPr>
             <a:spLocks noGrp="1"/>
           </p:cNvSpPr>
@@ -112,8 +240,8 @@
         </p:nvSpPr>
         <p:spPr>
           <a:xfrm>
-            <a:off x="1784520" y="116280"/>
-            <a:ext cx="7010280" cy="625320"/>
+            <a:off x="1784520" y="291240"/>
+            <a:ext cx="7009920" cy="274680"/>
           </a:xfrm>
           <a:prstGeom prst="rect">
             <a:avLst/>
@@ -124,14 +252,38 @@
           </a:ln>
         </p:spPr>
         <p:txBody>
-          <a:bodyPr lIns="0" rIns="0" tIns="0" bIns="0" anchor="ctr">
+          <a:bodyPr lIns="0" tIns="0" rIns="0" bIns="0" anchor="ctr">
             <a:spAutoFit/>
           </a:bodyPr>
-          <a:p>
-            <a:pPr indent="0" algn="ctr">
+          <a:lstStyle>
+            <a:lvl1pPr indent="0" algn="l">
               <a:buNone/>
-            </a:pPr>
-            <a:endParaRPr b="0" lang="en-US" sz="4400" strike="noStrike" u="none">
+              <a:defRPr lang="en-US" sz="1800" b="0" u="none" strike="noStrike">
+                <a:solidFill>
+                  <a:srgbClr val="000000"/>
+                </a:solidFill>
+                <a:effectLst/>
+                <a:uFillTx/>
+                <a:latin typeface="Arial"/>
+              </a:defRPr>
+            </a:lvl1pPr>
+          </a:lstStyle>
+          <a:p>
+            <a:pPr indent="0" algn="l">
+              <a:buNone/>
+            </a:pPr>
+            <a:r>
+              <a:rPr lang="en-US" sz="1800" b="0" u="none" strike="noStrike">
+                <a:solidFill>
+                  <a:srgbClr val="000000"/>
+                </a:solidFill>
+                <a:effectLst/>
+                <a:uFillTx/>
+                <a:latin typeface="Arial"/>
+              </a:rPr>
+              <a:t>Click to edit the title text format</a:t>
+            </a:r>
+            <a:endParaRPr lang="en-US" sz="1800" b="0" u="none" strike="noStrike">
               <a:solidFill>
                 <a:srgbClr val="000000"/>
               </a:solidFill>
@@ -144,18 +296,18 @@
       </p:sp>
       <p:sp>
         <p:nvSpPr>
-          <p:cNvPr id="41" name="PlaceHolder 2"/>
+          <p:cNvPr id="36" name="PlaceHolder 2"/>
           <p:cNvSpPr>
             <a:spLocks noGrp="1"/>
           </p:cNvSpPr>
           <p:nvPr>
-            <p:ph/>
+            <p:ph type="body"/>
           </p:nvPr>
         </p:nvSpPr>
         <p:spPr>
           <a:xfrm>
             <a:off x="457200" y="1203480"/>
-            <a:ext cx="8228880" cy="2982600"/>
+            <a:ext cx="8228520" cy="2982240"/>
           </a:xfrm>
           <a:prstGeom prst="rect">
             <a:avLst/>
@@ -166,17 +318,316 @@
           </a:ln>
         </p:spPr>
         <p:txBody>
-          <a:bodyPr lIns="0" rIns="0" tIns="0" bIns="0" anchor="t">
+          <a:bodyPr lIns="0" tIns="0" rIns="0" bIns="0" anchor="t">
             <a:normAutofit/>
           </a:bodyPr>
-          <a:p>
-            <a:pPr indent="0">
-              <a:spcBef>
-                <a:spcPts val="1417"/>
-              </a:spcBef>
-              <a:buNone/>
-            </a:pPr>
-            <a:endParaRPr b="0" lang="en-US" sz="3200" strike="noStrike" u="none">
+          <a:lstStyle>
+            <a:lvl1pPr algn="l">
+              <a:buClr>
+                <a:srgbClr val="000000"/>
+              </a:buClr>
+              <a:buFont typeface="Wingdings" charset="2"/>
+              <a:buChar char=""/>
+              <a:defRPr lang="en-US" sz="1800" b="0" u="none" strike="noStrike">
+                <a:solidFill>
+                  <a:srgbClr val="000000"/>
+                </a:solidFill>
+                <a:effectLst/>
+                <a:uFillTx/>
+                <a:latin typeface="Arial"/>
+              </a:defRPr>
+            </a:lvl1pPr>
+            <a:lvl2pPr lvl="1" algn="l">
+              <a:buClr>
+                <a:srgbClr val="000000"/>
+              </a:buClr>
+              <a:buSzPct val="75000"/>
+              <a:buFont typeface="Symbol" charset="2"/>
+              <a:buChar char=""/>
+              <a:defRPr lang="en-US" sz="1800" b="0" u="none" strike="noStrike">
+                <a:solidFill>
+                  <a:srgbClr val="000000"/>
+                </a:solidFill>
+                <a:effectLst/>
+                <a:uFillTx/>
+                <a:latin typeface="Arial"/>
+              </a:defRPr>
+            </a:lvl2pPr>
+            <a:lvl3pPr lvl="2" algn="l">
+              <a:buClr>
+                <a:srgbClr val="000000"/>
+              </a:buClr>
+              <a:buSzPct val="45000"/>
+              <a:buFont typeface="Wingdings" charset="2"/>
+              <a:buChar char=""/>
+              <a:defRPr lang="en-US" sz="1800" b="0" u="none" strike="noStrike">
+                <a:solidFill>
+                  <a:srgbClr val="000000"/>
+                </a:solidFill>
+                <a:effectLst/>
+                <a:uFillTx/>
+                <a:latin typeface="Arial"/>
+              </a:defRPr>
+            </a:lvl3pPr>
+            <a:lvl4pPr lvl="3" algn="l">
+              <a:buClr>
+                <a:srgbClr val="000000"/>
+              </a:buClr>
+              <a:buSzPct val="75000"/>
+              <a:buFont typeface="Symbol" charset="2"/>
+              <a:buChar char=""/>
+              <a:defRPr lang="en-US" sz="1800" b="0" u="none" strike="noStrike">
+                <a:solidFill>
+                  <a:srgbClr val="000000"/>
+                </a:solidFill>
+                <a:effectLst/>
+                <a:uFillTx/>
+                <a:latin typeface="Arial"/>
+              </a:defRPr>
+            </a:lvl4pPr>
+            <a:lvl5pPr lvl="4" algn="l">
+              <a:buClr>
+                <a:srgbClr val="000000"/>
+              </a:buClr>
+              <a:buSzPct val="45000"/>
+              <a:buFont typeface="Wingdings" charset="2"/>
+              <a:buChar char=""/>
+              <a:defRPr lang="en-US" sz="1800" b="0" u="none" strike="noStrike">
+                <a:solidFill>
+                  <a:srgbClr val="000000"/>
+                </a:solidFill>
+                <a:effectLst/>
+                <a:uFillTx/>
+                <a:latin typeface="Arial"/>
+              </a:defRPr>
+            </a:lvl5pPr>
+            <a:lvl6pPr lvl="5" algn="l">
+              <a:buClr>
+                <a:srgbClr val="000000"/>
+              </a:buClr>
+              <a:buSzPct val="45000"/>
+              <a:buFont typeface="Wingdings" charset="2"/>
+              <a:buChar char=""/>
+              <a:defRPr lang="en-US" sz="1800" b="0" u="none" strike="noStrike">
+                <a:solidFill>
+                  <a:srgbClr val="000000"/>
+                </a:solidFill>
+                <a:effectLst/>
+                <a:uFillTx/>
+                <a:latin typeface="Arial"/>
+              </a:defRPr>
+            </a:lvl6pPr>
+            <a:lvl7pPr lvl="6" algn="l">
+              <a:buClr>
+                <a:srgbClr val="000000"/>
+              </a:buClr>
+              <a:buSzPct val="45000"/>
+              <a:buFont typeface="Wingdings" charset="2"/>
+              <a:buChar char=""/>
+              <a:defRPr lang="en-US" sz="1800" b="0" u="none" strike="noStrike">
+                <a:solidFill>
+                  <a:srgbClr val="000000"/>
+                </a:solidFill>
+                <a:effectLst/>
+                <a:uFillTx/>
+                <a:latin typeface="Arial"/>
+              </a:defRPr>
+            </a:lvl7pPr>
+          </a:lstStyle>
+          <a:p>
+            <a:pPr indent="-324000" algn="l">
+              <a:buClr>
+                <a:srgbClr val="000000"/>
+              </a:buClr>
+              <a:buFont typeface="Wingdings" charset="2"/>
+              <a:buChar char=""/>
+            </a:pPr>
+            <a:r>
+              <a:rPr lang="en-US" sz="1800" b="0" u="none" strike="noStrike">
+                <a:solidFill>
+                  <a:srgbClr val="000000"/>
+                </a:solidFill>
+                <a:effectLst/>
+                <a:uFillTx/>
+                <a:latin typeface="Arial"/>
+              </a:rPr>
+              <a:t>Click to edit the outline text format</a:t>
+            </a:r>
+            <a:endParaRPr lang="en-US" sz="1800" b="0" u="none" strike="noStrike">
+              <a:solidFill>
+                <a:srgbClr val="000000"/>
+              </a:solidFill>
+              <a:effectLst/>
+              <a:uFillTx/>
+              <a:latin typeface="Arial"/>
+            </a:endParaRPr>
+          </a:p>
+          <a:p>
+            <a:pPr marL="864000" lvl="1" indent="-324000" algn="l">
+              <a:buClr>
+                <a:srgbClr val="000000"/>
+              </a:buClr>
+              <a:buSzPct val="75000"/>
+              <a:buFont typeface="Symbol" charset="2"/>
+              <a:buChar char=""/>
+            </a:pPr>
+            <a:r>
+              <a:rPr lang="en-US" sz="1800" b="0" u="none" strike="noStrike">
+                <a:solidFill>
+                  <a:srgbClr val="000000"/>
+                </a:solidFill>
+                <a:effectLst/>
+                <a:uFillTx/>
+                <a:latin typeface="Arial"/>
+              </a:rPr>
+              <a:t>Second Outline Level</a:t>
+            </a:r>
+            <a:endParaRPr lang="en-US" sz="1800" b="0" u="none" strike="noStrike">
+              <a:solidFill>
+                <a:srgbClr val="000000"/>
+              </a:solidFill>
+              <a:effectLst/>
+              <a:uFillTx/>
+              <a:latin typeface="Arial"/>
+            </a:endParaRPr>
+          </a:p>
+          <a:p>
+            <a:pPr marL="1296000" lvl="2" indent="-288000" algn="l">
+              <a:buClr>
+                <a:srgbClr val="000000"/>
+              </a:buClr>
+              <a:buSzPct val="45000"/>
+              <a:buFont typeface="Wingdings" charset="2"/>
+              <a:buChar char=""/>
+            </a:pPr>
+            <a:r>
+              <a:rPr lang="en-US" sz="1800" b="0" u="none" strike="noStrike">
+                <a:solidFill>
+                  <a:srgbClr val="000000"/>
+                </a:solidFill>
+                <a:effectLst/>
+                <a:uFillTx/>
+                <a:latin typeface="Arial"/>
+              </a:rPr>
+              <a:t>Third Outline Level</a:t>
+            </a:r>
+            <a:endParaRPr lang="en-US" sz="1800" b="0" u="none" strike="noStrike">
+              <a:solidFill>
+                <a:srgbClr val="000000"/>
+              </a:solidFill>
+              <a:effectLst/>
+              <a:uFillTx/>
+              <a:latin typeface="Arial"/>
+            </a:endParaRPr>
+          </a:p>
+          <a:p>
+            <a:pPr marL="1728000" lvl="3" indent="-216000" algn="l">
+              <a:buClr>
+                <a:srgbClr val="000000"/>
+              </a:buClr>
+              <a:buSzPct val="75000"/>
+              <a:buFont typeface="Symbol" charset="2"/>
+              <a:buChar char=""/>
+            </a:pPr>
+            <a:r>
+              <a:rPr lang="en-US" sz="1800" b="0" u="none" strike="noStrike">
+                <a:solidFill>
+                  <a:srgbClr val="000000"/>
+                </a:solidFill>
+                <a:effectLst/>
+                <a:uFillTx/>
+                <a:latin typeface="Arial"/>
+              </a:rPr>
+              <a:t>Fourth Outline Level</a:t>
+            </a:r>
+            <a:endParaRPr lang="en-US" sz="1800" b="0" u="none" strike="noStrike">
+              <a:solidFill>
+                <a:srgbClr val="000000"/>
+              </a:solidFill>
+              <a:effectLst/>
+              <a:uFillTx/>
+              <a:latin typeface="Arial"/>
+            </a:endParaRPr>
+          </a:p>
+          <a:p>
+            <a:pPr marL="2160000" lvl="4" indent="-216000" algn="l">
+              <a:buClr>
+                <a:srgbClr val="000000"/>
+              </a:buClr>
+              <a:buSzPct val="45000"/>
+              <a:buFont typeface="Wingdings" charset="2"/>
+              <a:buChar char=""/>
+            </a:pPr>
+            <a:r>
+              <a:rPr lang="en-US" sz="1800" b="0" u="none" strike="noStrike">
+                <a:solidFill>
+                  <a:srgbClr val="000000"/>
+                </a:solidFill>
+                <a:effectLst/>
+                <a:uFillTx/>
+                <a:latin typeface="Arial"/>
+              </a:rPr>
+              <a:t>Fifth Outline Level</a:t>
+            </a:r>
+            <a:endParaRPr lang="en-US" sz="1800" b="0" u="none" strike="noStrike">
+              <a:solidFill>
+                <a:srgbClr val="000000"/>
+              </a:solidFill>
+              <a:effectLst/>
+              <a:uFillTx/>
+              <a:latin typeface="Arial"/>
+            </a:endParaRPr>
+          </a:p>
+          <a:p>
+            <a:pPr marL="2592000" lvl="5" indent="-216000" algn="l">
+              <a:buClr>
+                <a:srgbClr val="000000"/>
+              </a:buClr>
+              <a:buSzPct val="45000"/>
+              <a:buFont typeface="Wingdings" charset="2"/>
+              <a:buChar char=""/>
+            </a:pPr>
+            <a:r>
+              <a:rPr lang="en-US" sz="1800" b="0" u="none" strike="noStrike">
+                <a:solidFill>
+                  <a:srgbClr val="000000"/>
+                </a:solidFill>
+                <a:effectLst/>
+                <a:uFillTx/>
+                <a:latin typeface="Arial"/>
+              </a:rPr>
+              <a:t>Sixth Outline Level</a:t>
+            </a:r>
+            <a:endParaRPr lang="en-US" sz="1800" b="0" u="none" strike="noStrike">
+              <a:solidFill>
+                <a:srgbClr val="000000"/>
+              </a:solidFill>
+              <a:effectLst/>
+              <a:uFillTx/>
+              <a:latin typeface="Arial"/>
+            </a:endParaRPr>
+          </a:p>
+          <a:p>
+            <a:pPr marL="3024000" lvl="6" indent="-216000" algn="l">
+              <a:buClr>
+                <a:srgbClr val="000000"/>
+              </a:buClr>
+              <a:buSzPct val="45000"/>
+              <a:buFont typeface="Wingdings" charset="2"/>
+              <a:buChar char=""/>
+            </a:pPr>
+            <a:r>
+              <a:rPr lang="en-US" sz="1800" b="0" u="none" strike="noStrike">
+                <a:solidFill>
+                  <a:srgbClr val="000000"/>
+                </a:solidFill>
+                <a:effectLst/>
+                <a:uFillTx/>
+                <a:latin typeface="Arial"/>
+              </a:rPr>
+              <a:t>Seventh Outline Level</a:t>
+            </a:r>
+            <a:endParaRPr lang="en-US" sz="1800" b="0" u="none" strike="noStrike">
               <a:solidFill>
                 <a:srgbClr val="000000"/>
               </a:solidFill>
@@ -189,7 +640,7 @@
       </p:sp>
       <p:sp>
         <p:nvSpPr>
-          <p:cNvPr id="4" name="PlaceHolder 3"/>
+          <p:cNvPr id="37" name="PlaceHolder 3"/>
           <p:cNvSpPr>
             <a:spLocks noGrp="1"/>
           </p:cNvSpPr>
@@ -197,19 +648,77 @@
             <p:ph type="ftr" idx="2"/>
           </p:nvPr>
         </p:nvSpPr>
-        <p:spPr/>
+        <p:spPr>
+          <a:xfrm>
+            <a:off x="3126960" y="4685760"/>
+            <a:ext cx="2897280" cy="353520"/>
+          </a:xfrm>
+          <a:prstGeom prst="rect">
+            <a:avLst/>
+          </a:prstGeom>
+          <a:noFill/>
+          <a:ln w="0">
+            <a:noFill/>
+          </a:ln>
+        </p:spPr>
         <p:txBody>
-          <a:bodyPr/>
-          <a:p>
-            <a:r>
-              <a:t>Footer</a:t>
-            </a:r>
+          <a:bodyPr lIns="0" tIns="0" rIns="0" bIns="0" anchor="t">
+            <a:noAutofit/>
+          </a:bodyPr>
+          <a:lstStyle>
+            <a:lvl1pPr indent="0" algn="ctr">
+              <a:lnSpc>
+                <a:spcPct val="100000"/>
+              </a:lnSpc>
+              <a:buNone/>
+              <a:tabLst>
+                <a:tab pos="0" algn="l"/>
+              </a:tabLst>
+              <a:defRPr lang="en-US" sz="1400" b="0" u="none" strike="noStrike">
+                <a:solidFill>
+                  <a:srgbClr val="000000"/>
+                </a:solidFill>
+                <a:effectLst/>
+                <a:uFillTx/>
+                <a:latin typeface="Times New Roman"/>
+              </a:defRPr>
+            </a:lvl1pPr>
+          </a:lstStyle>
+          <a:p>
+            <a:pPr indent="0" algn="ctr">
+              <a:lnSpc>
+                <a:spcPct val="100000"/>
+              </a:lnSpc>
+              <a:buNone/>
+              <a:tabLst>
+                <a:tab pos="0" algn="l"/>
+              </a:tabLst>
+            </a:pPr>
+            <a:r>
+              <a:rPr lang="en-US" sz="1400" b="0" u="none" strike="noStrike">
+                <a:solidFill>
+                  <a:srgbClr val="000000"/>
+                </a:solidFill>
+                <a:effectLst/>
+                <a:uFillTx/>
+                <a:latin typeface="Times New Roman"/>
+              </a:rPr>
+              <a:t>&lt;footer&gt;</a:t>
+            </a:r>
+            <a:endParaRPr lang="en-US" sz="1400" b="0" u="none" strike="noStrike">
+              <a:solidFill>
+                <a:srgbClr val="000000"/>
+              </a:solidFill>
+              <a:effectLst/>
+              <a:uFillTx/>
+              <a:latin typeface="Times New Roman"/>
+            </a:endParaRPr>
           </a:p>
         </p:txBody>
       </p:sp>
       <p:sp>
         <p:nvSpPr>
-          <p:cNvPr id="5" name="PlaceHolder 4"/>
+          <p:cNvPr id="38" name="PlaceHolder 4"/>
           <p:cNvSpPr>
             <a:spLocks noGrp="1"/>
           </p:cNvSpPr>
@@ -217,19 +726,77 @@
             <p:ph type="sldNum" idx="3"/>
           </p:nvPr>
         </p:nvSpPr>
-        <p:spPr/>
+        <p:spPr>
+          <a:xfrm>
+            <a:off x="6555960" y="4685760"/>
+            <a:ext cx="2129400" cy="353520"/>
+          </a:xfrm>
+          <a:prstGeom prst="rect">
+            <a:avLst/>
+          </a:prstGeom>
+          <a:noFill/>
+          <a:ln w="0">
+            <a:noFill/>
+          </a:ln>
+        </p:spPr>
         <p:txBody>
-          <a:bodyPr/>
-          <a:p>
-            <a:fld id="{BB6C8172-9FB1-4ACF-81AB-798850EBA1D6}" type="slidenum">
-              <a:t>&lt;#&gt;</a:t>
+          <a:bodyPr lIns="0" tIns="0" rIns="0" bIns="0" anchor="t">
+            <a:noAutofit/>
+          </a:bodyPr>
+          <a:lstStyle>
+            <a:lvl1pPr indent="0" algn="r">
+              <a:lnSpc>
+                <a:spcPct val="100000"/>
+              </a:lnSpc>
+              <a:buNone/>
+              <a:tabLst>
+                <a:tab pos="0" algn="l"/>
+              </a:tabLst>
+              <a:defRPr lang="en-US" sz="1400" b="0" u="none" strike="noStrike">
+                <a:solidFill>
+                  <a:srgbClr val="000000"/>
+                </a:solidFill>
+                <a:effectLst/>
+                <a:uFillTx/>
+                <a:latin typeface="Times New Roman"/>
+              </a:defRPr>
+            </a:lvl1pPr>
+          </a:lstStyle>
+          <a:p>
+            <a:pPr indent="0" algn="r">
+              <a:lnSpc>
+                <a:spcPct val="100000"/>
+              </a:lnSpc>
+              <a:buNone/>
+              <a:tabLst>
+                <a:tab pos="0" algn="l"/>
+              </a:tabLst>
+            </a:pPr>
+            <a:fld id="{1F981B51-763F-4985-BA86-9F243FB4701C}" type="slidenum">
+              <a:rPr lang="en-US" sz="1400" b="0" u="none" strike="noStrike">
+                <a:solidFill>
+                  <a:srgbClr val="000000"/>
+                </a:solidFill>
+                <a:effectLst/>
+                <a:uFillTx/>
+                <a:latin typeface="Times New Roman"/>
+              </a:rPr>
+              <a:t>&lt;number&gt;</a:t>
             </a:fld>
+            <a:endParaRPr lang="en-US" sz="1400" b="0" u="none" strike="noStrike">
+              <a:solidFill>
+                <a:srgbClr val="000000"/>
+              </a:solidFill>
+              <a:effectLst/>
+              <a:uFillTx/>
+              <a:latin typeface="Times New Roman"/>
+            </a:endParaRPr>
           </a:p>
         </p:txBody>
       </p:sp>
       <p:sp>
         <p:nvSpPr>
-          <p:cNvPr id="6" name="PlaceHolder 5"/>
+          <p:cNvPr id="39" name="PlaceHolder 5"/>
           <p:cNvSpPr>
             <a:spLocks noGrp="1"/>
           </p:cNvSpPr>
@@ -237,14 +804,59 @@
             <p:ph type="dt" idx="4"/>
           </p:nvPr>
         </p:nvSpPr>
-        <p:spPr/>
+        <p:spPr>
+          <a:xfrm>
+            <a:off x="457200" y="4685760"/>
+            <a:ext cx="2129400" cy="353520"/>
+          </a:xfrm>
+          <a:prstGeom prst="rect">
+            <a:avLst/>
+          </a:prstGeom>
+          <a:noFill/>
+          <a:ln w="0">
+            <a:noFill/>
+          </a:ln>
+        </p:spPr>
         <p:txBody>
-          <a:bodyPr/>
-          <a:p>
-            <a:r>
-              <a:rPr lang="en-US"/>
-              <a:t/>
-            </a:r>
+          <a:bodyPr lIns="0" tIns="0" rIns="0" bIns="0" anchor="t">
+            <a:noAutofit/>
+          </a:bodyPr>
+          <a:lstStyle>
+            <a:lvl1pPr indent="0" algn="l">
+              <a:buNone/>
+              <a:defRPr lang="en-US" sz="1400" b="0" u="none" strike="noStrike">
+                <a:solidFill>
+                  <a:srgbClr val="000000"/>
+                </a:solidFill>
+                <a:effectLst/>
+                <a:uFillTx/>
+                <a:latin typeface="Times New Roman"/>
+              </a:defRPr>
+            </a:lvl1pPr>
+          </a:lstStyle>
+          <a:p>
+            <a:pPr indent="0" algn="l">
+              <a:buNone/>
+            </a:pPr>
+            <a:r>
+              <a:rPr lang="en-US" sz="1400" b="0" u="none" strike="noStrike">
+                <a:solidFill>
+                  <a:srgbClr val="000000"/>
+                </a:solidFill>
+                <a:effectLst/>
+                <a:uFillTx/>
+                <a:latin typeface="Times New Roman"/>
+              </a:rPr>
+              <a:t>&lt;date/time&gt;</a:t>
+            </a:r>
+            <a:endParaRPr lang="en-US" sz="1400" b="0" u="none" strike="noStrike">
+              <a:solidFill>
+                <a:srgbClr val="000000"/>
+              </a:solidFill>
+              <a:effectLst/>
+              <a:uFillTx/>
+              <a:latin typeface="Times New Roman"/>
+            </a:endParaRPr>
           </a:p>
         </p:txBody>
       </p:sp>
@@ -270,64 +882,1133 @@
           <a:chExt cx="0" cy="0"/>
         </a:xfrm>
       </p:grpSpPr>
+      <p:pic>
+        <p:nvPicPr>
+          <p:cNvPr id="40" name="Рисунок 5" descr="logo-02.jpg"/>
+          <p:cNvPicPr/>
+          <p:nvPr/>
+        </p:nvPicPr>
+        <p:blipFill>
+          <a:blip r:embed="rId2"/>
+          <a:stretch/>
+        </p:blipFill>
+        <p:spPr>
+          <a:xfrm>
+            <a:off x="114480" y="0"/>
+            <a:ext cx="1510560" cy="718560"/>
+          </a:xfrm>
+          <a:prstGeom prst="rect">
+            <a:avLst/>
+          </a:prstGeom>
+          <a:noFill/>
+          <a:ln w="0">
+            <a:noFill/>
+          </a:ln>
+        </p:spPr>
+      </p:pic>
+      <p:grpSp>
+        <p:nvGrpSpPr>
+          <p:cNvPr id="41" name="Группа 27"/>
+          <p:cNvGrpSpPr/>
+          <p:nvPr/>
+        </p:nvGrpSpPr>
+        <p:grpSpPr>
+          <a:xfrm>
+            <a:off x="360" y="5143680"/>
+            <a:ext cx="9145080" cy="1080"/>
+            <a:chOff x="360" y="5143680"/>
+            <a:chExt cx="9145080" cy="1080"/>
+          </a:xfrm>
+        </p:grpSpPr>
+        <p:cxnSp>
+          <p:nvCxnSpPr>
+            <p:cNvPr id="42" name="Прямая соединительная линия 7"/>
+            <p:cNvCxnSpPr/>
+            <p:nvPr/>
+          </p:nvCxnSpPr>
+          <p:spPr>
+            <a:xfrm flipH="1">
+              <a:off x="1836000" y="5143680"/>
+              <a:ext cx="7309800" cy="1440"/>
+            </a:xfrm>
+            <a:prstGeom prst="straightConnector1">
+              <a:avLst/>
+            </a:prstGeom>
+            <a:ln w="76200">
+              <a:solidFill>
+                <a:srgbClr val="0081A1"/>
+              </a:solidFill>
+              <a:round/>
+            </a:ln>
+          </p:spPr>
+        </p:cxnSp>
+        <p:cxnSp>
+          <p:nvCxnSpPr>
+            <p:cNvPr id="43" name="Прямая соединительная линия 9"/>
+            <p:cNvCxnSpPr/>
+            <p:nvPr/>
+          </p:nvCxnSpPr>
+          <p:spPr>
+            <a:xfrm flipH="1">
+              <a:off x="1206360" y="5143680"/>
+              <a:ext cx="649440" cy="1440"/>
+            </a:xfrm>
+            <a:prstGeom prst="straightConnector1">
+              <a:avLst/>
+            </a:prstGeom>
+            <a:ln w="76200">
+              <a:solidFill>
+                <a:srgbClr val="94C500"/>
+              </a:solidFill>
+              <a:round/>
+            </a:ln>
+          </p:spPr>
+        </p:cxnSp>
+        <p:cxnSp>
+          <p:nvCxnSpPr>
+            <p:cNvPr id="44" name="Прямая соединительная линия 11"/>
+            <p:cNvCxnSpPr/>
+            <p:nvPr/>
+          </p:nvCxnSpPr>
+          <p:spPr>
+            <a:xfrm flipH="1">
+              <a:off x="525600" y="5143680"/>
+              <a:ext cx="721800" cy="1440"/>
+            </a:xfrm>
+            <a:prstGeom prst="straightConnector1">
+              <a:avLst/>
+            </a:prstGeom>
+            <a:ln w="76200">
+              <a:solidFill>
+                <a:srgbClr val="FBC800"/>
+              </a:solidFill>
+              <a:round/>
+            </a:ln>
+          </p:spPr>
+        </p:cxnSp>
+        <p:cxnSp>
+          <p:nvCxnSpPr>
+            <p:cNvPr id="45" name="Прямая соединительная линия 12"/>
+            <p:cNvCxnSpPr/>
+            <p:nvPr/>
+          </p:nvCxnSpPr>
+          <p:spPr>
+            <a:xfrm flipH="1">
+              <a:off x="360" y="5143680"/>
+              <a:ext cx="612720" cy="1440"/>
+            </a:xfrm>
+            <a:prstGeom prst="straightConnector1">
+              <a:avLst/>
+            </a:prstGeom>
+            <a:ln w="76200">
+              <a:solidFill>
+                <a:srgbClr val="E42A00"/>
+              </a:solidFill>
+              <a:round/>
+            </a:ln>
+          </p:spPr>
+        </p:cxnSp>
+      </p:grpSp>
       <p:sp>
         <p:nvSpPr>
-          <p:cNvPr id="2" name="PlaceHolder 1"/>
+          <p:cNvPr id="46" name="PlaceHolder 1"/>
           <p:cNvSpPr>
             <a:spLocks noGrp="1"/>
           </p:cNvSpPr>
           <p:nvPr>
-            <p:ph type="ftr" idx="2"/>
+            <p:ph type="title"/>
           </p:nvPr>
         </p:nvSpPr>
-        <p:spPr/>
+        <p:spPr>
+          <a:xfrm>
+            <a:off x="1784520" y="291240"/>
+            <a:ext cx="7009920" cy="274680"/>
+          </a:xfrm>
+          <a:prstGeom prst="rect">
+            <a:avLst/>
+          </a:prstGeom>
+          <a:noFill/>
+          <a:ln w="0">
+            <a:noFill/>
+          </a:ln>
+        </p:spPr>
         <p:txBody>
-          <a:bodyPr/>
-          <a:p>
-            <a:r>
-              <a:t>Footer</a:t>
-            </a:r>
+          <a:bodyPr lIns="0" tIns="0" rIns="0" bIns="0" anchor="ctr">
+            <a:spAutoFit/>
+          </a:bodyPr>
+          <a:lstStyle>
+            <a:lvl1pPr indent="0" algn="l">
+              <a:buNone/>
+              <a:defRPr lang="en-US" sz="1800" b="0" u="none" strike="noStrike">
+                <a:solidFill>
+                  <a:srgbClr val="000000"/>
+                </a:solidFill>
+                <a:effectLst/>
+                <a:uFillTx/>
+                <a:latin typeface="Arial"/>
+              </a:defRPr>
+            </a:lvl1pPr>
+          </a:lstStyle>
+          <a:p>
+            <a:pPr indent="0" algn="l">
+              <a:buNone/>
+            </a:pPr>
+            <a:r>
+              <a:rPr lang="en-US" sz="1800" b="0" u="none" strike="noStrike">
+                <a:solidFill>
+                  <a:srgbClr val="000000"/>
+                </a:solidFill>
+                <a:effectLst/>
+                <a:uFillTx/>
+                <a:latin typeface="Arial"/>
+              </a:rPr>
+              <a:t>Click to edit the title text format</a:t>
+            </a:r>
+            <a:endParaRPr lang="en-US" sz="1800" b="0" u="none" strike="noStrike">
+              <a:solidFill>
+                <a:srgbClr val="000000"/>
+              </a:solidFill>
+              <a:effectLst/>
+              <a:uFillTx/>
+              <a:latin typeface="Arial"/>
+            </a:endParaRPr>
           </a:p>
         </p:txBody>
       </p:sp>
       <p:sp>
         <p:nvSpPr>
-          <p:cNvPr id="3" name="PlaceHolder 2"/>
+          <p:cNvPr id="47" name="PlaceHolder 2"/>
           <p:cNvSpPr>
             <a:spLocks noGrp="1"/>
           </p:cNvSpPr>
           <p:nvPr>
-            <p:ph type="sldNum" idx="3"/>
+            <p:ph type="body"/>
           </p:nvPr>
         </p:nvSpPr>
-        <p:spPr/>
+        <p:spPr>
+          <a:xfrm>
+            <a:off x="457200" y="1203480"/>
+            <a:ext cx="8228520" cy="2982240"/>
+          </a:xfrm>
+          <a:prstGeom prst="rect">
+            <a:avLst/>
+          </a:prstGeom>
+          <a:noFill/>
+          <a:ln w="0">
+            <a:noFill/>
+          </a:ln>
+        </p:spPr>
         <p:txBody>
-          <a:bodyPr/>
-          <a:p>
-            <a:fld id="{FA26E09E-4BBE-4D41-8D29-B48EB4F5D76A}" type="slidenum">
-              <a:t>&lt;#&gt;</a:t>
-            </a:fld>
+          <a:bodyPr lIns="0" tIns="0" rIns="0" bIns="0" anchor="t">
+            <a:normAutofit/>
+          </a:bodyPr>
+          <a:lstStyle>
+            <a:lvl1pPr algn="l">
+              <a:buClr>
+                <a:srgbClr val="000000"/>
+              </a:buClr>
+              <a:buFont typeface="Wingdings" charset="2"/>
+              <a:buChar char=""/>
+              <a:defRPr lang="en-US" sz="1800" b="0" u="none" strike="noStrike">
+                <a:solidFill>
+                  <a:srgbClr val="000000"/>
+                </a:solidFill>
+                <a:effectLst/>
+                <a:uFillTx/>
+                <a:latin typeface="Arial"/>
+              </a:defRPr>
+            </a:lvl1pPr>
+            <a:lvl2pPr lvl="1" algn="l">
+              <a:buClr>
+                <a:srgbClr val="000000"/>
+              </a:buClr>
+              <a:buSzPct val="75000"/>
+              <a:buFont typeface="Symbol" charset="2"/>
+              <a:buChar char=""/>
+              <a:defRPr lang="en-US" sz="1800" b="0" u="none" strike="noStrike">
+                <a:solidFill>
+                  <a:srgbClr val="000000"/>
+                </a:solidFill>
+                <a:effectLst/>
+                <a:uFillTx/>
+                <a:latin typeface="Arial"/>
+              </a:defRPr>
+            </a:lvl2pPr>
+            <a:lvl3pPr lvl="2" algn="l">
+              <a:buClr>
+                <a:srgbClr val="000000"/>
+              </a:buClr>
+              <a:buSzPct val="45000"/>
+              <a:buFont typeface="Wingdings" charset="2"/>
+              <a:buChar char=""/>
+              <a:defRPr lang="en-US" sz="1800" b="0" u="none" strike="noStrike">
+                <a:solidFill>
+                  <a:srgbClr val="000000"/>
+                </a:solidFill>
+                <a:effectLst/>
+                <a:uFillTx/>
+                <a:latin typeface="Arial"/>
+              </a:defRPr>
+            </a:lvl3pPr>
+            <a:lvl4pPr lvl="3" algn="l">
+              <a:buClr>
+                <a:srgbClr val="000000"/>
+              </a:buClr>
+              <a:buSzPct val="75000"/>
+              <a:buFont typeface="Symbol" charset="2"/>
+              <a:buChar char=""/>
+              <a:defRPr lang="en-US" sz="1800" b="0" u="none" strike="noStrike">
+                <a:solidFill>
+                  <a:srgbClr val="000000"/>
+                </a:solidFill>
+                <a:effectLst/>
+                <a:uFillTx/>
+                <a:latin typeface="Arial"/>
+              </a:defRPr>
+            </a:lvl4pPr>
+            <a:lvl5pPr lvl="4" algn="l">
+              <a:buClr>
+                <a:srgbClr val="000000"/>
+              </a:buClr>
+              <a:buSzPct val="45000"/>
+              <a:buFont typeface="Wingdings" charset="2"/>
+              <a:buChar char=""/>
+              <a:defRPr lang="en-US" sz="1800" b="0" u="none" strike="noStrike">
+                <a:solidFill>
+                  <a:srgbClr val="000000"/>
+                </a:solidFill>
+                <a:effectLst/>
+                <a:uFillTx/>
+                <a:latin typeface="Arial"/>
+              </a:defRPr>
+            </a:lvl5pPr>
+            <a:lvl6pPr lvl="5" algn="l">
+              <a:buClr>
+                <a:srgbClr val="000000"/>
+              </a:buClr>
+              <a:buSzPct val="45000"/>
+              <a:buFont typeface="Wingdings" charset="2"/>
+              <a:buChar char=""/>
+              <a:defRPr lang="en-US" sz="1800" b="0" u="none" strike="noStrike">
+                <a:solidFill>
+                  <a:srgbClr val="000000"/>
+                </a:solidFill>
+                <a:effectLst/>
+                <a:uFillTx/>
+                <a:latin typeface="Arial"/>
+              </a:defRPr>
+            </a:lvl6pPr>
+            <a:lvl7pPr lvl="6" algn="l">
+              <a:buClr>
+                <a:srgbClr val="000000"/>
+              </a:buClr>
+              <a:buSzPct val="45000"/>
+              <a:buFont typeface="Wingdings" charset="2"/>
+              <a:buChar char=""/>
+              <a:defRPr lang="en-US" sz="1800" b="0" u="none" strike="noStrike">
+                <a:solidFill>
+                  <a:srgbClr val="000000"/>
+                </a:solidFill>
+                <a:effectLst/>
+                <a:uFillTx/>
+                <a:latin typeface="Arial"/>
+              </a:defRPr>
+            </a:lvl7pPr>
+          </a:lstStyle>
+          <a:p>
+            <a:pPr indent="-324000" algn="l">
+              <a:buClr>
+                <a:srgbClr val="000000"/>
+              </a:buClr>
+              <a:buFont typeface="Wingdings" charset="2"/>
+              <a:buChar char=""/>
+            </a:pPr>
+            <a:r>
+              <a:rPr lang="en-US" sz="1800" b="0" u="none" strike="noStrike">
+                <a:solidFill>
+                  <a:srgbClr val="000000"/>
+                </a:solidFill>
+                <a:effectLst/>
+                <a:uFillTx/>
+                <a:latin typeface="Arial"/>
+              </a:rPr>
+              <a:t>Click to edit the outline text format</a:t>
+            </a:r>
+            <a:endParaRPr lang="en-US" sz="1800" b="0" u="none" strike="noStrike">
+              <a:solidFill>
+                <a:srgbClr val="000000"/>
+              </a:solidFill>
+              <a:effectLst/>
+              <a:uFillTx/>
+              <a:latin typeface="Arial"/>
+            </a:endParaRPr>
+          </a:p>
+          <a:p>
+            <a:pPr marL="864000" lvl="1" indent="-324000" algn="l">
+              <a:buClr>
+                <a:srgbClr val="000000"/>
+              </a:buClr>
+              <a:buSzPct val="75000"/>
+              <a:buFont typeface="Symbol" charset="2"/>
+              <a:buChar char=""/>
+            </a:pPr>
+            <a:r>
+              <a:rPr lang="en-US" sz="1800" b="0" u="none" strike="noStrike">
+                <a:solidFill>
+                  <a:srgbClr val="000000"/>
+                </a:solidFill>
+                <a:effectLst/>
+                <a:uFillTx/>
+                <a:latin typeface="Arial"/>
+              </a:rPr>
+              <a:t>Second Outline Level</a:t>
+            </a:r>
+            <a:endParaRPr lang="en-US" sz="1800" b="0" u="none" strike="noStrike">
+              <a:solidFill>
+                <a:srgbClr val="000000"/>
+              </a:solidFill>
+              <a:effectLst/>
+              <a:uFillTx/>
+              <a:latin typeface="Arial"/>
+            </a:endParaRPr>
+          </a:p>
+          <a:p>
+            <a:pPr marL="1296000" lvl="2" indent="-288000" algn="l">
+              <a:buClr>
+                <a:srgbClr val="000000"/>
+              </a:buClr>
+              <a:buSzPct val="45000"/>
+              <a:buFont typeface="Wingdings" charset="2"/>
+              <a:buChar char=""/>
+            </a:pPr>
+            <a:r>
+              <a:rPr lang="en-US" sz="1800" b="0" u="none" strike="noStrike">
+                <a:solidFill>
+                  <a:srgbClr val="000000"/>
+                </a:solidFill>
+                <a:effectLst/>
+                <a:uFillTx/>
+                <a:latin typeface="Arial"/>
+              </a:rPr>
+              <a:t>Third Outline Level</a:t>
+            </a:r>
+            <a:endParaRPr lang="en-US" sz="1800" b="0" u="none" strike="noStrike">
+              <a:solidFill>
+                <a:srgbClr val="000000"/>
+              </a:solidFill>
+              <a:effectLst/>
+              <a:uFillTx/>
+              <a:latin typeface="Arial"/>
+            </a:endParaRPr>
+          </a:p>
+          <a:p>
+            <a:pPr marL="1728000" lvl="3" indent="-216000" algn="l">
+              <a:buClr>
+                <a:srgbClr val="000000"/>
+              </a:buClr>
+              <a:buSzPct val="75000"/>
+              <a:buFont typeface="Symbol" charset="2"/>
+              <a:buChar char=""/>
+            </a:pPr>
+            <a:r>
+              <a:rPr lang="en-US" sz="1800" b="0" u="none" strike="noStrike">
+                <a:solidFill>
+                  <a:srgbClr val="000000"/>
+                </a:solidFill>
+                <a:effectLst/>
+                <a:uFillTx/>
+                <a:latin typeface="Arial"/>
+              </a:rPr>
+              <a:t>Fourth Outline Level</a:t>
+            </a:r>
+            <a:endParaRPr lang="en-US" sz="1800" b="0" u="none" strike="noStrike">
+              <a:solidFill>
+                <a:srgbClr val="000000"/>
+              </a:solidFill>
+              <a:effectLst/>
+              <a:uFillTx/>
+              <a:latin typeface="Arial"/>
+            </a:endParaRPr>
+          </a:p>
+          <a:p>
+            <a:pPr marL="2160000" lvl="4" indent="-216000" algn="l">
+              <a:buClr>
+                <a:srgbClr val="000000"/>
+              </a:buClr>
+              <a:buSzPct val="45000"/>
+              <a:buFont typeface="Wingdings" charset="2"/>
+              <a:buChar char=""/>
+            </a:pPr>
+            <a:r>
+              <a:rPr lang="en-US" sz="1800" b="0" u="none" strike="noStrike">
+                <a:solidFill>
+                  <a:srgbClr val="000000"/>
+                </a:solidFill>
+                <a:effectLst/>
+                <a:uFillTx/>
+                <a:latin typeface="Arial"/>
+              </a:rPr>
+              <a:t>Fifth Outline Level</a:t>
+            </a:r>
+            <a:endParaRPr lang="en-US" sz="1800" b="0" u="none" strike="noStrike">
+              <a:solidFill>
+                <a:srgbClr val="000000"/>
+              </a:solidFill>
+              <a:effectLst/>
+              <a:uFillTx/>
+              <a:latin typeface="Arial"/>
+            </a:endParaRPr>
+          </a:p>
+          <a:p>
+            <a:pPr marL="2592000" lvl="5" indent="-216000" algn="l">
+              <a:buClr>
+                <a:srgbClr val="000000"/>
+              </a:buClr>
+              <a:buSzPct val="45000"/>
+              <a:buFont typeface="Wingdings" charset="2"/>
+              <a:buChar char=""/>
+            </a:pPr>
+            <a:r>
+              <a:rPr lang="en-US" sz="1800" b="0" u="none" strike="noStrike">
+                <a:solidFill>
+                  <a:srgbClr val="000000"/>
+                </a:solidFill>
+                <a:effectLst/>
+                <a:uFillTx/>
+                <a:latin typeface="Arial"/>
+              </a:rPr>
+              <a:t>Sixth Outline Level</a:t>
+            </a:r>
+            <a:endParaRPr lang="en-US" sz="1800" b="0" u="none" strike="noStrike">
+              <a:solidFill>
+                <a:srgbClr val="000000"/>
+              </a:solidFill>
+              <a:effectLst/>
+              <a:uFillTx/>
+              <a:latin typeface="Arial"/>
+            </a:endParaRPr>
+          </a:p>
+          <a:p>
+            <a:pPr marL="3024000" lvl="6" indent="-216000" algn="l">
+              <a:buClr>
+                <a:srgbClr val="000000"/>
+              </a:buClr>
+              <a:buSzPct val="45000"/>
+              <a:buFont typeface="Wingdings" charset="2"/>
+              <a:buChar char=""/>
+            </a:pPr>
+            <a:r>
+              <a:rPr lang="en-US" sz="1800" b="0" u="none" strike="noStrike">
+                <a:solidFill>
+                  <a:srgbClr val="000000"/>
+                </a:solidFill>
+                <a:effectLst/>
+                <a:uFillTx/>
+                <a:latin typeface="Arial"/>
+              </a:rPr>
+              <a:t>Seventh Outline Level</a:t>
+            </a:r>
+            <a:endParaRPr lang="en-US" sz="1800" b="0" u="none" strike="noStrike">
+              <a:solidFill>
+                <a:srgbClr val="000000"/>
+              </a:solidFill>
+              <a:effectLst/>
+              <a:uFillTx/>
+              <a:latin typeface="Arial"/>
+            </a:endParaRPr>
           </a:p>
         </p:txBody>
       </p:sp>
       <p:sp>
         <p:nvSpPr>
-          <p:cNvPr id="4" name="PlaceHolder 3"/>
+          <p:cNvPr id="48" name="PlaceHolder 3"/>
           <p:cNvSpPr>
             <a:spLocks noGrp="1"/>
           </p:cNvSpPr>
           <p:nvPr>
-            <p:ph type="dt" idx="4"/>
+            <p:ph type="ftr" idx="5"/>
           </p:nvPr>
         </p:nvSpPr>
-        <p:spPr/>
+        <p:spPr>
+          <a:xfrm>
+            <a:off x="3126960" y="4685760"/>
+            <a:ext cx="2897280" cy="353520"/>
+          </a:xfrm>
+          <a:prstGeom prst="rect">
+            <a:avLst/>
+          </a:prstGeom>
+          <a:noFill/>
+          <a:ln w="0">
+            <a:noFill/>
+          </a:ln>
+        </p:spPr>
         <p:txBody>
-          <a:bodyPr/>
-          <a:p>
-            <a:r>
-              <a:rPr lang="en-US"/>
-              <a:t/>
-            </a:r>
+          <a:bodyPr lIns="0" tIns="0" rIns="0" bIns="0" anchor="t">
+            <a:noAutofit/>
+          </a:bodyPr>
+          <a:lstStyle>
+            <a:lvl1pPr indent="0" algn="ctr">
+              <a:lnSpc>
+                <a:spcPct val="100000"/>
+              </a:lnSpc>
+              <a:buNone/>
+              <a:tabLst>
+                <a:tab pos="0" algn="l"/>
+              </a:tabLst>
+              <a:defRPr lang="en-US" sz="1400" b="0" u="none" strike="noStrike">
+                <a:solidFill>
+                  <a:srgbClr val="000000"/>
+                </a:solidFill>
+                <a:effectLst/>
+                <a:uFillTx/>
+                <a:latin typeface="Times New Roman"/>
+              </a:defRPr>
+            </a:lvl1pPr>
+          </a:lstStyle>
+          <a:p>
+            <a:pPr indent="0" algn="ctr">
+              <a:lnSpc>
+                <a:spcPct val="100000"/>
+              </a:lnSpc>
+              <a:buNone/>
+              <a:tabLst>
+                <a:tab pos="0" algn="l"/>
+              </a:tabLst>
+            </a:pPr>
+            <a:r>
+              <a:rPr lang="en-US" sz="1400" b="0" u="none" strike="noStrike">
+                <a:solidFill>
+                  <a:srgbClr val="000000"/>
+                </a:solidFill>
+                <a:effectLst/>
+                <a:uFillTx/>
+                <a:latin typeface="Times New Roman"/>
+              </a:rPr>
+              <a:t>&lt;footer&gt;</a:t>
+            </a:r>
+            <a:endParaRPr lang="en-US" sz="1400" b="0" u="none" strike="noStrike">
+              <a:solidFill>
+                <a:srgbClr val="000000"/>
+              </a:solidFill>
+              <a:effectLst/>
+              <a:uFillTx/>
+              <a:latin typeface="Times New Roman"/>
+            </a:endParaRPr>
+          </a:p>
+        </p:txBody>
+      </p:sp>
+      <p:sp>
+        <p:nvSpPr>
+          <p:cNvPr id="49" name="PlaceHolder 4"/>
+          <p:cNvSpPr>
+            <a:spLocks noGrp="1"/>
+          </p:cNvSpPr>
+          <p:nvPr>
+            <p:ph type="sldNum" idx="6"/>
+          </p:nvPr>
+        </p:nvSpPr>
+        <p:spPr>
+          <a:xfrm>
+            <a:off x="6555960" y="4685760"/>
+            <a:ext cx="2129400" cy="353520"/>
+          </a:xfrm>
+          <a:prstGeom prst="rect">
+            <a:avLst/>
+          </a:prstGeom>
+          <a:noFill/>
+          <a:ln w="0">
+            <a:noFill/>
+          </a:ln>
+        </p:spPr>
+        <p:txBody>
+          <a:bodyPr lIns="0" tIns="0" rIns="0" bIns="0" anchor="t">
+            <a:noAutofit/>
+          </a:bodyPr>
+          <a:lstStyle>
+            <a:lvl1pPr indent="0" algn="r">
+              <a:lnSpc>
+                <a:spcPct val="100000"/>
+              </a:lnSpc>
+              <a:buNone/>
+              <a:tabLst>
+                <a:tab pos="0" algn="l"/>
+              </a:tabLst>
+              <a:defRPr lang="en-US" sz="1400" b="0" u="none" strike="noStrike">
+                <a:solidFill>
+                  <a:srgbClr val="000000"/>
+                </a:solidFill>
+                <a:effectLst/>
+                <a:uFillTx/>
+                <a:latin typeface="Times New Roman"/>
+              </a:defRPr>
+            </a:lvl1pPr>
+          </a:lstStyle>
+          <a:p>
+            <a:pPr indent="0" algn="r">
+              <a:lnSpc>
+                <a:spcPct val="100000"/>
+              </a:lnSpc>
+              <a:buNone/>
+              <a:tabLst>
+                <a:tab pos="0" algn="l"/>
+              </a:tabLst>
+            </a:pPr>
+            <a:fld id="{DE68663A-2246-4954-92E7-BD089C2A8E6B}" type="slidenum">
+              <a:rPr lang="en-US" sz="1400" b="0" u="none" strike="noStrike">
+                <a:solidFill>
+                  <a:srgbClr val="000000"/>
+                </a:solidFill>
+                <a:effectLst/>
+                <a:uFillTx/>
+                <a:latin typeface="Times New Roman"/>
+              </a:rPr>
+              <a:t>&lt;number&gt;</a:t>
+            </a:fld>
+            <a:endParaRPr lang="en-US" sz="1400" b="0" u="none" strike="noStrike">
+              <a:solidFill>
+                <a:srgbClr val="000000"/>
+              </a:solidFill>
+              <a:effectLst/>
+              <a:uFillTx/>
+              <a:latin typeface="Times New Roman"/>
+            </a:endParaRPr>
+          </a:p>
+        </p:txBody>
+      </p:sp>
+      <p:sp>
+        <p:nvSpPr>
+          <p:cNvPr id="50" name="PlaceHolder 5"/>
+          <p:cNvSpPr>
+            <a:spLocks noGrp="1"/>
+          </p:cNvSpPr>
+          <p:nvPr>
+            <p:ph type="dt" idx="7"/>
+          </p:nvPr>
+        </p:nvSpPr>
+        <p:spPr>
+          <a:xfrm>
+            <a:off x="457200" y="4685760"/>
+            <a:ext cx="2129400" cy="353520"/>
+          </a:xfrm>
+          <a:prstGeom prst="rect">
+            <a:avLst/>
+          </a:prstGeom>
+          <a:noFill/>
+          <a:ln w="0">
+            <a:noFill/>
+          </a:ln>
+        </p:spPr>
+        <p:txBody>
+          <a:bodyPr lIns="0" tIns="0" rIns="0" bIns="0" anchor="t">
+            <a:noAutofit/>
+          </a:bodyPr>
+          <a:lstStyle>
+            <a:lvl1pPr indent="0" algn="l">
+              <a:buNone/>
+              <a:defRPr lang="en-US" sz="1400" b="0" u="none" strike="noStrike">
+                <a:solidFill>
+                  <a:srgbClr val="000000"/>
+                </a:solidFill>
+                <a:effectLst/>
+                <a:uFillTx/>
+                <a:latin typeface="Times New Roman"/>
+              </a:defRPr>
+            </a:lvl1pPr>
+          </a:lstStyle>
+          <a:p>
+            <a:pPr indent="0" algn="l">
+              <a:buNone/>
+            </a:pPr>
+            <a:r>
+              <a:rPr lang="en-US" sz="1400" b="0" u="none" strike="noStrike">
+                <a:solidFill>
+                  <a:srgbClr val="000000"/>
+                </a:solidFill>
+                <a:effectLst/>
+                <a:uFillTx/>
+                <a:latin typeface="Times New Roman"/>
+              </a:rPr>
+              <a:t>&lt;date/time&gt;</a:t>
+            </a:r>
+            <a:endParaRPr lang="en-US" sz="1400" b="0" u="none" strike="noStrike">
+              <a:solidFill>
+                <a:srgbClr val="000000"/>
+              </a:solidFill>
+              <a:effectLst/>
+              <a:uFillTx/>
+              <a:latin typeface="Times New Roman"/>
+            </a:endParaRPr>
+          </a:p>
+        </p:txBody>
+      </p:sp>
+    </p:spTree>
+  </p:cSld>
+</p:sldLayout>
+</file>
+
+<file path=ppt/slideLayouts/slideLayout5.xml><?xml version="1.0" encoding="utf-8"?>
+<p:sldLayout xmlns:a="http://schemas.openxmlformats.org/drawingml/2006/main" xmlns:p="http://schemas.openxmlformats.org/presentationml/2006/main" xmlns:r="http://schemas.openxmlformats.org/officeDocument/2006/relationships" xmlns:p14="http://schemas.microsoft.com/office/powerpoint/2010/main" xmlns:p15="http://schemas.microsoft.com/office/powerpoint/2012/main" xmlns:mc="http://schemas.openxmlformats.org/markup-compatibility/2006" type="blank" preserve="1">
+  <p:cSld name="Default 1">
+    <p:spTree>
+      <p:nvGrpSpPr>
+        <p:cNvPr id="1" name=""/>
+        <p:cNvGrpSpPr/>
+        <p:nvPr/>
+      </p:nvGrpSpPr>
+      <p:grpSpPr>
+        <a:xfrm>
+          <a:off x="0" y="0"/>
+          <a:ext cx="0" cy="0"/>
+          <a:chOff x="0" y="0"/>
+          <a:chExt cx="0" cy="0"/>
+        </a:xfrm>
+      </p:grpSpPr>
+      <p:pic>
+        <p:nvPicPr>
+          <p:cNvPr id="51" name="Рисунок 5" descr="logo-02.jpg"/>
+          <p:cNvPicPr/>
+          <p:nvPr/>
+        </p:nvPicPr>
+        <p:blipFill>
+          <a:blip r:embed="rId2"/>
+          <a:stretch/>
+        </p:blipFill>
+        <p:spPr>
+          <a:xfrm>
+            <a:off x="114480" y="0"/>
+            <a:ext cx="1510560" cy="718560"/>
+          </a:xfrm>
+          <a:prstGeom prst="rect">
+            <a:avLst/>
+          </a:prstGeom>
+          <a:noFill/>
+          <a:ln w="0">
+            <a:noFill/>
+          </a:ln>
+        </p:spPr>
+      </p:pic>
+      <p:grpSp>
+        <p:nvGrpSpPr>
+          <p:cNvPr id="52" name="Группа 27"/>
+          <p:cNvGrpSpPr/>
+          <p:nvPr/>
+        </p:nvGrpSpPr>
+        <p:grpSpPr>
+          <a:xfrm>
+            <a:off x="360" y="5143680"/>
+            <a:ext cx="9145080" cy="1080"/>
+            <a:chOff x="360" y="5143680"/>
+            <a:chExt cx="9145080" cy="1080"/>
+          </a:xfrm>
+        </p:grpSpPr>
+        <p:cxnSp>
+          <p:nvCxnSpPr>
+            <p:cNvPr id="53" name="Прямая соединительная линия 7"/>
+            <p:cNvCxnSpPr/>
+            <p:nvPr/>
+          </p:nvCxnSpPr>
+          <p:spPr>
+            <a:xfrm flipH="1">
+              <a:off x="1836000" y="5143680"/>
+              <a:ext cx="7309800" cy="1440"/>
+            </a:xfrm>
+            <a:prstGeom prst="straightConnector1">
+              <a:avLst/>
+            </a:prstGeom>
+            <a:ln w="76200">
+              <a:solidFill>
+                <a:srgbClr val="0081A1"/>
+              </a:solidFill>
+              <a:round/>
+            </a:ln>
+          </p:spPr>
+        </p:cxnSp>
+        <p:cxnSp>
+          <p:nvCxnSpPr>
+            <p:cNvPr id="54" name="Прямая соединительная линия 9"/>
+            <p:cNvCxnSpPr/>
+            <p:nvPr/>
+          </p:nvCxnSpPr>
+          <p:spPr>
+            <a:xfrm flipH="1">
+              <a:off x="1206360" y="5143680"/>
+              <a:ext cx="649440" cy="1440"/>
+            </a:xfrm>
+            <a:prstGeom prst="straightConnector1">
+              <a:avLst/>
+            </a:prstGeom>
+            <a:ln w="76200">
+              <a:solidFill>
+                <a:srgbClr val="94C500"/>
+              </a:solidFill>
+              <a:round/>
+            </a:ln>
+          </p:spPr>
+        </p:cxnSp>
+        <p:cxnSp>
+          <p:nvCxnSpPr>
+            <p:cNvPr id="55" name="Прямая соединительная линия 11"/>
+            <p:cNvCxnSpPr/>
+            <p:nvPr/>
+          </p:nvCxnSpPr>
+          <p:spPr>
+            <a:xfrm flipH="1">
+              <a:off x="525600" y="5143680"/>
+              <a:ext cx="721800" cy="1440"/>
+            </a:xfrm>
+            <a:prstGeom prst="straightConnector1">
+              <a:avLst/>
+            </a:prstGeom>
+            <a:ln w="76200">
+              <a:solidFill>
+                <a:srgbClr val="FBC800"/>
+              </a:solidFill>
+              <a:round/>
+            </a:ln>
+          </p:spPr>
+        </p:cxnSp>
+        <p:cxnSp>
+          <p:nvCxnSpPr>
+            <p:cNvPr id="56" name="Прямая соединительная линия 12"/>
+            <p:cNvCxnSpPr/>
+            <p:nvPr/>
+          </p:nvCxnSpPr>
+          <p:spPr>
+            <a:xfrm flipH="1">
+              <a:off x="360" y="5143680"/>
+              <a:ext cx="612720" cy="1440"/>
+            </a:xfrm>
+            <a:prstGeom prst="straightConnector1">
+              <a:avLst/>
+            </a:prstGeom>
+            <a:ln w="76200">
+              <a:solidFill>
+                <a:srgbClr val="E42A00"/>
+              </a:solidFill>
+              <a:round/>
+            </a:ln>
+          </p:spPr>
+        </p:cxnSp>
+      </p:grpSp>
+      <p:sp>
+        <p:nvSpPr>
+          <p:cNvPr id="57" name="PlaceHolder 1"/>
+          <p:cNvSpPr>
+            <a:spLocks noGrp="1"/>
+          </p:cNvSpPr>
+          <p:nvPr>
+            <p:ph type="ftr" idx="8"/>
+          </p:nvPr>
+        </p:nvSpPr>
+        <p:spPr>
+          <a:xfrm>
+            <a:off x="3126960" y="4685760"/>
+            <a:ext cx="2897280" cy="353520"/>
+          </a:xfrm>
+          <a:prstGeom prst="rect">
+            <a:avLst/>
+          </a:prstGeom>
+          <a:noFill/>
+          <a:ln w="0">
+            <a:noFill/>
+          </a:ln>
+        </p:spPr>
+        <p:txBody>
+          <a:bodyPr lIns="0" tIns="0" rIns="0" bIns="0" anchor="t">
+            <a:noAutofit/>
+          </a:bodyPr>
+          <a:lstStyle>
+            <a:lvl1pPr indent="0" algn="ctr">
+              <a:lnSpc>
+                <a:spcPct val="100000"/>
+              </a:lnSpc>
+              <a:buNone/>
+              <a:tabLst>
+                <a:tab pos="0" algn="l"/>
+              </a:tabLst>
+              <a:defRPr lang="en-US" sz="1400" b="0" u="none" strike="noStrike">
+                <a:solidFill>
+                  <a:srgbClr val="000000"/>
+                </a:solidFill>
+                <a:effectLst/>
+                <a:uFillTx/>
+                <a:latin typeface="Times New Roman"/>
+              </a:defRPr>
+            </a:lvl1pPr>
+          </a:lstStyle>
+          <a:p>
+            <a:pPr indent="0" algn="ctr">
+              <a:lnSpc>
+                <a:spcPct val="100000"/>
+              </a:lnSpc>
+              <a:buNone/>
+              <a:tabLst>
+                <a:tab pos="0" algn="l"/>
+              </a:tabLst>
+            </a:pPr>
+            <a:r>
+              <a:rPr lang="en-US" sz="1400" b="0" u="none" strike="noStrike">
+                <a:solidFill>
+                  <a:srgbClr val="000000"/>
+                </a:solidFill>
+                <a:effectLst/>
+                <a:uFillTx/>
+                <a:latin typeface="Times New Roman"/>
+              </a:rPr>
+              <a:t>&lt;footer&gt;</a:t>
+            </a:r>
+            <a:endParaRPr lang="en-US" sz="1400" b="0" u="none" strike="noStrike">
+              <a:solidFill>
+                <a:srgbClr val="000000"/>
+              </a:solidFill>
+              <a:effectLst/>
+              <a:uFillTx/>
+              <a:latin typeface="Times New Roman"/>
+            </a:endParaRPr>
+          </a:p>
+        </p:txBody>
+      </p:sp>
+      <p:sp>
+        <p:nvSpPr>
+          <p:cNvPr id="58" name="PlaceHolder 2"/>
+          <p:cNvSpPr>
+            <a:spLocks noGrp="1"/>
+          </p:cNvSpPr>
+          <p:nvPr>
+            <p:ph type="sldNum" idx="9"/>
+          </p:nvPr>
+        </p:nvSpPr>
+        <p:spPr>
+          <a:xfrm>
+            <a:off x="6555960" y="4685760"/>
+            <a:ext cx="2129400" cy="353520"/>
+          </a:xfrm>
+          <a:prstGeom prst="rect">
+            <a:avLst/>
+          </a:prstGeom>
+          <a:noFill/>
+          <a:ln w="0">
+            <a:noFill/>
+          </a:ln>
+        </p:spPr>
+        <p:txBody>
+          <a:bodyPr lIns="0" tIns="0" rIns="0" bIns="0" anchor="t">
+            <a:noAutofit/>
+          </a:bodyPr>
+          <a:lstStyle>
+            <a:lvl1pPr indent="0" algn="r">
+              <a:lnSpc>
+                <a:spcPct val="100000"/>
+              </a:lnSpc>
+              <a:buNone/>
+              <a:tabLst>
+                <a:tab pos="0" algn="l"/>
+              </a:tabLst>
+              <a:defRPr lang="en-US" sz="1400" b="0" u="none" strike="noStrike">
+                <a:solidFill>
+                  <a:srgbClr val="000000"/>
+                </a:solidFill>
+                <a:effectLst/>
+                <a:uFillTx/>
+                <a:latin typeface="Times New Roman"/>
+              </a:defRPr>
+            </a:lvl1pPr>
+          </a:lstStyle>
+          <a:p>
+            <a:pPr indent="0" algn="r">
+              <a:lnSpc>
+                <a:spcPct val="100000"/>
+              </a:lnSpc>
+              <a:buNone/>
+              <a:tabLst>
+                <a:tab pos="0" algn="l"/>
+              </a:tabLst>
+            </a:pPr>
+            <a:fld id="{33C101C3-D4CD-4F93-82CF-F79A06AD2709}" type="slidenum">
+              <a:rPr lang="en-US" sz="1400" b="0" u="none" strike="noStrike">
+                <a:solidFill>
+                  <a:srgbClr val="000000"/>
+                </a:solidFill>
+                <a:effectLst/>
+                <a:uFillTx/>
+                <a:latin typeface="Times New Roman"/>
+              </a:rPr>
+              <a:t>&lt;number&gt;</a:t>
+            </a:fld>
+            <a:endParaRPr lang="en-US" sz="1400" b="0" u="none" strike="noStrike">
+              <a:solidFill>
+                <a:srgbClr val="000000"/>
+              </a:solidFill>
+              <a:effectLst/>
+              <a:uFillTx/>
+              <a:latin typeface="Times New Roman"/>
+            </a:endParaRPr>
+          </a:p>
+        </p:txBody>
+      </p:sp>
+      <p:sp>
+        <p:nvSpPr>
+          <p:cNvPr id="59" name="PlaceHolder 3"/>
+          <p:cNvSpPr>
+            <a:spLocks noGrp="1"/>
+          </p:cNvSpPr>
+          <p:nvPr>
+            <p:ph type="dt" idx="10"/>
+          </p:nvPr>
+        </p:nvSpPr>
+        <p:spPr>
+          <a:xfrm>
+            <a:off x="457200" y="4685760"/>
+            <a:ext cx="2129400" cy="353520"/>
+          </a:xfrm>
+          <a:prstGeom prst="rect">
+            <a:avLst/>
+          </a:prstGeom>
+          <a:noFill/>
+          <a:ln w="0">
+            <a:noFill/>
+          </a:ln>
+        </p:spPr>
+        <p:txBody>
+          <a:bodyPr lIns="0" tIns="0" rIns="0" bIns="0" anchor="t">
+            <a:noAutofit/>
+          </a:bodyPr>
+          <a:lstStyle>
+            <a:lvl1pPr indent="0" algn="l">
+              <a:buNone/>
+              <a:defRPr lang="en-US" sz="1400" b="0" u="none" strike="noStrike">
+                <a:solidFill>
+                  <a:srgbClr val="000000"/>
+                </a:solidFill>
+                <a:effectLst/>
+                <a:uFillTx/>
+                <a:latin typeface="Times New Roman"/>
+              </a:defRPr>
+            </a:lvl1pPr>
+          </a:lstStyle>
+          <a:p>
+            <a:pPr indent="0" algn="l">
+              <a:buNone/>
+            </a:pPr>
+            <a:r>
+              <a:rPr lang="en-US" sz="1400" b="0" u="none" strike="noStrike">
+                <a:solidFill>
+                  <a:srgbClr val="000000"/>
+                </a:solidFill>
+                <a:effectLst/>
+                <a:uFillTx/>
+                <a:latin typeface="Times New Roman"/>
+              </a:rPr>
+              <a:t>&lt;date/time&gt;</a:t>
+            </a:r>
+            <a:endParaRPr lang="en-US" sz="1400" b="0" u="none" strike="noStrike">
+              <a:solidFill>
+                <a:srgbClr val="000000"/>
+              </a:solidFill>
+              <a:effectLst/>
+              <a:uFillTx/>
+              <a:latin typeface="Times New Roman"/>
+            </a:endParaRPr>
           </a:p>
         </p:txBody>
       </p:sp>
@@ -362,14 +2043,14 @@
       </p:grpSpPr>
       <p:sp>
         <p:nvSpPr>
-          <p:cNvPr id="0" name="Текст 2"/>
+          <p:cNvPr id="2" name="Текст 2"/>
           <p:cNvSpPr/>
           <p:nvPr/>
         </p:nvSpPr>
         <p:spPr>
           <a:xfrm>
             <a:off x="899640" y="1347480"/>
-            <a:ext cx="7343640" cy="1438920"/>
+            <a:ext cx="7343280" cy="1438560"/>
           </a:xfrm>
           <a:prstGeom prst="rect">
             <a:avLst/>
@@ -386,16 +2067,11 @@
           <a:fontRef idx="minor"/>
         </p:style>
         <p:txBody>
-          <a:bodyPr lIns="90000" rIns="90000" tIns="45000" bIns="45000" anchor="t">
+          <a:bodyPr lIns="90000" tIns="45000" rIns="90000" bIns="45000" anchor="t">
             <a:normAutofit/>
           </a:bodyPr>
           <a:p>
-            <a:pPr>
-              <a:lnSpc>
-                <a:spcPct val="100000"/>
-              </a:lnSpc>
-            </a:pPr>
-            <a:endParaRPr b="0" lang="ru-RU" sz="1800" strike="noStrike" u="none">
+            <a:endParaRPr lang="ru-RU" sz="1800" b="0" u="none" strike="noStrike">
               <a:solidFill>
                 <a:schemeClr val="dk1"/>
               </a:solidFill>
@@ -408,35 +2084,35 @@
       </p:sp>
       <p:grpSp>
         <p:nvGrpSpPr>
-          <p:cNvPr id="1" name="Группа 27"/>
+          <p:cNvPr id="3" name="Группа 27"/>
           <p:cNvGrpSpPr/>
           <p:nvPr/>
         </p:nvGrpSpPr>
         <p:grpSpPr>
           <a:xfrm>
             <a:off x="0" y="5143320"/>
-            <a:ext cx="9144720" cy="720"/>
+            <a:ext cx="9145080" cy="1080"/>
             <a:chOff x="0" y="5143320"/>
-            <a:chExt cx="9144720" cy="720"/>
+            <a:chExt cx="9145080" cy="1080"/>
           </a:xfrm>
         </p:grpSpPr>
         <p:cxnSp>
           <p:nvCxnSpPr>
-            <p:cNvPr id="2" name="Прямая соединительная линия 7"/>
+            <p:cNvPr id="4" name="Прямая соединительная линия 7"/>
             <p:cNvCxnSpPr/>
             <p:nvPr/>
           </p:nvCxnSpPr>
           <p:spPr>
             <a:xfrm flipH="1">
               <a:off x="1835640" y="5143320"/>
-              <a:ext cx="7309440" cy="1080"/>
+              <a:ext cx="7309800" cy="1440"/>
             </a:xfrm>
             <a:prstGeom prst="straightConnector1">
               <a:avLst/>
             </a:prstGeom>
             <a:ln w="76200">
               <a:solidFill>
-                <a:srgbClr val="0081a1"/>
+                <a:srgbClr val="0081A1"/>
               </a:solidFill>
               <a:round/>
             </a:ln>
@@ -444,21 +2120,21 @@
         </p:cxnSp>
         <p:cxnSp>
           <p:nvCxnSpPr>
-            <p:cNvPr id="3" name="Прямая соединительная линия 9"/>
+            <p:cNvPr id="5" name="Прямая соединительная линия 9"/>
             <p:cNvCxnSpPr/>
             <p:nvPr/>
           </p:nvCxnSpPr>
           <p:spPr>
             <a:xfrm flipH="1">
               <a:off x="1206000" y="5143320"/>
-              <a:ext cx="649080" cy="1080"/>
+              <a:ext cx="649440" cy="1440"/>
             </a:xfrm>
             <a:prstGeom prst="straightConnector1">
               <a:avLst/>
             </a:prstGeom>
             <a:ln w="76200">
               <a:solidFill>
-                <a:srgbClr val="94c500"/>
+                <a:srgbClr val="94C500"/>
               </a:solidFill>
               <a:round/>
             </a:ln>
@@ -466,21 +2142,21 @@
         </p:cxnSp>
         <p:cxnSp>
           <p:nvCxnSpPr>
-            <p:cNvPr id="4" name="Прямая соединительная линия 11"/>
+            <p:cNvPr id="6" name="Прямая соединительная линия 11"/>
             <p:cNvCxnSpPr/>
             <p:nvPr/>
           </p:nvCxnSpPr>
           <p:spPr>
             <a:xfrm flipH="1">
               <a:off x="525240" y="5143320"/>
-              <a:ext cx="721440" cy="1080"/>
+              <a:ext cx="721800" cy="1440"/>
             </a:xfrm>
             <a:prstGeom prst="straightConnector1">
               <a:avLst/>
             </a:prstGeom>
             <a:ln w="76200">
               <a:solidFill>
-                <a:srgbClr val="fbc800"/>
+                <a:srgbClr val="FBC800"/>
               </a:solidFill>
               <a:round/>
             </a:ln>
@@ -488,89 +2164,30 @@
         </p:cxnSp>
         <p:cxnSp>
           <p:nvCxnSpPr>
-            <p:cNvPr id="5" name="Прямая соединительная линия 12"/>
+            <p:cNvPr id="7" name="Прямая соединительная линия 12"/>
             <p:cNvCxnSpPr/>
             <p:nvPr/>
           </p:nvCxnSpPr>
           <p:spPr>
             <a:xfrm flipH="1">
               <a:off x="0" y="5143320"/>
-              <a:ext cx="612360" cy="1080"/>
+              <a:ext cx="612720" cy="1440"/>
             </a:xfrm>
             <a:prstGeom prst="straightConnector1">
               <a:avLst/>
             </a:prstGeom>
             <a:ln w="76200">
               <a:solidFill>
-                <a:srgbClr val="e42a00"/>
+                <a:srgbClr val="E42A00"/>
               </a:solidFill>
               <a:round/>
             </a:ln>
           </p:spPr>
         </p:cxnSp>
       </p:grpSp>
-      <p:sp>
-        <p:nvSpPr>
-          <p:cNvPr id="6" name="PlaceHolder 1"/>
-          <p:cNvSpPr>
-            <a:spLocks noGrp="1"/>
-          </p:cNvSpPr>
-          <p:nvPr>
-            <p:ph type="title"/>
-          </p:nvPr>
-        </p:nvSpPr>
-        <p:spPr>
-          <a:xfrm>
-            <a:off x="685800" y="3723840"/>
-            <a:ext cx="7771320" cy="525240"/>
-          </a:xfrm>
-          <a:prstGeom prst="rect">
-            <a:avLst/>
-          </a:prstGeom>
-          <a:noFill/>
-          <a:ln w="0">
-            <a:noFill/>
-          </a:ln>
-        </p:spPr>
-        <p:txBody>
-          <a:bodyPr lIns="91440" rIns="91440" tIns="45720" bIns="45720" anchor="ctr">
-            <a:noAutofit/>
-          </a:bodyPr>
-          <a:p>
-            <a:pPr indent="0" algn="ctr" defTabSz="914400">
-              <a:lnSpc>
-                <a:spcPct val="100000"/>
-              </a:lnSpc>
-              <a:buNone/>
-              <a:tabLst>
-                <a:tab algn="l" pos="0"/>
-              </a:tabLst>
-            </a:pPr>
-            <a:r>
-              <a:rPr b="0" lang="ru-RU" sz="2800" strike="noStrike" u="none">
-                <a:solidFill>
-                  <a:srgbClr val="0081a1"/>
-                </a:solidFill>
-                <a:effectLst/>
-                <a:uFillTx/>
-                <a:latin typeface="SF UI Display Light"/>
-              </a:rPr>
-              <a:t>ОБРАЗЕЦ ЗАГОЛОВКА ТИТУЛЬНОГО СЛАЙДА</a:t>
-            </a:r>
-            <a:endParaRPr b="0" lang="en-US" sz="2800" strike="noStrike" u="none">
-              <a:solidFill>
-                <a:srgbClr val="000000"/>
-              </a:solidFill>
-              <a:effectLst/>
-              <a:uFillTx/>
-              <a:latin typeface="Arial"/>
-            </a:endParaRPr>
-          </a:p>
-        </p:txBody>
-      </p:sp>
       <p:pic>
         <p:nvPicPr>
-          <p:cNvPr id="7" name="Рисунок 7" descr="logo-02.jpg"/>
+          <p:cNvPr id="8" name="Рисунок 7" descr="logo-02.jpg"/>
           <p:cNvPicPr/>
           <p:nvPr/>
         </p:nvPicPr>
@@ -581,7 +2198,7 @@
         <p:spPr>
           <a:xfrm>
             <a:off x="107640" y="0"/>
-            <a:ext cx="1510920" cy="718920"/>
+            <a:ext cx="1510560" cy="718560"/>
           </a:xfrm>
           <a:prstGeom prst="rect">
             <a:avLst/>
@@ -594,7 +2211,73 @@
       </p:pic>
       <p:sp>
         <p:nvSpPr>
-          <p:cNvPr id="8" name="PlaceHolder 2"/>
+          <p:cNvPr id="9" name="PlaceHolder 1"/>
+          <p:cNvSpPr>
+            <a:spLocks noGrp="1"/>
+          </p:cNvSpPr>
+          <p:nvPr>
+            <p:ph type="title"/>
+          </p:nvPr>
+        </p:nvSpPr>
+        <p:spPr>
+          <a:xfrm>
+            <a:off x="457200" y="205200"/>
+            <a:ext cx="8229240" cy="858600"/>
+          </a:xfrm>
+          <a:prstGeom prst="rect">
+            <a:avLst/>
+          </a:prstGeom>
+          <a:noFill/>
+          <a:ln w="0">
+            <a:noFill/>
+          </a:ln>
+        </p:spPr>
+        <p:txBody>
+          <a:bodyPr lIns="0" tIns="0" rIns="0" bIns="0" anchor="ctr">
+            <a:noAutofit/>
+          </a:bodyPr>
+          <a:lstStyle>
+            <a:lvl1pPr indent="0" algn="l">
+              <a:buNone/>
+              <a:defRPr lang="en-US" sz="2200" b="0" u="none" strike="noStrike">
+                <a:solidFill>
+                  <a:srgbClr val="000000"/>
+                </a:solidFill>
+                <a:effectLst/>
+                <a:uFillTx/>
+                <a:latin typeface="Arial"/>
+              </a:defRPr>
+            </a:lvl1pPr>
+          </a:lstStyle>
+          <a:p>
+            <a:pPr indent="0" algn="l">
+              <a:buNone/>
+            </a:pPr>
+            <a:r>
+              <a:rPr lang="en-US" sz="2200" b="0" u="none" strike="noStrike">
+                <a:solidFill>
+                  <a:srgbClr val="000000"/>
+                </a:solidFill>
+                <a:effectLst/>
+                <a:uFillTx/>
+                <a:latin typeface="Arial"/>
+              </a:rPr>
+              <a:t>Click to edit the title text format</a:t>
+            </a:r>
+            <a:endParaRPr lang="en-US" sz="2200" b="0" u="none" strike="noStrike">
+              <a:solidFill>
+                <a:srgbClr val="000000"/>
+              </a:solidFill>
+              <a:effectLst/>
+              <a:uFillTx/>
+              <a:latin typeface="Arial"/>
+            </a:endParaRPr>
+          </a:p>
+        </p:txBody>
+      </p:sp>
+      <p:sp>
+        <p:nvSpPr>
+          <p:cNvPr id="10" name="PlaceHolder 2"/>
           <p:cNvSpPr>
             <a:spLocks noGrp="1"/>
           </p:cNvSpPr>
@@ -616,97 +2299,142 @@
           </a:ln>
         </p:spPr>
         <p:txBody>
-          <a:bodyPr lIns="0" rIns="0" tIns="0" bIns="0" anchor="t">
+          <a:bodyPr lIns="0" tIns="0" rIns="0" bIns="0" anchor="t">
             <a:normAutofit/>
           </a:bodyPr>
-          <a:p>
-            <a:pPr marL="432000" indent="-324000">
-              <a:spcBef>
-                <a:spcPts val="1417"/>
-              </a:spcBef>
+          <a:lstStyle>
+            <a:lvl1pPr algn="l">
+              <a:buClr>
+                <a:srgbClr val="000000"/>
+              </a:buClr>
+              <a:buFont typeface="Wingdings" charset="2"/>
+              <a:buChar char=""/>
+              <a:defRPr lang="en-US" sz="3200" b="0" u="none" strike="noStrike">
+                <a:solidFill>
+                  <a:srgbClr val="000000"/>
+                </a:solidFill>
+                <a:effectLst/>
+                <a:uFillTx/>
+                <a:latin typeface="Arial"/>
+              </a:defRPr>
+            </a:lvl1pPr>
+            <a:lvl2pPr lvl="1" algn="l">
+              <a:buClr>
+                <a:srgbClr val="000000"/>
+              </a:buClr>
+              <a:buSzPct val="75000"/>
+              <a:buFont typeface="Symbol" charset="2"/>
+              <a:buChar char=""/>
+              <a:defRPr lang="en-US" sz="2800" b="0" u="none" strike="noStrike">
+                <a:solidFill>
+                  <a:srgbClr val="000000"/>
+                </a:solidFill>
+                <a:effectLst/>
+                <a:uFillTx/>
+                <a:latin typeface="Arial"/>
+              </a:defRPr>
+            </a:lvl2pPr>
+            <a:lvl3pPr lvl="2" algn="l">
               <a:buClr>
                 <a:srgbClr val="000000"/>
               </a:buClr>
               <a:buSzPct val="45000"/>
               <a:buFont typeface="Wingdings" charset="2"/>
               <a:buChar char=""/>
-            </a:pPr>
-            <a:r>
-              <a:rPr b="0" lang="en-US" sz="3200" strike="noStrike" u="none">
-                <a:solidFill>
-                  <a:srgbClr val="000000"/>
-                </a:solidFill>
-                <a:effectLst/>
-                <a:uFillTx/>
-                <a:latin typeface="Arial"/>
-              </a:rPr>
-              <a:t>Click to edit the outline text format</a:t>
-            </a:r>
-            <a:endParaRPr b="0" lang="en-US" sz="3200" strike="noStrike" u="none">
-              <a:solidFill>
-                <a:srgbClr val="000000"/>
-              </a:solidFill>
-              <a:effectLst/>
-              <a:uFillTx/>
-              <a:latin typeface="Arial"/>
-            </a:endParaRPr>
-          </a:p>
-          <a:p>
-            <a:pPr lvl="1" marL="864000" indent="-324000">
-              <a:spcBef>
-                <a:spcPts val="1134"/>
-              </a:spcBef>
+              <a:defRPr lang="en-US" sz="2400" b="0" u="none" strike="noStrike">
+                <a:solidFill>
+                  <a:srgbClr val="000000"/>
+                </a:solidFill>
+                <a:effectLst/>
+                <a:uFillTx/>
+                <a:latin typeface="Arial"/>
+              </a:defRPr>
+            </a:lvl3pPr>
+            <a:lvl4pPr lvl="3" algn="l">
               <a:buClr>
                 <a:srgbClr val="000000"/>
               </a:buClr>
               <a:buSzPct val="75000"/>
               <a:buFont typeface="Symbol" charset="2"/>
               <a:buChar char=""/>
-            </a:pPr>
-            <a:r>
-              <a:rPr b="0" lang="en-US" sz="2800" strike="noStrike" u="none">
-                <a:solidFill>
-                  <a:srgbClr val="000000"/>
-                </a:solidFill>
-                <a:effectLst/>
-                <a:uFillTx/>
-                <a:latin typeface="Arial"/>
-              </a:rPr>
-              <a:t>Second Outline Level</a:t>
-            </a:r>
-            <a:endParaRPr b="0" lang="en-US" sz="2800" strike="noStrike" u="none">
-              <a:solidFill>
-                <a:srgbClr val="000000"/>
-              </a:solidFill>
-              <a:effectLst/>
-              <a:uFillTx/>
-              <a:latin typeface="Arial"/>
-            </a:endParaRPr>
-          </a:p>
-          <a:p>
-            <a:pPr lvl="2" marL="1296000" indent="-288000">
-              <a:spcBef>
-                <a:spcPts val="850"/>
-              </a:spcBef>
+              <a:defRPr lang="en-US" sz="2000" b="0" u="none" strike="noStrike">
+                <a:solidFill>
+                  <a:srgbClr val="000000"/>
+                </a:solidFill>
+                <a:effectLst/>
+                <a:uFillTx/>
+                <a:latin typeface="Arial"/>
+              </a:defRPr>
+            </a:lvl4pPr>
+            <a:lvl5pPr lvl="4" algn="l">
               <a:buClr>
                 <a:srgbClr val="000000"/>
               </a:buClr>
               <a:buSzPct val="45000"/>
               <a:buFont typeface="Wingdings" charset="2"/>
               <a:buChar char=""/>
-            </a:pPr>
-            <a:r>
-              <a:rPr b="0" lang="en-US" sz="2400" strike="noStrike" u="none">
-                <a:solidFill>
-                  <a:srgbClr val="000000"/>
-                </a:solidFill>
-                <a:effectLst/>
-                <a:uFillTx/>
-                <a:latin typeface="Arial"/>
-              </a:rPr>
-              <a:t>Third Outline Level</a:t>
-            </a:r>
-            <a:endParaRPr b="0" lang="en-US" sz="2400" strike="noStrike" u="none">
+              <a:defRPr lang="en-US" sz="2000" b="0" u="none" strike="noStrike">
+                <a:solidFill>
+                  <a:srgbClr val="000000"/>
+                </a:solidFill>
+                <a:effectLst/>
+                <a:uFillTx/>
+                <a:latin typeface="Arial"/>
+              </a:defRPr>
+            </a:lvl5pPr>
+            <a:lvl6pPr lvl="5" algn="l">
+              <a:buClr>
+                <a:srgbClr val="000000"/>
+              </a:buClr>
+              <a:buSzPct val="45000"/>
+              <a:buFont typeface="Wingdings" charset="2"/>
+              <a:buChar char=""/>
+              <a:defRPr lang="en-US" sz="2000" b="0" u="none" strike="noStrike">
+                <a:solidFill>
+                  <a:srgbClr val="000000"/>
+                </a:solidFill>
+                <a:effectLst/>
+                <a:uFillTx/>
+                <a:latin typeface="Arial"/>
+              </a:defRPr>
+            </a:lvl6pPr>
+            <a:lvl7pPr lvl="6" algn="l">
+              <a:buClr>
+                <a:srgbClr val="000000"/>
+              </a:buClr>
+              <a:buSzPct val="45000"/>
+              <a:buFont typeface="Wingdings" charset="2"/>
+              <a:buChar char=""/>
+              <a:defRPr lang="en-US" sz="2000" b="0" u="none" strike="noStrike">
+                <a:solidFill>
+                  <a:srgbClr val="000000"/>
+                </a:solidFill>
+                <a:effectLst/>
+                <a:uFillTx/>
+                <a:latin typeface="Arial"/>
+              </a:defRPr>
+            </a:lvl7pPr>
+          </a:lstStyle>
+          <a:p>
+            <a:pPr indent="-324000" algn="l">
+              <a:buClr>
+                <a:srgbClr val="000000"/>
+              </a:buClr>
+              <a:buFont typeface="Wingdings" charset="2"/>
+              <a:buChar char=""/>
+            </a:pPr>
+            <a:r>
+              <a:rPr lang="en-US" sz="3200" b="0" u="none" strike="noStrike">
+                <a:solidFill>
+                  <a:srgbClr val="000000"/>
+                </a:solidFill>
+                <a:effectLst/>
+                <a:uFillTx/>
+                <a:latin typeface="Arial"/>
+              </a:rPr>
+              <a:t>Click to edit the outline text format</a:t>
+            </a:r>
+            <a:endParaRPr lang="en-US" sz="3200" b="0" u="none" strike="noStrike">
               <a:solidFill>
                 <a:srgbClr val="000000"/>
               </a:solidFill>
@@ -716,10 +2444,7 @@
             </a:endParaRPr>
           </a:p>
           <a:p>
-            <a:pPr lvl="3" marL="1728000" indent="-216000">
-              <a:spcBef>
-                <a:spcPts val="567"/>
-              </a:spcBef>
+            <a:pPr marL="864000" lvl="1" indent="-324000" algn="l">
               <a:buClr>
                 <a:srgbClr val="000000"/>
               </a:buClr>
@@ -728,17 +2453,17 @@
               <a:buChar char=""/>
             </a:pPr>
             <a:r>
-              <a:rPr b="0" lang="en-US" sz="2000" strike="noStrike" u="none">
-                <a:solidFill>
-                  <a:srgbClr val="000000"/>
-                </a:solidFill>
-                <a:effectLst/>
-                <a:uFillTx/>
-                <a:latin typeface="Arial"/>
-              </a:rPr>
-              <a:t>Fourth Outline Level</a:t>
-            </a:r>
-            <a:endParaRPr b="0" lang="en-US" sz="2000" strike="noStrike" u="none">
+              <a:rPr lang="en-US" sz="2800" b="0" u="none" strike="noStrike">
+                <a:solidFill>
+                  <a:srgbClr val="000000"/>
+                </a:solidFill>
+                <a:effectLst/>
+                <a:uFillTx/>
+                <a:latin typeface="Arial"/>
+              </a:rPr>
+              <a:t>Second Outline Level</a:t>
+            </a:r>
+            <a:endParaRPr lang="en-US" sz="2800" b="0" u="none" strike="noStrike">
               <a:solidFill>
                 <a:srgbClr val="000000"/>
               </a:solidFill>
@@ -748,10 +2473,7 @@
             </a:endParaRPr>
           </a:p>
           <a:p>
-            <a:pPr lvl="4" marL="2160000" indent="-216000">
-              <a:spcBef>
-                <a:spcPts val="283"/>
-              </a:spcBef>
+            <a:pPr marL="1296000" lvl="2" indent="-288000" algn="l">
               <a:buClr>
                 <a:srgbClr val="000000"/>
               </a:buClr>
@@ -760,17 +2482,17 @@
               <a:buChar char=""/>
             </a:pPr>
             <a:r>
-              <a:rPr b="0" lang="en-US" sz="2000" strike="noStrike" u="none">
-                <a:solidFill>
-                  <a:srgbClr val="000000"/>
-                </a:solidFill>
-                <a:effectLst/>
-                <a:uFillTx/>
-                <a:latin typeface="Arial"/>
-              </a:rPr>
-              <a:t>Fifth Outline Level</a:t>
-            </a:r>
-            <a:endParaRPr b="0" lang="en-US" sz="2000" strike="noStrike" u="none">
+              <a:rPr lang="en-US" sz="2400" b="0" u="none" strike="noStrike">
+                <a:solidFill>
+                  <a:srgbClr val="000000"/>
+                </a:solidFill>
+                <a:effectLst/>
+                <a:uFillTx/>
+                <a:latin typeface="Arial"/>
+              </a:rPr>
+              <a:t>Third Outline Level</a:t>
+            </a:r>
+            <a:endParaRPr lang="en-US" sz="2400" b="0" u="none" strike="noStrike">
               <a:solidFill>
                 <a:srgbClr val="000000"/>
               </a:solidFill>
@@ -780,10 +2502,36 @@
             </a:endParaRPr>
           </a:p>
           <a:p>
-            <a:pPr lvl="5" marL="2592000" indent="-216000">
-              <a:spcBef>
-                <a:spcPts val="283"/>
-              </a:spcBef>
+            <a:pPr marL="1728000" lvl="3" indent="-216000" algn="l">
+              <a:buClr>
+                <a:srgbClr val="000000"/>
+              </a:buClr>
+              <a:buSzPct val="75000"/>
+              <a:buFont typeface="Symbol" charset="2"/>
+              <a:buChar char=""/>
+            </a:pPr>
+            <a:r>
+              <a:rPr lang="en-US" sz="2000" b="0" u="none" strike="noStrike">
+                <a:solidFill>
+                  <a:srgbClr val="000000"/>
+                </a:solidFill>
+                <a:effectLst/>
+                <a:uFillTx/>
+                <a:latin typeface="Arial"/>
+              </a:rPr>
+              <a:t>Fourth Outline Level</a:t>
+            </a:r>
+            <a:endParaRPr lang="en-US" sz="2000" b="0" u="none" strike="noStrike">
+              <a:solidFill>
+                <a:srgbClr val="000000"/>
+              </a:solidFill>
+              <a:effectLst/>
+              <a:uFillTx/>
+              <a:latin typeface="Arial"/>
+            </a:endParaRPr>
+          </a:p>
+          <a:p>
+            <a:pPr marL="2160000" lvl="4" indent="-216000" algn="l">
               <a:buClr>
                 <a:srgbClr val="000000"/>
               </a:buClr>
@@ -792,17 +2540,17 @@
               <a:buChar char=""/>
             </a:pPr>
             <a:r>
-              <a:rPr b="0" lang="en-US" sz="2000" strike="noStrike" u="none">
-                <a:solidFill>
-                  <a:srgbClr val="000000"/>
-                </a:solidFill>
-                <a:effectLst/>
-                <a:uFillTx/>
-                <a:latin typeface="Arial"/>
-              </a:rPr>
-              <a:t>Sixth Outline Level</a:t>
-            </a:r>
-            <a:endParaRPr b="0" lang="en-US" sz="2000" strike="noStrike" u="none">
+              <a:rPr lang="en-US" sz="2000" b="0" u="none" strike="noStrike">
+                <a:solidFill>
+                  <a:srgbClr val="000000"/>
+                </a:solidFill>
+                <a:effectLst/>
+                <a:uFillTx/>
+                <a:latin typeface="Arial"/>
+              </a:rPr>
+              <a:t>Fifth Outline Level</a:t>
+            </a:r>
+            <a:endParaRPr lang="en-US" sz="2000" b="0" u="none" strike="noStrike">
               <a:solidFill>
                 <a:srgbClr val="000000"/>
               </a:solidFill>
@@ -812,10 +2560,7 @@
             </a:endParaRPr>
           </a:p>
           <a:p>
-            <a:pPr lvl="6" marL="3024000" indent="-216000">
-              <a:spcBef>
-                <a:spcPts val="283"/>
-              </a:spcBef>
+            <a:pPr marL="2592000" lvl="5" indent="-216000" algn="l">
               <a:buClr>
                 <a:srgbClr val="000000"/>
               </a:buClr>
@@ -824,7 +2569,36 @@
               <a:buChar char=""/>
             </a:pPr>
             <a:r>
-              <a:rPr b="0" lang="en-US" sz="2000" strike="noStrike" u="none">
+              <a:rPr lang="en-US" sz="2000" b="0" u="none" strike="noStrike">
+                <a:solidFill>
+                  <a:srgbClr val="000000"/>
+                </a:solidFill>
+                <a:effectLst/>
+                <a:uFillTx/>
+                <a:latin typeface="Arial"/>
+              </a:rPr>
+              <a:t>Sixth Outline Level</a:t>
+            </a:r>
+            <a:endParaRPr lang="en-US" sz="2000" b="0" u="none" strike="noStrike">
+              <a:solidFill>
+                <a:srgbClr val="000000"/>
+              </a:solidFill>
+              <a:effectLst/>
+              <a:uFillTx/>
+              <a:latin typeface="Arial"/>
+            </a:endParaRPr>
+          </a:p>
+          <a:p>
+            <a:pPr marL="3024000" lvl="6" indent="-216000" algn="l">
+              <a:buClr>
+                <a:srgbClr val="000000"/>
+              </a:buClr>
+              <a:buSzPct val="45000"/>
+              <a:buFont typeface="Wingdings" charset="2"/>
+              <a:buChar char=""/>
+            </a:pPr>
+            <a:r>
+              <a:rPr lang="en-US" sz="2000" b="0" u="none" strike="noStrike">
                 <a:solidFill>
                   <a:srgbClr val="000000"/>
                 </a:solidFill>
@@ -834,7 +2608,7 @@
               </a:rPr>
               <a:t>Seventh Outline Level</a:t>
             </a:r>
-            <a:endParaRPr b="0" lang="en-US" sz="2000" strike="noStrike" u="none">
+            <a:endParaRPr lang="en-US" sz="2000" b="0" u="none" strike="noStrike">
               <a:solidFill>
                 <a:srgbClr val="000000"/>
               </a:solidFill>
@@ -880,14 +2654,14 @@
       </p:grpSpPr>
       <p:sp>
         <p:nvSpPr>
-          <p:cNvPr id="9" name="Текст 2"/>
+          <p:cNvPr id="11" name="Текст 2"/>
           <p:cNvSpPr/>
           <p:nvPr/>
         </p:nvSpPr>
         <p:spPr>
           <a:xfrm>
             <a:off x="899640" y="1347480"/>
-            <a:ext cx="7343640" cy="1438920"/>
+            <a:ext cx="7343280" cy="1438560"/>
           </a:xfrm>
           <a:prstGeom prst="rect">
             <a:avLst/>
@@ -904,16 +2678,11 @@
           <a:fontRef idx="minor"/>
         </p:style>
         <p:txBody>
-          <a:bodyPr lIns="90000" rIns="90000" tIns="45000" bIns="45000" anchor="t">
+          <a:bodyPr lIns="90000" tIns="45000" rIns="90000" bIns="45000" anchor="t">
             <a:normAutofit/>
           </a:bodyPr>
           <a:p>
-            <a:pPr>
-              <a:lnSpc>
-                <a:spcPct val="100000"/>
-              </a:lnSpc>
-            </a:pPr>
-            <a:endParaRPr b="0" lang="ru-RU" sz="1800" strike="noStrike" u="none">
+            <a:endParaRPr lang="ru-RU" sz="1800" b="0" u="none" strike="noStrike">
               <a:solidFill>
                 <a:schemeClr val="dk1"/>
               </a:solidFill>
@@ -926,35 +2695,35 @@
       </p:sp>
       <p:grpSp>
         <p:nvGrpSpPr>
-          <p:cNvPr id="10" name="Группа 27"/>
+          <p:cNvPr id="12" name="Группа 27"/>
           <p:cNvGrpSpPr/>
           <p:nvPr/>
         </p:nvGrpSpPr>
         <p:grpSpPr>
           <a:xfrm>
             <a:off x="0" y="5143320"/>
-            <a:ext cx="9144720" cy="720"/>
+            <a:ext cx="9145080" cy="1080"/>
             <a:chOff x="0" y="5143320"/>
-            <a:chExt cx="9144720" cy="720"/>
+            <a:chExt cx="9145080" cy="1080"/>
           </a:xfrm>
         </p:grpSpPr>
         <p:cxnSp>
           <p:nvCxnSpPr>
-            <p:cNvPr id="11" name="Прямая соединительная линия 7"/>
+            <p:cNvPr id="13" name="Прямая соединительная линия 7"/>
             <p:cNvCxnSpPr/>
             <p:nvPr/>
           </p:nvCxnSpPr>
           <p:spPr>
             <a:xfrm flipH="1">
               <a:off x="1835640" y="5143320"/>
-              <a:ext cx="7309440" cy="1080"/>
+              <a:ext cx="7309800" cy="1440"/>
             </a:xfrm>
             <a:prstGeom prst="straightConnector1">
               <a:avLst/>
             </a:prstGeom>
             <a:ln w="76200">
               <a:solidFill>
-                <a:srgbClr val="0081a1"/>
+                <a:srgbClr val="0081A1"/>
               </a:solidFill>
               <a:round/>
             </a:ln>
@@ -962,21 +2731,21 @@
         </p:cxnSp>
         <p:cxnSp>
           <p:nvCxnSpPr>
-            <p:cNvPr id="12" name="Прямая соединительная линия 9"/>
+            <p:cNvPr id="14" name="Прямая соединительная линия 9"/>
             <p:cNvCxnSpPr/>
             <p:nvPr/>
           </p:nvCxnSpPr>
           <p:spPr>
             <a:xfrm flipH="1">
               <a:off x="1206000" y="5143320"/>
-              <a:ext cx="649080" cy="1080"/>
+              <a:ext cx="649440" cy="1440"/>
             </a:xfrm>
             <a:prstGeom prst="straightConnector1">
               <a:avLst/>
             </a:prstGeom>
             <a:ln w="76200">
               <a:solidFill>
-                <a:srgbClr val="94c500"/>
+                <a:srgbClr val="94C500"/>
               </a:solidFill>
               <a:round/>
             </a:ln>
@@ -984,21 +2753,21 @@
         </p:cxnSp>
         <p:cxnSp>
           <p:nvCxnSpPr>
-            <p:cNvPr id="13" name="Прямая соединительная линия 11"/>
+            <p:cNvPr id="15" name="Прямая соединительная линия 11"/>
             <p:cNvCxnSpPr/>
             <p:nvPr/>
           </p:nvCxnSpPr>
           <p:spPr>
             <a:xfrm flipH="1">
               <a:off x="525240" y="5143320"/>
-              <a:ext cx="721440" cy="1080"/>
+              <a:ext cx="721800" cy="1440"/>
             </a:xfrm>
             <a:prstGeom prst="straightConnector1">
               <a:avLst/>
             </a:prstGeom>
             <a:ln w="76200">
               <a:solidFill>
-                <a:srgbClr val="fbc800"/>
+                <a:srgbClr val="FBC800"/>
               </a:solidFill>
               <a:round/>
             </a:ln>
@@ -1006,190 +2775,27 @@
         </p:cxnSp>
         <p:cxnSp>
           <p:nvCxnSpPr>
-            <p:cNvPr id="14" name="Прямая соединительная линия 12"/>
+            <p:cNvPr id="16" name="Прямая соединительная линия 12"/>
             <p:cNvCxnSpPr/>
             <p:nvPr/>
           </p:nvCxnSpPr>
           <p:spPr>
             <a:xfrm flipH="1">
               <a:off x="0" y="5143320"/>
-              <a:ext cx="612360" cy="1080"/>
+              <a:ext cx="612720" cy="1440"/>
             </a:xfrm>
             <a:prstGeom prst="straightConnector1">
               <a:avLst/>
             </a:prstGeom>
             <a:ln w="76200">
               <a:solidFill>
-                <a:srgbClr val="e42a00"/>
+                <a:srgbClr val="E42A00"/>
               </a:solidFill>
               <a:round/>
             </a:ln>
           </p:spPr>
         </p:cxnSp>
       </p:grpSp>
-      <p:sp>
-        <p:nvSpPr>
-          <p:cNvPr id="15" name="PlaceHolder 1"/>
-          <p:cNvSpPr>
-            <a:spLocks noGrp="1"/>
-          </p:cNvSpPr>
-          <p:nvPr>
-            <p:ph type="title"/>
-          </p:nvPr>
-        </p:nvSpPr>
-        <p:spPr>
-          <a:xfrm>
-            <a:off x="1835640" y="123480"/>
-            <a:ext cx="6983640" cy="502920"/>
-          </a:xfrm>
-          <a:prstGeom prst="rect">
-            <a:avLst/>
-          </a:prstGeom>
-          <a:noFill/>
-          <a:ln w="0">
-            <a:noFill/>
-          </a:ln>
-        </p:spPr>
-        <p:txBody>
-          <a:bodyPr lIns="91440" rIns="91440" tIns="45720" bIns="45720" anchor="ctr">
-            <a:noAutofit/>
-          </a:bodyPr>
-          <a:p>
-            <a:pPr indent="0" algn="r" defTabSz="914400">
-              <a:lnSpc>
-                <a:spcPct val="100000"/>
-              </a:lnSpc>
-              <a:buNone/>
-              <a:tabLst>
-                <a:tab algn="l" pos="0"/>
-              </a:tabLst>
-            </a:pPr>
-            <a:r>
-              <a:rPr b="0" lang="ru-RU" sz="2400" strike="noStrike" u="none">
-                <a:solidFill>
-                  <a:srgbClr val="0081a1"/>
-                </a:solidFill>
-                <a:effectLst/>
-                <a:uFillTx/>
-                <a:latin typeface="SF UI Display Light"/>
-              </a:rPr>
-              <a:t>ВАРИАНТ ОФОРМЛЕНИЯ</a:t>
-            </a:r>
-            <a:r>
-              <a:rPr b="0" lang="en-US" sz="2400" strike="noStrike" u="none">
-                <a:solidFill>
-                  <a:srgbClr val="0081a1"/>
-                </a:solidFill>
-                <a:effectLst/>
-                <a:uFillTx/>
-                <a:latin typeface="SF UI Display Light"/>
-              </a:rPr>
-              <a:t> </a:t>
-            </a:r>
-            <a:r>
-              <a:rPr b="0" lang="ru-RU" sz="2400" strike="noStrike" u="none">
-                <a:solidFill>
-                  <a:srgbClr val="0081a1"/>
-                </a:solidFill>
-                <a:effectLst/>
-                <a:uFillTx/>
-                <a:latin typeface="SF UI Display Light"/>
-              </a:rPr>
-              <a:t>СХЕМЫ</a:t>
-            </a:r>
-            <a:endParaRPr b="0" lang="en-US" sz="2400" strike="noStrike" u="none">
-              <a:solidFill>
-                <a:srgbClr val="000000"/>
-              </a:solidFill>
-              <a:effectLst/>
-              <a:uFillTx/>
-              <a:latin typeface="Arial"/>
-            </a:endParaRPr>
-          </a:p>
-        </p:txBody>
-      </p:sp>
-      <p:sp>
-        <p:nvSpPr>
-          <p:cNvPr id="16" name="PlaceHolder 2"/>
-          <p:cNvSpPr>
-            <a:spLocks noGrp="1"/>
-          </p:cNvSpPr>
-          <p:nvPr>
-            <p:ph type="sldNum" idx="1"/>
-          </p:nvPr>
-        </p:nvSpPr>
-        <p:spPr>
-          <a:xfrm>
-            <a:off x="7668360" y="4746240"/>
-            <a:ext cx="1150920" cy="272880"/>
-          </a:xfrm>
-          <a:prstGeom prst="rect">
-            <a:avLst/>
-          </a:prstGeom>
-          <a:noFill/>
-          <a:ln w="0">
-            <a:noFill/>
-          </a:ln>
-        </p:spPr>
-        <p:txBody>
-          <a:bodyPr lIns="91440" rIns="91440" tIns="45720" bIns="45720" anchor="ctr">
-            <a:noAutofit/>
-          </a:bodyPr>
-          <a:lstStyle>
-            <a:lvl1pPr indent="0" algn="r" defTabSz="914400">
-              <a:lnSpc>
-                <a:spcPct val="100000"/>
-              </a:lnSpc>
-              <a:buNone/>
-              <a:tabLst>
-                <a:tab algn="l" pos="0"/>
-              </a:tabLst>
-              <a:defRPr b="0" lang="ru-RU" sz="1000" strike="noStrike" u="none">
-                <a:solidFill>
-                  <a:schemeClr val="dk1">
-                    <a:tint val="75000"/>
-                  </a:schemeClr>
-                </a:solidFill>
-                <a:effectLst/>
-                <a:uFillTx/>
-                <a:latin typeface="SF UI Display Light"/>
-              </a:defRPr>
-            </a:lvl1pPr>
-          </a:lstStyle>
-          <a:p>
-            <a:pPr indent="0" algn="r" defTabSz="914400">
-              <a:lnSpc>
-                <a:spcPct val="100000"/>
-              </a:lnSpc>
-              <a:buNone/>
-              <a:tabLst>
-                <a:tab algn="l" pos="0"/>
-              </a:tabLst>
-            </a:pPr>
-            <a:fld id="{055F5F7B-617D-43E2-A638-EA281D6558CD}" type="slidenum">
-              <a:rPr b="0" lang="ru-RU" sz="1000" strike="noStrike" u="none">
-                <a:solidFill>
-                  <a:schemeClr val="dk1">
-                    <a:tint val="75000"/>
-                  </a:schemeClr>
-                </a:solidFill>
-                <a:effectLst/>
-                <a:uFillTx/>
-                <a:latin typeface="SF UI Display Light"/>
-              </a:rPr>
-              <a:t>&lt;number&gt;</a:t>
-            </a:fld>
-            <a:endParaRPr b="0" lang="en-US" sz="1000" strike="noStrike" u="none">
-              <a:solidFill>
-                <a:srgbClr val="000000"/>
-              </a:solidFill>
-              <a:effectLst/>
-              <a:uFillTx/>
-              <a:latin typeface="Times New Roman"/>
-            </a:endParaRPr>
-          </a:p>
-        </p:txBody>
-      </p:sp>
       <p:pic>
         <p:nvPicPr>
           <p:cNvPr id="17" name="Рисунок 32" descr="logo-02.jpg"/>
@@ -1203,7 +2809,7 @@
         <p:spPr>
           <a:xfrm>
             <a:off x="107640" y="0"/>
-            <a:ext cx="1510920" cy="718920"/>
+            <a:ext cx="1510560" cy="718560"/>
           </a:xfrm>
           <a:prstGeom prst="rect">
             <a:avLst/>
@@ -1222,10 +2828,10 @@
         </p:nvGrpSpPr>
         <p:grpSpPr>
           <a:xfrm>
-            <a:off x="251640" y="1490760"/>
-            <a:ext cx="8639640" cy="2183040"/>
-            <a:chOff x="251640" y="1490760"/>
-            <a:chExt cx="8639640" cy="2183040"/>
+            <a:off x="251640" y="1490400"/>
+            <a:ext cx="8639280" cy="2182680"/>
+            <a:chOff x="251640" y="1490400"/>
+            <a:chExt cx="8639280" cy="2182680"/>
           </a:xfrm>
         </p:grpSpPr>
         <p:sp>
@@ -1236,8 +2842,8 @@
           </p:nvSpPr>
           <p:spPr>
             <a:xfrm flipV="1">
-              <a:off x="3043080" y="2269800"/>
-              <a:ext cx="1628640" cy="1404000"/>
+              <a:off x="3043080" y="2269080"/>
+              <a:ext cx="1628280" cy="1403640"/>
             </a:xfrm>
             <a:prstGeom prst="hexagon">
               <a:avLst>
@@ -1246,7 +2852,7 @@
               </a:avLst>
             </a:prstGeom>
             <a:solidFill>
-              <a:srgbClr val="1ba079"/>
+              <a:srgbClr val="1BA079"/>
             </a:solidFill>
             <a:ln>
               <a:noFill/>
@@ -1267,16 +2873,11 @@
             <a:fontRef idx="minor"/>
           </p:style>
           <p:txBody>
-            <a:bodyPr lIns="90000" rIns="90000" tIns="45000" bIns="45000" anchor="ctr">
+            <a:bodyPr lIns="90000" tIns="45000" rIns="90000" bIns="45000" anchor="ctr">
               <a:noAutofit/>
             </a:bodyPr>
             <a:p>
-              <a:pPr>
-                <a:lnSpc>
-                  <a:spcPct val="100000"/>
-                </a:lnSpc>
-              </a:pPr>
-              <a:endParaRPr b="0" lang="ru-RU" sz="1800" strike="noStrike" u="none">
+              <a:endParaRPr lang="ru-RU" sz="1800" b="0" u="none" strike="noStrike">
                 <a:solidFill>
                   <a:schemeClr val="lt1"/>
                 </a:solidFill>
@@ -1295,8 +2896,8 @@
           </p:nvSpPr>
           <p:spPr>
             <a:xfrm flipV="1">
-              <a:off x="4451040" y="1490760"/>
-              <a:ext cx="1628640" cy="1404000"/>
+              <a:off x="4451040" y="1490040"/>
+              <a:ext cx="1628280" cy="1403640"/>
             </a:xfrm>
             <a:prstGeom prst="hexagon">
               <a:avLst>
@@ -1305,7 +2906,7 @@
               </a:avLst>
             </a:prstGeom>
             <a:solidFill>
-              <a:srgbClr val="538bc5"/>
+              <a:srgbClr val="538BC5"/>
             </a:solidFill>
             <a:ln>
               <a:noFill/>
@@ -1326,16 +2927,11 @@
             <a:fontRef idx="minor"/>
           </p:style>
           <p:txBody>
-            <a:bodyPr lIns="90000" rIns="90000" tIns="45000" bIns="45000" anchor="ctr">
+            <a:bodyPr lIns="90000" tIns="45000" rIns="90000" bIns="45000" anchor="ctr">
               <a:noAutofit/>
             </a:bodyPr>
             <a:p>
-              <a:pPr>
-                <a:lnSpc>
-                  <a:spcPct val="100000"/>
-                </a:lnSpc>
-              </a:pPr>
-              <a:endParaRPr b="0" lang="ru-RU" sz="1800" strike="noStrike" u="none">
+              <a:endParaRPr lang="ru-RU" sz="1800" b="0" u="none" strike="noStrike">
                 <a:solidFill>
                   <a:schemeClr val="lt1"/>
                 </a:solidFill>
@@ -1354,8 +2950,8 @@
           </p:nvSpPr>
           <p:spPr>
             <a:xfrm flipV="1">
-              <a:off x="5847120" y="2269800"/>
-              <a:ext cx="1628640" cy="1404000"/>
+              <a:off x="5847120" y="2269080"/>
+              <a:ext cx="1628280" cy="1403640"/>
             </a:xfrm>
             <a:prstGeom prst="hexagon">
               <a:avLst>
@@ -1364,7 +2960,7 @@
               </a:avLst>
             </a:prstGeom>
             <a:solidFill>
-              <a:srgbClr val="2ca2ca"/>
+              <a:srgbClr val="2CA2CA"/>
             </a:solidFill>
             <a:ln>
               <a:noFill/>
@@ -1385,16 +2981,11 @@
             <a:fontRef idx="minor"/>
           </p:style>
           <p:txBody>
-            <a:bodyPr lIns="90000" rIns="90000" tIns="45000" bIns="45000" anchor="ctr">
+            <a:bodyPr lIns="90000" tIns="45000" rIns="90000" bIns="45000" anchor="ctr">
               <a:noAutofit/>
             </a:bodyPr>
             <a:p>
-              <a:pPr>
-                <a:lnSpc>
-                  <a:spcPct val="100000"/>
-                </a:lnSpc>
-              </a:pPr>
-              <a:endParaRPr b="0" lang="ru-RU" sz="1800" strike="noStrike" u="none">
+              <a:endParaRPr lang="ru-RU" sz="1800" b="0" u="none" strike="noStrike">
                 <a:solidFill>
                   <a:schemeClr val="lt1"/>
                 </a:solidFill>
@@ -1413,8 +3004,8 @@
           </p:nvSpPr>
           <p:spPr>
             <a:xfrm flipV="1">
-              <a:off x="1647360" y="1490760"/>
-              <a:ext cx="1628640" cy="1404000"/>
+              <a:off x="1647360" y="1490040"/>
+              <a:ext cx="1628280" cy="1403640"/>
             </a:xfrm>
             <a:prstGeom prst="hexagon">
               <a:avLst>
@@ -1423,7 +3014,7 @@
               </a:avLst>
             </a:prstGeom>
             <a:solidFill>
-              <a:srgbClr val="9ac758"/>
+              <a:srgbClr val="9AC758"/>
             </a:solidFill>
             <a:ln>
               <a:noFill/>
@@ -1444,16 +3035,11 @@
             <a:fontRef idx="minor"/>
           </p:style>
           <p:txBody>
-            <a:bodyPr lIns="90000" rIns="90000" tIns="45000" bIns="45000" anchor="ctr">
+            <a:bodyPr lIns="90000" tIns="45000" rIns="90000" bIns="45000" anchor="ctr">
               <a:noAutofit/>
             </a:bodyPr>
             <a:p>
-              <a:pPr>
-                <a:lnSpc>
-                  <a:spcPct val="100000"/>
-                </a:lnSpc>
-              </a:pPr>
-              <a:endParaRPr b="0" lang="ru-RU" sz="1800" strike="noStrike" u="none">
+              <a:endParaRPr lang="ru-RU" sz="1800" b="0" u="none" strike="noStrike">
                 <a:solidFill>
                   <a:schemeClr val="lt1"/>
                 </a:solidFill>
@@ -1473,7 +3059,7 @@
           <p:spPr>
             <a:xfrm>
               <a:off x="2739240" y="1647720"/>
-              <a:ext cx="1090800" cy="1090800"/>
+              <a:ext cx="1090440" cy="1090440"/>
             </a:xfrm>
             <a:prstGeom prst="arc">
               <a:avLst>
@@ -1484,7 +3070,7 @@
             <a:noFill/>
             <a:ln w="12700">
               <a:solidFill>
-                <a:srgbClr val="9ac758"/>
+                <a:srgbClr val="9AC758"/>
               </a:solidFill>
               <a:round/>
               <a:tailEnd len="med" type="arrow" w="med"/>
@@ -1503,16 +3089,11 @@
             <a:fontRef idx="minor"/>
           </p:style>
           <p:txBody>
-            <a:bodyPr lIns="90000" rIns="90000" tIns="45000" bIns="45000" anchor="ctr">
+            <a:bodyPr lIns="90000" tIns="45000" rIns="90000" bIns="45000" anchor="ctr">
               <a:noAutofit/>
             </a:bodyPr>
             <a:p>
-              <a:pPr>
-                <a:lnSpc>
-                  <a:spcPct val="100000"/>
-                </a:lnSpc>
-              </a:pPr>
-              <a:endParaRPr b="0" lang="ru-RU" sz="1800" strike="noStrike" u="none">
+              <a:endParaRPr lang="ru-RU" sz="1800" b="0" u="none" strike="noStrike">
                 <a:solidFill>
                   <a:schemeClr val="dk1"/>
                 </a:solidFill>
@@ -1532,7 +3113,7 @@
           <p:spPr>
             <a:xfrm>
               <a:off x="5546880" y="1647720"/>
-              <a:ext cx="1090800" cy="1090800"/>
+              <a:ext cx="1090440" cy="1090440"/>
             </a:xfrm>
             <a:prstGeom prst="arc">
               <a:avLst>
@@ -1543,7 +3124,7 @@
             <a:noFill/>
             <a:ln w="12700">
               <a:solidFill>
-                <a:srgbClr val="538bc5"/>
+                <a:srgbClr val="538BC5"/>
               </a:solidFill>
               <a:round/>
               <a:tailEnd len="med" type="arrow" w="med"/>
@@ -1562,16 +3143,11 @@
             <a:fontRef idx="minor"/>
           </p:style>
           <p:txBody>
-            <a:bodyPr lIns="90000" rIns="90000" tIns="45000" bIns="45000" anchor="ctr">
+            <a:bodyPr lIns="90000" tIns="45000" rIns="90000" bIns="45000" anchor="ctr">
               <a:noAutofit/>
             </a:bodyPr>
             <a:p>
-              <a:pPr>
-                <a:lnSpc>
-                  <a:spcPct val="100000"/>
-                </a:lnSpc>
-              </a:pPr>
-              <a:endParaRPr b="0" lang="ru-RU" sz="1800" strike="noStrike" u="none">
+              <a:endParaRPr lang="ru-RU" sz="1800" b="0" u="none" strike="noStrike">
                 <a:solidFill>
                   <a:schemeClr val="dk1"/>
                 </a:solidFill>
@@ -1590,8 +3166,8 @@
           </p:nvSpPr>
           <p:spPr>
             <a:xfrm flipV="1">
-              <a:off x="4142880" y="2426760"/>
-              <a:ext cx="1090800" cy="1090800"/>
+              <a:off x="4142880" y="2426040"/>
+              <a:ext cx="1090440" cy="1090440"/>
             </a:xfrm>
             <a:prstGeom prst="arc">
               <a:avLst>
@@ -1602,7 +3178,7 @@
             <a:noFill/>
             <a:ln w="12700">
               <a:solidFill>
-                <a:srgbClr val="1ba079"/>
+                <a:srgbClr val="1BA079"/>
               </a:solidFill>
               <a:round/>
               <a:tailEnd len="med" type="arrow" w="med"/>
@@ -1621,16 +3197,11 @@
             <a:fontRef idx="minor"/>
           </p:style>
           <p:txBody>
-            <a:bodyPr lIns="90000" rIns="90000" tIns="45000" bIns="45000" anchor="ctr">
+            <a:bodyPr lIns="90000" tIns="45000" rIns="90000" bIns="45000" anchor="ctr">
               <a:noAutofit/>
             </a:bodyPr>
             <a:p>
-              <a:pPr>
-                <a:lnSpc>
-                  <a:spcPct val="100000"/>
-                </a:lnSpc>
-              </a:pPr>
-              <a:endParaRPr b="0" lang="ru-RU" sz="1800" strike="noStrike" u="none">
+              <a:endParaRPr lang="ru-RU" sz="1800" b="0" u="none" strike="noStrike">
                 <a:solidFill>
                   <a:schemeClr val="dk1"/>
                 </a:solidFill>
@@ -1649,8 +3220,8 @@
           </p:nvSpPr>
           <p:spPr>
             <a:xfrm flipV="1">
-              <a:off x="7262640" y="1490760"/>
-              <a:ext cx="1628640" cy="1404000"/>
+              <a:off x="7262640" y="1490040"/>
+              <a:ext cx="1628280" cy="1403640"/>
             </a:xfrm>
             <a:prstGeom prst="hexagon">
               <a:avLst>
@@ -1661,7 +3232,7 @@
             <a:noFill/>
             <a:ln cap="rnd" w="12700">
               <a:solidFill>
-                <a:srgbClr val="538bc5"/>
+                <a:srgbClr val="538BC5"/>
               </a:solidFill>
               <a:round/>
             </a:ln>
@@ -1681,16 +3252,11 @@
             <a:fontRef idx="minor"/>
           </p:style>
           <p:txBody>
-            <a:bodyPr lIns="90000" rIns="90000" tIns="45000" bIns="45000" anchor="ctr">
+            <a:bodyPr lIns="90000" tIns="45000" rIns="90000" bIns="45000" anchor="ctr">
               <a:noAutofit/>
             </a:bodyPr>
             <a:p>
-              <a:pPr>
-                <a:lnSpc>
-                  <a:spcPct val="100000"/>
-                </a:lnSpc>
-              </a:pPr>
-              <a:endParaRPr b="0" lang="ru-RU" sz="1800" strike="noStrike" u="none">
+              <a:endParaRPr lang="ru-RU" sz="1800" b="0" u="none" strike="noStrike">
                 <a:solidFill>
                   <a:schemeClr val="lt1"/>
                 </a:solidFill>
@@ -1709,8 +3275,8 @@
           </p:nvSpPr>
           <p:spPr>
             <a:xfrm flipV="1">
-              <a:off x="251640" y="2269800"/>
-              <a:ext cx="1628640" cy="1404000"/>
+              <a:off x="251640" y="2269080"/>
+              <a:ext cx="1628280" cy="1403640"/>
             </a:xfrm>
             <a:prstGeom prst="hexagon">
               <a:avLst>
@@ -1721,7 +3287,7 @@
             <a:noFill/>
             <a:ln w="12700">
               <a:solidFill>
-                <a:srgbClr val="1ba079"/>
+                <a:srgbClr val="1BA079"/>
               </a:solidFill>
               <a:round/>
             </a:ln>
@@ -1741,16 +3307,11 @@
             <a:fontRef idx="minor"/>
           </p:style>
           <p:txBody>
-            <a:bodyPr lIns="90000" rIns="90000" tIns="45000" bIns="45000" anchor="ctr">
+            <a:bodyPr lIns="90000" tIns="45000" rIns="90000" bIns="45000" anchor="ctr">
               <a:noAutofit/>
             </a:bodyPr>
             <a:p>
-              <a:pPr>
-                <a:lnSpc>
-                  <a:spcPct val="100000"/>
-                </a:lnSpc>
-              </a:pPr>
-              <a:endParaRPr b="0" lang="ru-RU" sz="1800" strike="noStrike" u="none">
+              <a:endParaRPr lang="ru-RU" sz="1800" b="0" u="none" strike="noStrike">
                 <a:solidFill>
                   <a:schemeClr val="lt1"/>
                 </a:solidFill>
@@ -1764,18 +3325,18 @@
       </p:grpSp>
       <p:sp>
         <p:nvSpPr>
-          <p:cNvPr id="28" name="PlaceHolder 3"/>
+          <p:cNvPr id="28" name="PlaceHolder 1"/>
           <p:cNvSpPr>
             <a:spLocks noGrp="1"/>
           </p:cNvSpPr>
           <p:nvPr>
-            <p:ph type="body"/>
+            <p:ph type="sldNum" idx="1"/>
           </p:nvPr>
         </p:nvSpPr>
         <p:spPr>
           <a:xfrm>
-            <a:off x="457200" y="1203480"/>
-            <a:ext cx="8228880" cy="2982600"/>
+            <a:off x="7668360" y="4746240"/>
+            <a:ext cx="1150560" cy="272520"/>
           </a:xfrm>
           <a:prstGeom prst="rect">
             <a:avLst/>
@@ -1786,252 +3347,60 @@
           </a:ln>
         </p:spPr>
         <p:txBody>
-          <a:bodyPr lIns="0" rIns="0" tIns="0" bIns="0" anchor="t">
-            <a:normAutofit/>
+          <a:bodyPr lIns="91440" tIns="45720" rIns="91440" bIns="45720" anchor="ctr">
+            <a:noAutofit/>
           </a:bodyPr>
-          <a:p>
-            <a:pPr marL="432000" indent="-324000">
+          <a:lstStyle>
+            <a:lvl1pPr indent="0" algn="r" defTabSz="914400">
               <a:lnSpc>
                 <a:spcPct val="100000"/>
               </a:lnSpc>
-              <a:spcBef>
-                <a:spcPts val="1417"/>
-              </a:spcBef>
-              <a:buClr>
-                <a:srgbClr val="000000"/>
-              </a:buClr>
-              <a:buSzPct val="45000"/>
-              <a:buFont typeface="Wingdings" charset="2"/>
-              <a:buChar char=""/>
-            </a:pPr>
-            <a:r>
-              <a:rPr b="0" lang="en-US" sz="1800" strike="noStrike" u="none">
-                <a:solidFill>
-                  <a:srgbClr val="000000"/>
-                </a:solidFill>
-                <a:effectLst/>
-                <a:uFillTx/>
-                <a:latin typeface="Arial"/>
-              </a:rPr>
-              <a:t>Click to edit the outline text format</a:t>
-            </a:r>
-            <a:endParaRPr b="0" lang="en-US" sz="1800" strike="noStrike" u="none">
-              <a:solidFill>
-                <a:srgbClr val="000000"/>
-              </a:solidFill>
-              <a:effectLst/>
-              <a:uFillTx/>
-              <a:latin typeface="Arial"/>
-            </a:endParaRPr>
-          </a:p>
-          <a:p>
-            <a:pPr lvl="1" marL="864000" indent="-324000">
+              <a:buNone/>
+              <a:tabLst>
+                <a:tab pos="0" algn="l"/>
+              </a:tabLst>
+              <a:defRPr lang="ru-RU" sz="1000" b="0" u="none" strike="noStrike">
+                <a:solidFill>
+                  <a:schemeClr val="dk1">
+                    <a:tint val="75000"/>
+                  </a:schemeClr>
+                </a:solidFill>
+                <a:effectLst/>
+                <a:uFillTx/>
+                <a:latin typeface="SF UI Display Light"/>
+              </a:defRPr>
+            </a:lvl1pPr>
+          </a:lstStyle>
+          <a:p>
+            <a:pPr indent="0" algn="r" defTabSz="914400">
               <a:lnSpc>
                 <a:spcPct val="100000"/>
               </a:lnSpc>
-              <a:spcBef>
-                <a:spcPts val="1134"/>
-              </a:spcBef>
-              <a:buClr>
-                <a:srgbClr val="000000"/>
-              </a:buClr>
-              <a:buSzPct val="75000"/>
-              <a:buFont typeface="Symbol" charset="2"/>
-              <a:buChar char=""/>
-            </a:pPr>
-            <a:r>
-              <a:rPr b="0" lang="en-US" sz="2800" strike="noStrike" u="none">
-                <a:solidFill>
-                  <a:srgbClr val="000000"/>
-                </a:solidFill>
-                <a:effectLst/>
-                <a:uFillTx/>
-                <a:latin typeface="Arial"/>
-              </a:rPr>
-              <a:t>Second Outline Level</a:t>
-            </a:r>
-            <a:endParaRPr b="0" lang="en-US" sz="2800" strike="noStrike" u="none">
-              <a:solidFill>
-                <a:srgbClr val="000000"/>
-              </a:solidFill>
-              <a:effectLst/>
-              <a:uFillTx/>
-              <a:latin typeface="Arial"/>
-            </a:endParaRPr>
-          </a:p>
-          <a:p>
-            <a:pPr lvl="2" marL="1296000" indent="-288000">
-              <a:lnSpc>
-                <a:spcPct val="100000"/>
-              </a:lnSpc>
-              <a:spcBef>
-                <a:spcPts val="850"/>
-              </a:spcBef>
-              <a:buClr>
-                <a:srgbClr val="000000"/>
-              </a:buClr>
-              <a:buSzPct val="45000"/>
-              <a:buFont typeface="Wingdings" charset="2"/>
-              <a:buChar char=""/>
-            </a:pPr>
-            <a:r>
-              <a:rPr b="0" lang="en-US" sz="2400" strike="noStrike" u="none">
-                <a:solidFill>
-                  <a:srgbClr val="000000"/>
-                </a:solidFill>
-                <a:effectLst/>
-                <a:uFillTx/>
-                <a:latin typeface="Arial"/>
-              </a:rPr>
-              <a:t>Third Outline Level</a:t>
-            </a:r>
-            <a:endParaRPr b="0" lang="en-US" sz="2400" strike="noStrike" u="none">
-              <a:solidFill>
-                <a:srgbClr val="000000"/>
-              </a:solidFill>
-              <a:effectLst/>
-              <a:uFillTx/>
-              <a:latin typeface="Arial"/>
-            </a:endParaRPr>
-          </a:p>
-          <a:p>
-            <a:pPr lvl="3" marL="1728000" indent="-216000">
-              <a:lnSpc>
-                <a:spcPct val="100000"/>
-              </a:lnSpc>
-              <a:spcBef>
-                <a:spcPts val="567"/>
-              </a:spcBef>
-              <a:buClr>
-                <a:srgbClr val="000000"/>
-              </a:buClr>
-              <a:buSzPct val="75000"/>
-              <a:buFont typeface="Symbol" charset="2"/>
-              <a:buChar char=""/>
-            </a:pPr>
-            <a:r>
-              <a:rPr b="0" lang="en-US" sz="2000" strike="noStrike" u="none">
-                <a:solidFill>
-                  <a:srgbClr val="000000"/>
-                </a:solidFill>
-                <a:effectLst/>
-                <a:uFillTx/>
-                <a:latin typeface="Arial"/>
-              </a:rPr>
-              <a:t>Fourth Outline Level</a:t>
-            </a:r>
-            <a:endParaRPr b="0" lang="en-US" sz="2000" strike="noStrike" u="none">
-              <a:solidFill>
-                <a:srgbClr val="000000"/>
-              </a:solidFill>
-              <a:effectLst/>
-              <a:uFillTx/>
-              <a:latin typeface="Arial"/>
-            </a:endParaRPr>
-          </a:p>
-          <a:p>
-            <a:pPr lvl="4" marL="2160000" indent="-216000">
-              <a:lnSpc>
-                <a:spcPct val="100000"/>
-              </a:lnSpc>
-              <a:spcBef>
-                <a:spcPts val="283"/>
-              </a:spcBef>
-              <a:buClr>
-                <a:srgbClr val="000000"/>
-              </a:buClr>
-              <a:buSzPct val="45000"/>
-              <a:buFont typeface="Wingdings" charset="2"/>
-              <a:buChar char=""/>
-            </a:pPr>
-            <a:r>
-              <a:rPr b="0" lang="en-US" sz="2000" strike="noStrike" u="none">
-                <a:solidFill>
-                  <a:srgbClr val="000000"/>
-                </a:solidFill>
-                <a:effectLst/>
-                <a:uFillTx/>
-                <a:latin typeface="Arial"/>
-              </a:rPr>
-              <a:t>Fifth Outline Level</a:t>
-            </a:r>
-            <a:endParaRPr b="0" lang="en-US" sz="2000" strike="noStrike" u="none">
-              <a:solidFill>
-                <a:srgbClr val="000000"/>
-              </a:solidFill>
-              <a:effectLst/>
-              <a:uFillTx/>
-              <a:latin typeface="Arial"/>
-            </a:endParaRPr>
-          </a:p>
-          <a:p>
-            <a:pPr lvl="5" marL="2592000" indent="-216000">
-              <a:lnSpc>
-                <a:spcPct val="100000"/>
-              </a:lnSpc>
-              <a:spcBef>
-                <a:spcPts val="283"/>
-              </a:spcBef>
-              <a:buClr>
-                <a:srgbClr val="000000"/>
-              </a:buClr>
-              <a:buSzPct val="45000"/>
-              <a:buFont typeface="Wingdings" charset="2"/>
-              <a:buChar char=""/>
-            </a:pPr>
-            <a:r>
-              <a:rPr b="0" lang="en-US" sz="2000" strike="noStrike" u="none">
-                <a:solidFill>
-                  <a:srgbClr val="000000"/>
-                </a:solidFill>
-                <a:effectLst/>
-                <a:uFillTx/>
-                <a:latin typeface="Arial"/>
-              </a:rPr>
-              <a:t>Sixth Outline Level</a:t>
-            </a:r>
-            <a:endParaRPr b="0" lang="en-US" sz="2000" strike="noStrike" u="none">
-              <a:solidFill>
-                <a:srgbClr val="000000"/>
-              </a:solidFill>
-              <a:effectLst/>
-              <a:uFillTx/>
-              <a:latin typeface="Arial"/>
-            </a:endParaRPr>
-          </a:p>
-          <a:p>
-            <a:pPr lvl="6" marL="3024000" indent="-216000">
-              <a:lnSpc>
-                <a:spcPct val="100000"/>
-              </a:lnSpc>
-              <a:spcBef>
-                <a:spcPts val="283"/>
-              </a:spcBef>
-              <a:buClr>
-                <a:srgbClr val="000000"/>
-              </a:buClr>
-              <a:buSzPct val="45000"/>
-              <a:buFont typeface="Wingdings" charset="2"/>
-              <a:buChar char=""/>
-            </a:pPr>
-            <a:r>
-              <a:rPr b="0" lang="en-US" sz="2000" strike="noStrike" u="none">
-                <a:solidFill>
-                  <a:srgbClr val="000000"/>
-                </a:solidFill>
-                <a:effectLst/>
-                <a:uFillTx/>
-                <a:latin typeface="Arial"/>
-              </a:rPr>
-              <a:t>Seventh Outline Level</a:t>
-            </a:r>
-            <a:endParaRPr b="0" lang="en-US" sz="2000" strike="noStrike" u="none">
-              <a:solidFill>
-                <a:srgbClr val="000000"/>
-              </a:solidFill>
-              <a:effectLst/>
-              <a:uFillTx/>
-              <a:latin typeface="Arial"/>
+              <a:buNone/>
+              <a:tabLst>
+                <a:tab pos="0" algn="l"/>
+              </a:tabLst>
+            </a:pPr>
+            <a:fld id="{E31BCBB7-6EF5-4E81-B107-4618A55B677B}" type="slidenum">
+              <a:rPr lang="ru-RU" sz="1000" b="0" u="none" strike="noStrike">
+                <a:solidFill>
+                  <a:schemeClr val="dk1">
+                    <a:tint val="75000"/>
+                  </a:schemeClr>
+                </a:solidFill>
+                <a:effectLst/>
+                <a:uFillTx/>
+                <a:latin typeface="SF UI Display Light"/>
+              </a:rPr>
+              <a:t>&lt;number&gt;</a:t>
+            </a:fld>
+            <a:endParaRPr lang="en-US" sz="1000" b="0" u="none" strike="noStrike">
+              <a:solidFill>
+                <a:srgbClr val="000000"/>
+              </a:solidFill>
+              <a:effectLst/>
+              <a:uFillTx/>
+              <a:latin typeface="Times New Roman"/>
             </a:endParaRPr>
           </a:p>
         </p:txBody>
@@ -2062,667 +3431,13 @@
           <a:chExt cx="0" cy="0"/>
         </a:xfrm>
       </p:grpSpPr>
-      <p:pic>
-        <p:nvPicPr>
-          <p:cNvPr id="29" name="Рисунок 5" descr="logo-02.jpg"/>
-          <p:cNvPicPr/>
-          <p:nvPr/>
-        </p:nvPicPr>
-        <p:blipFill>
-          <a:blip r:embed="rId2"/>
-          <a:stretch/>
-        </p:blipFill>
-        <p:spPr>
-          <a:xfrm>
-            <a:off x="114480" y="0"/>
-            <a:ext cx="1510920" cy="718920"/>
-          </a:xfrm>
-          <a:prstGeom prst="rect">
-            <a:avLst/>
-          </a:prstGeom>
-          <a:noFill/>
-          <a:ln w="0">
-            <a:noFill/>
-          </a:ln>
-        </p:spPr>
-      </p:pic>
-      <p:grpSp>
-        <p:nvGrpSpPr>
-          <p:cNvPr id="30" name="Группа 27"/>
-          <p:cNvGrpSpPr/>
-          <p:nvPr/>
-        </p:nvGrpSpPr>
-        <p:grpSpPr>
-          <a:xfrm>
-            <a:off x="360" y="5143680"/>
-            <a:ext cx="9144720" cy="720"/>
-            <a:chOff x="360" y="5143680"/>
-            <a:chExt cx="9144720" cy="720"/>
-          </a:xfrm>
-        </p:grpSpPr>
-        <p:cxnSp>
-          <p:nvCxnSpPr>
-            <p:cNvPr id="31" name="Прямая соединительная линия 7"/>
-            <p:cNvCxnSpPr/>
-            <p:nvPr/>
-          </p:nvCxnSpPr>
-          <p:spPr>
-            <a:xfrm flipH="1">
-              <a:off x="1836000" y="5143680"/>
-              <a:ext cx="7309440" cy="1080"/>
-            </a:xfrm>
-            <a:prstGeom prst="straightConnector1">
-              <a:avLst/>
-            </a:prstGeom>
-            <a:ln w="76200">
-              <a:solidFill>
-                <a:srgbClr val="0081a1"/>
-              </a:solidFill>
-              <a:round/>
-            </a:ln>
-          </p:spPr>
-        </p:cxnSp>
-        <p:cxnSp>
-          <p:nvCxnSpPr>
-            <p:cNvPr id="32" name="Прямая соединительная линия 9"/>
-            <p:cNvCxnSpPr/>
-            <p:nvPr/>
-          </p:nvCxnSpPr>
-          <p:spPr>
-            <a:xfrm flipH="1">
-              <a:off x="1206360" y="5143680"/>
-              <a:ext cx="649080" cy="1080"/>
-            </a:xfrm>
-            <a:prstGeom prst="straightConnector1">
-              <a:avLst/>
-            </a:prstGeom>
-            <a:ln w="76200">
-              <a:solidFill>
-                <a:srgbClr val="94c500"/>
-              </a:solidFill>
-              <a:round/>
-            </a:ln>
-          </p:spPr>
-        </p:cxnSp>
-        <p:cxnSp>
-          <p:nvCxnSpPr>
-            <p:cNvPr id="33" name="Прямая соединительная линия 11"/>
-            <p:cNvCxnSpPr/>
-            <p:nvPr/>
-          </p:nvCxnSpPr>
-          <p:spPr>
-            <a:xfrm flipH="1">
-              <a:off x="525600" y="5143680"/>
-              <a:ext cx="721440" cy="1080"/>
-            </a:xfrm>
-            <a:prstGeom prst="straightConnector1">
-              <a:avLst/>
-            </a:prstGeom>
-            <a:ln w="76200">
-              <a:solidFill>
-                <a:srgbClr val="fbc800"/>
-              </a:solidFill>
-              <a:round/>
-            </a:ln>
-          </p:spPr>
-        </p:cxnSp>
-        <p:cxnSp>
-          <p:nvCxnSpPr>
-            <p:cNvPr id="34" name="Прямая соединительная линия 12"/>
-            <p:cNvCxnSpPr/>
-            <p:nvPr/>
-          </p:nvCxnSpPr>
-          <p:spPr>
-            <a:xfrm flipH="1">
-              <a:off x="360" y="5143680"/>
-              <a:ext cx="612360" cy="1080"/>
-            </a:xfrm>
-            <a:prstGeom prst="straightConnector1">
-              <a:avLst/>
-            </a:prstGeom>
-            <a:ln w="76200">
-              <a:solidFill>
-                <a:srgbClr val="e42a00"/>
-              </a:solidFill>
-              <a:round/>
-            </a:ln>
-          </p:spPr>
-        </p:cxnSp>
-      </p:grpSp>
-      <p:sp>
-        <p:nvSpPr>
-          <p:cNvPr id="35" name="PlaceHolder 1"/>
-          <p:cNvSpPr>
-            <a:spLocks noGrp="1"/>
-          </p:cNvSpPr>
-          <p:nvPr>
-            <p:ph type="title"/>
-          </p:nvPr>
-        </p:nvSpPr>
-        <p:spPr>
-          <a:xfrm>
-            <a:off x="1784520" y="291600"/>
-            <a:ext cx="7010280" cy="274680"/>
-          </a:xfrm>
-          <a:prstGeom prst="rect">
-            <a:avLst/>
-          </a:prstGeom>
-          <a:noFill/>
-          <a:ln w="0">
-            <a:noFill/>
-          </a:ln>
-        </p:spPr>
-        <p:txBody>
-          <a:bodyPr lIns="0" rIns="0" tIns="0" bIns="0" anchor="ctr" anchorCtr="1">
-            <a:spAutoFit/>
-          </a:bodyPr>
-          <a:p>
-            <a:pPr indent="0">
-              <a:buNone/>
-            </a:pPr>
-            <a:r>
-              <a:rPr b="0" lang="en-US" sz="1800" strike="noStrike" u="none">
-                <a:solidFill>
-                  <a:srgbClr val="000000"/>
-                </a:solidFill>
-                <a:effectLst/>
-                <a:uFillTx/>
-                <a:latin typeface="Arial"/>
-              </a:rPr>
-              <a:t>Click to edit the title text format</a:t>
-            </a:r>
-            <a:endParaRPr b="0" lang="en-US" sz="1800" strike="noStrike" u="none">
-              <a:solidFill>
-                <a:srgbClr val="000000"/>
-              </a:solidFill>
-              <a:effectLst/>
-              <a:uFillTx/>
-              <a:latin typeface="Arial"/>
-            </a:endParaRPr>
-          </a:p>
-        </p:txBody>
-      </p:sp>
-      <p:sp>
-        <p:nvSpPr>
-          <p:cNvPr id="36" name="PlaceHolder 2"/>
-          <p:cNvSpPr>
-            <a:spLocks noGrp="1"/>
-          </p:cNvSpPr>
-          <p:nvPr>
-            <p:ph type="body"/>
-          </p:nvPr>
-        </p:nvSpPr>
-        <p:spPr>
-          <a:xfrm>
-            <a:off x="457200" y="1203480"/>
-            <a:ext cx="8228880" cy="2982600"/>
-          </a:xfrm>
-          <a:prstGeom prst="rect">
-            <a:avLst/>
-          </a:prstGeom>
-          <a:noFill/>
-          <a:ln w="0">
-            <a:noFill/>
-          </a:ln>
-        </p:spPr>
-        <p:txBody>
-          <a:bodyPr lIns="0" rIns="0" tIns="0" bIns="0" anchor="t">
-            <a:normAutofit/>
-          </a:bodyPr>
-          <a:p>
-            <a:pPr marL="432000" indent="-324000">
-              <a:spcBef>
-                <a:spcPts val="1417"/>
-              </a:spcBef>
-              <a:buClr>
-                <a:srgbClr val="000000"/>
-              </a:buClr>
-              <a:buSzPct val="45000"/>
-              <a:buFont typeface="Wingdings" charset="2"/>
-              <a:buChar char=""/>
-            </a:pPr>
-            <a:r>
-              <a:rPr b="0" lang="en-US" sz="1800" strike="noStrike" u="none">
-                <a:solidFill>
-                  <a:srgbClr val="000000"/>
-                </a:solidFill>
-                <a:effectLst/>
-                <a:uFillTx/>
-                <a:latin typeface="Arial"/>
-              </a:rPr>
-              <a:t>Click to edit the outline text format</a:t>
-            </a:r>
-            <a:endParaRPr b="0" lang="en-US" sz="1800" strike="noStrike" u="none">
-              <a:solidFill>
-                <a:srgbClr val="000000"/>
-              </a:solidFill>
-              <a:effectLst/>
-              <a:uFillTx/>
-              <a:latin typeface="Arial"/>
-            </a:endParaRPr>
-          </a:p>
-          <a:p>
-            <a:pPr lvl="1" marL="864000" indent="-324000">
-              <a:spcBef>
-                <a:spcPts val="1134"/>
-              </a:spcBef>
-              <a:buClr>
-                <a:srgbClr val="000000"/>
-              </a:buClr>
-              <a:buSzPct val="75000"/>
-              <a:buFont typeface="Symbol" charset="2"/>
-              <a:buChar char=""/>
-            </a:pPr>
-            <a:r>
-              <a:rPr b="0" lang="en-US" sz="1800" strike="noStrike" u="none">
-                <a:solidFill>
-                  <a:srgbClr val="000000"/>
-                </a:solidFill>
-                <a:effectLst/>
-                <a:uFillTx/>
-                <a:latin typeface="Arial"/>
-              </a:rPr>
-              <a:t>Second Outline Level</a:t>
-            </a:r>
-            <a:endParaRPr b="0" lang="en-US" sz="1800" strike="noStrike" u="none">
-              <a:solidFill>
-                <a:srgbClr val="000000"/>
-              </a:solidFill>
-              <a:effectLst/>
-              <a:uFillTx/>
-              <a:latin typeface="Arial"/>
-            </a:endParaRPr>
-          </a:p>
-          <a:p>
-            <a:pPr lvl="2" marL="1296000" indent="-288000">
-              <a:spcBef>
-                <a:spcPts val="850"/>
-              </a:spcBef>
-              <a:buClr>
-                <a:srgbClr val="000000"/>
-              </a:buClr>
-              <a:buSzPct val="45000"/>
-              <a:buFont typeface="Wingdings" charset="2"/>
-              <a:buChar char=""/>
-            </a:pPr>
-            <a:r>
-              <a:rPr b="0" lang="en-US" sz="1800" strike="noStrike" u="none">
-                <a:solidFill>
-                  <a:srgbClr val="000000"/>
-                </a:solidFill>
-                <a:effectLst/>
-                <a:uFillTx/>
-                <a:latin typeface="Arial"/>
-              </a:rPr>
-              <a:t>Third Outline Level</a:t>
-            </a:r>
-            <a:endParaRPr b="0" lang="en-US" sz="1800" strike="noStrike" u="none">
-              <a:solidFill>
-                <a:srgbClr val="000000"/>
-              </a:solidFill>
-              <a:effectLst/>
-              <a:uFillTx/>
-              <a:latin typeface="Arial"/>
-            </a:endParaRPr>
-          </a:p>
-          <a:p>
-            <a:pPr lvl="3" marL="1728000" indent="-216000">
-              <a:spcBef>
-                <a:spcPts val="567"/>
-              </a:spcBef>
-              <a:buClr>
-                <a:srgbClr val="000000"/>
-              </a:buClr>
-              <a:buSzPct val="75000"/>
-              <a:buFont typeface="Symbol" charset="2"/>
-              <a:buChar char=""/>
-            </a:pPr>
-            <a:r>
-              <a:rPr b="0" lang="en-US" sz="1800" strike="noStrike" u="none">
-                <a:solidFill>
-                  <a:srgbClr val="000000"/>
-                </a:solidFill>
-                <a:effectLst/>
-                <a:uFillTx/>
-                <a:latin typeface="Arial"/>
-              </a:rPr>
-              <a:t>Fourth Outline Level</a:t>
-            </a:r>
-            <a:endParaRPr b="0" lang="en-US" sz="1800" strike="noStrike" u="none">
-              <a:solidFill>
-                <a:srgbClr val="000000"/>
-              </a:solidFill>
-              <a:effectLst/>
-              <a:uFillTx/>
-              <a:latin typeface="Arial"/>
-            </a:endParaRPr>
-          </a:p>
-          <a:p>
-            <a:pPr lvl="4" marL="2160000" indent="-216000">
-              <a:spcBef>
-                <a:spcPts val="283"/>
-              </a:spcBef>
-              <a:buClr>
-                <a:srgbClr val="000000"/>
-              </a:buClr>
-              <a:buSzPct val="45000"/>
-              <a:buFont typeface="Wingdings" charset="2"/>
-              <a:buChar char=""/>
-            </a:pPr>
-            <a:r>
-              <a:rPr b="0" lang="en-US" sz="1800" strike="noStrike" u="none">
-                <a:solidFill>
-                  <a:srgbClr val="000000"/>
-                </a:solidFill>
-                <a:effectLst/>
-                <a:uFillTx/>
-                <a:latin typeface="Arial"/>
-              </a:rPr>
-              <a:t>Fifth Outline Level</a:t>
-            </a:r>
-            <a:endParaRPr b="0" lang="en-US" sz="1800" strike="noStrike" u="none">
-              <a:solidFill>
-                <a:srgbClr val="000000"/>
-              </a:solidFill>
-              <a:effectLst/>
-              <a:uFillTx/>
-              <a:latin typeface="Arial"/>
-            </a:endParaRPr>
-          </a:p>
-          <a:p>
-            <a:pPr lvl="5" marL="2592000" indent="-216000">
-              <a:spcBef>
-                <a:spcPts val="283"/>
-              </a:spcBef>
-              <a:buClr>
-                <a:srgbClr val="000000"/>
-              </a:buClr>
-              <a:buSzPct val="45000"/>
-              <a:buFont typeface="Wingdings" charset="2"/>
-              <a:buChar char=""/>
-            </a:pPr>
-            <a:r>
-              <a:rPr b="0" lang="en-US" sz="1800" strike="noStrike" u="none">
-                <a:solidFill>
-                  <a:srgbClr val="000000"/>
-                </a:solidFill>
-                <a:effectLst/>
-                <a:uFillTx/>
-                <a:latin typeface="Arial"/>
-              </a:rPr>
-              <a:t>Sixth Outline Level</a:t>
-            </a:r>
-            <a:endParaRPr b="0" lang="en-US" sz="1800" strike="noStrike" u="none">
-              <a:solidFill>
-                <a:srgbClr val="000000"/>
-              </a:solidFill>
-              <a:effectLst/>
-              <a:uFillTx/>
-              <a:latin typeface="Arial"/>
-            </a:endParaRPr>
-          </a:p>
-          <a:p>
-            <a:pPr lvl="6" marL="3024000" indent="-216000">
-              <a:spcBef>
-                <a:spcPts val="283"/>
-              </a:spcBef>
-              <a:buClr>
-                <a:srgbClr val="000000"/>
-              </a:buClr>
-              <a:buSzPct val="45000"/>
-              <a:buFont typeface="Wingdings" charset="2"/>
-              <a:buChar char=""/>
-            </a:pPr>
-            <a:r>
-              <a:rPr b="0" lang="en-US" sz="1800" strike="noStrike" u="none">
-                <a:solidFill>
-                  <a:srgbClr val="000000"/>
-                </a:solidFill>
-                <a:effectLst/>
-                <a:uFillTx/>
-                <a:latin typeface="Arial"/>
-              </a:rPr>
-              <a:t>Seventh Outline Level</a:t>
-            </a:r>
-            <a:endParaRPr b="0" lang="en-US" sz="1800" strike="noStrike" u="none">
-              <a:solidFill>
-                <a:srgbClr val="000000"/>
-              </a:solidFill>
-              <a:effectLst/>
-              <a:uFillTx/>
-              <a:latin typeface="Arial"/>
-            </a:endParaRPr>
-          </a:p>
-        </p:txBody>
-      </p:sp>
-      <p:sp>
-        <p:nvSpPr>
-          <p:cNvPr id="37" name="PlaceHolder 3"/>
-          <p:cNvSpPr>
-            <a:spLocks noGrp="1"/>
-          </p:cNvSpPr>
-          <p:nvPr>
-            <p:ph type="ftr" idx="2"/>
-          </p:nvPr>
-        </p:nvSpPr>
-        <p:spPr>
-          <a:xfrm>
-            <a:off x="3126960" y="4685760"/>
-            <a:ext cx="2897640" cy="353880"/>
-          </a:xfrm>
-          <a:prstGeom prst="rect">
-            <a:avLst/>
-          </a:prstGeom>
-          <a:noFill/>
-          <a:ln w="0">
-            <a:noFill/>
-          </a:ln>
-        </p:spPr>
-        <p:txBody>
-          <a:bodyPr lIns="0" rIns="0" tIns="0" bIns="0" anchor="t">
-            <a:noAutofit/>
-          </a:bodyPr>
-          <a:lstStyle>
-            <a:lvl1pPr indent="0" algn="ctr">
-              <a:lnSpc>
-                <a:spcPct val="100000"/>
-              </a:lnSpc>
-              <a:buNone/>
-              <a:tabLst>
-                <a:tab algn="l" pos="0"/>
-              </a:tabLst>
-              <a:defRPr b="0" lang="en-US" sz="1400" strike="noStrike" u="none">
-                <a:solidFill>
-                  <a:srgbClr val="000000"/>
-                </a:solidFill>
-                <a:effectLst/>
-                <a:uFillTx/>
-                <a:latin typeface="Times New Roman"/>
-              </a:defRPr>
-            </a:lvl1pPr>
-          </a:lstStyle>
-          <a:p>
-            <a:pPr indent="0" algn="ctr">
-              <a:lnSpc>
-                <a:spcPct val="100000"/>
-              </a:lnSpc>
-              <a:buNone/>
-              <a:tabLst>
-                <a:tab algn="l" pos="0"/>
-              </a:tabLst>
-            </a:pPr>
-            <a:r>
-              <a:rPr b="0" lang="en-US" sz="1400" strike="noStrike" u="none">
-                <a:solidFill>
-                  <a:srgbClr val="000000"/>
-                </a:solidFill>
-                <a:effectLst/>
-                <a:uFillTx/>
-                <a:latin typeface="Times New Roman"/>
-              </a:rPr>
-              <a:t>&lt;footer&gt;</a:t>
-            </a:r>
-            <a:endParaRPr b="0" lang="en-US" sz="1400" strike="noStrike" u="none">
-              <a:solidFill>
-                <a:srgbClr val="000000"/>
-              </a:solidFill>
-              <a:effectLst/>
-              <a:uFillTx/>
-              <a:latin typeface="Times New Roman"/>
-            </a:endParaRPr>
-          </a:p>
-        </p:txBody>
-      </p:sp>
-      <p:sp>
-        <p:nvSpPr>
-          <p:cNvPr id="38" name="PlaceHolder 4"/>
-          <p:cNvSpPr>
-            <a:spLocks noGrp="1"/>
-          </p:cNvSpPr>
-          <p:nvPr>
-            <p:ph type="sldNum" idx="3"/>
-          </p:nvPr>
-        </p:nvSpPr>
-        <p:spPr>
-          <a:xfrm>
-            <a:off x="6555960" y="4685760"/>
-            <a:ext cx="2129760" cy="353880"/>
-          </a:xfrm>
-          <a:prstGeom prst="rect">
-            <a:avLst/>
-          </a:prstGeom>
-          <a:noFill/>
-          <a:ln w="0">
-            <a:noFill/>
-          </a:ln>
-        </p:spPr>
-        <p:txBody>
-          <a:bodyPr lIns="0" rIns="0" tIns="0" bIns="0" anchor="t">
-            <a:noAutofit/>
-          </a:bodyPr>
-          <a:lstStyle>
-            <a:lvl1pPr indent="0" algn="r">
-              <a:lnSpc>
-                <a:spcPct val="100000"/>
-              </a:lnSpc>
-              <a:buNone/>
-              <a:tabLst>
-                <a:tab algn="l" pos="0"/>
-              </a:tabLst>
-              <a:defRPr b="0" lang="en-US" sz="1400" strike="noStrike" u="none">
-                <a:solidFill>
-                  <a:srgbClr val="000000"/>
-                </a:solidFill>
-                <a:effectLst/>
-                <a:uFillTx/>
-                <a:latin typeface="Times New Roman"/>
-              </a:defRPr>
-            </a:lvl1pPr>
-          </a:lstStyle>
-          <a:p>
-            <a:pPr indent="0" algn="r">
-              <a:lnSpc>
-                <a:spcPct val="100000"/>
-              </a:lnSpc>
-              <a:buNone/>
-              <a:tabLst>
-                <a:tab algn="l" pos="0"/>
-              </a:tabLst>
-            </a:pPr>
-            <a:fld id="{8DC9CDB9-125A-4798-B016-79EECF87D3A4}" type="slidenum">
-              <a:rPr b="0" lang="en-US" sz="1400" strike="noStrike" u="none">
-                <a:solidFill>
-                  <a:srgbClr val="000000"/>
-                </a:solidFill>
-                <a:effectLst/>
-                <a:uFillTx/>
-                <a:latin typeface="Times New Roman"/>
-              </a:rPr>
-              <a:t>&lt;number&gt;</a:t>
-            </a:fld>
-            <a:endParaRPr b="0" lang="en-US" sz="1400" strike="noStrike" u="none">
-              <a:solidFill>
-                <a:srgbClr val="000000"/>
-              </a:solidFill>
-              <a:effectLst/>
-              <a:uFillTx/>
-              <a:latin typeface="Times New Roman"/>
-            </a:endParaRPr>
-          </a:p>
-        </p:txBody>
-      </p:sp>
-      <p:sp>
-        <p:nvSpPr>
-          <p:cNvPr id="39" name="PlaceHolder 5"/>
-          <p:cNvSpPr>
-            <a:spLocks noGrp="1"/>
-          </p:cNvSpPr>
-          <p:nvPr>
-            <p:ph type="dt" idx="4"/>
-          </p:nvPr>
-        </p:nvSpPr>
-        <p:spPr>
-          <a:xfrm>
-            <a:off x="457200" y="4685760"/>
-            <a:ext cx="2129760" cy="353880"/>
-          </a:xfrm>
-          <a:prstGeom prst="rect">
-            <a:avLst/>
-          </a:prstGeom>
-          <a:noFill/>
-          <a:ln w="0">
-            <a:noFill/>
-          </a:ln>
-        </p:spPr>
-        <p:txBody>
-          <a:bodyPr lIns="0" rIns="0" tIns="0" bIns="0" anchor="t">
-            <a:noAutofit/>
-          </a:bodyPr>
-          <a:lstStyle>
-            <a:lvl1pPr indent="0">
-              <a:buNone/>
-              <a:defRPr b="0" lang="en-US" sz="1400" strike="noStrike" u="none">
-                <a:solidFill>
-                  <a:srgbClr val="000000"/>
-                </a:solidFill>
-                <a:effectLst/>
-                <a:uFillTx/>
-                <a:latin typeface="Times New Roman"/>
-              </a:defRPr>
-            </a:lvl1pPr>
-          </a:lstStyle>
-          <a:p>
-            <a:pPr indent="0">
-              <a:buNone/>
-            </a:pPr>
-            <a:r>
-              <a:rPr b="0" lang="en-US" sz="1400" strike="noStrike" u="none">
-                <a:solidFill>
-                  <a:srgbClr val="000000"/>
-                </a:solidFill>
-                <a:effectLst/>
-                <a:uFillTx/>
-                <a:latin typeface="Times New Roman"/>
-              </a:rPr>
-              <a:t>&lt;date/time&gt;</a:t>
-            </a:r>
-            <a:endParaRPr b="0" lang="en-US" sz="1400" strike="noStrike" u="none">
-              <a:solidFill>
-                <a:srgbClr val="000000"/>
-              </a:solidFill>
-              <a:effectLst/>
-              <a:uFillTx/>
-              <a:latin typeface="Times New Roman"/>
-            </a:endParaRPr>
-          </a:p>
-        </p:txBody>
-      </p:sp>
     </p:spTree>
   </p:cSld>
   <p:clrMap bg1="lt1" tx1="dk1" bg2="lt2" tx2="dk2" accent1="accent1" accent2="accent2" accent3="accent3" accent4="accent4" accent5="accent5" accent6="accent6" hlink="hlink" folHlink="folHlink"/>
   <p:sldLayoutIdLst>
-    <p:sldLayoutId id="2147483653" r:id="rId3"/>
-    <p:sldLayoutId id="2147483654" r:id="rId4"/>
+    <p:sldLayoutId id="2147483653" r:id="rId2"/>
+    <p:sldLayoutId id="2147483654" r:id="rId3"/>
+    <p:sldLayoutId id="2147483655" r:id="rId4"/>
   </p:sldLayoutIdLst>
 </p:sldMaster>
 </file>
@@ -2746,7 +3461,7 @@
       </p:grpSpPr>
       <p:sp>
         <p:nvSpPr>
-          <p:cNvPr id="42" name="PlaceHolder 1"/>
+          <p:cNvPr id="60" name="PlaceHolder 1"/>
           <p:cNvSpPr>
             <a:spLocks noGrp="1"/>
           </p:cNvSpPr>
@@ -2757,7 +3472,7 @@
         <p:spPr>
           <a:xfrm>
             <a:off x="360" y="3886200"/>
-            <a:ext cx="9142920" cy="525240"/>
+            <a:ext cx="9142560" cy="524880"/>
           </a:xfrm>
           <a:prstGeom prst="rect">
             <a:avLst/>
@@ -2768,7 +3483,7 @@
           </a:ln>
         </p:spPr>
         <p:txBody>
-          <a:bodyPr lIns="91440" rIns="91440" tIns="45720" bIns="45720" anchor="ctr">
+          <a:bodyPr lIns="91440" tIns="45720" rIns="91440" bIns="45720" anchor="ctr">
             <a:noAutofit/>
           </a:bodyPr>
           <a:p>
@@ -2778,13 +3493,13 @@
               </a:lnSpc>
               <a:buNone/>
               <a:tabLst>
-                <a:tab algn="l" pos="0"/>
+                <a:tab pos="0" algn="l"/>
               </a:tabLst>
             </a:pPr>
             <a:r>
-              <a:rPr b="0" lang="ru-RU" sz="2800" strike="noStrike" u="none">
-                <a:solidFill>
-                  <a:srgbClr val="0081a1"/>
+              <a:rPr lang="ru-RU" sz="2800" b="0" u="none" strike="noStrike">
+                <a:solidFill>
+                  <a:srgbClr val="0081A1"/>
                 </a:solidFill>
                 <a:effectLst/>
                 <a:uFillTx/>
@@ -2792,7 +3507,7 @@
               </a:rPr>
               <a:t>АТТЕСТАЦИОННАЯ ПРЕЗЕНТАЦИЯ</a:t>
             </a:r>
-            <a:endParaRPr b="0" lang="en-US" sz="2800" strike="noStrike" u="none">
+            <a:endParaRPr lang="en-US" sz="2800" b="0" u="none" strike="noStrike">
               <a:solidFill>
                 <a:srgbClr val="000000"/>
               </a:solidFill>
@@ -2805,7 +3520,7 @@
       </p:sp>
       <p:pic>
         <p:nvPicPr>
-          <p:cNvPr id="43" name="" descr=""/>
+          <p:cNvPr id="61" name=""/>
           <p:cNvPicPr/>
           <p:nvPr/>
         </p:nvPicPr>
@@ -2816,7 +3531,7 @@
         <p:spPr>
           <a:xfrm>
             <a:off x="360" y="914400"/>
-            <a:ext cx="9142920" cy="2971080"/>
+            <a:ext cx="9142560" cy="2970720"/>
           </a:xfrm>
           <a:prstGeom prst="rect">
             <a:avLst/>
@@ -2829,14 +3544,14 @@
       </p:pic>
       <p:sp>
         <p:nvSpPr>
-          <p:cNvPr id="44" name=""/>
+          <p:cNvPr id="62" name=""/>
           <p:cNvSpPr/>
           <p:nvPr/>
         </p:nvSpPr>
         <p:spPr>
           <a:xfrm>
             <a:off x="3907080" y="141480"/>
-            <a:ext cx="5026680" cy="639000"/>
+            <a:ext cx="5026320" cy="638280"/>
           </a:xfrm>
           <a:prstGeom prst="rect">
             <a:avLst/>
@@ -2853,7 +3568,7 @@
           <a:fontRef idx="minor"/>
         </p:style>
         <p:txBody>
-          <a:bodyPr lIns="90000" rIns="90000" tIns="45000" bIns="45000" anchor="t" anchorCtr="1">
+          <a:bodyPr lIns="90000" tIns="45000" rIns="90000" bIns="45000" anchor="t" anchorCtr="1">
             <a:spAutoFit/>
           </a:bodyPr>
           <a:p>
@@ -2863,7 +3578,7 @@
               </a:lnSpc>
             </a:pPr>
             <a:r>
-              <a:rPr b="0" lang="en-US" sz="1800" strike="noStrike" u="none">
+              <a:rPr lang="en-US" sz="1800" b="0" u="none" strike="noStrike">
                 <a:solidFill>
                   <a:srgbClr val="000000"/>
                 </a:solidFill>
@@ -2873,7 +3588,7 @@
               </a:rPr>
               <a:t>Кузнецов Игорь Витальевич</a:t>
             </a:r>
-            <a:endParaRPr b="0" lang="en-US" sz="1800" strike="noStrike" u="none">
+            <a:endParaRPr lang="en-US" sz="1800" b="0" u="none" strike="noStrike">
               <a:solidFill>
                 <a:srgbClr val="000000"/>
               </a:solidFill>
@@ -2889,7 +3604,7 @@
               </a:lnSpc>
             </a:pPr>
             <a:r>
-              <a:rPr b="0" lang="en-US" sz="1800" strike="noStrike" u="none">
+              <a:rPr lang="en-US" sz="1800" b="0" u="none" strike="noStrike">
                 <a:solidFill>
                   <a:srgbClr val="000000"/>
                 </a:solidFill>
@@ -2899,7 +3614,7 @@
               </a:rPr>
               <a:t>старший инженер системный программист</a:t>
             </a:r>
-            <a:endParaRPr b="0" lang="en-US" sz="1800" strike="noStrike" u="none">
+            <a:endParaRPr lang="en-US" sz="1800" b="0" u="none" strike="noStrike">
               <a:solidFill>
                 <a:srgbClr val="000000"/>
               </a:solidFill>
@@ -2942,7 +3657,7 @@
       </p:grpSpPr>
       <p:sp>
         <p:nvSpPr>
-          <p:cNvPr id="45" name="PlaceHolder 1"/>
+          <p:cNvPr id="63" name="PlaceHolder 1"/>
           <p:cNvSpPr>
             <a:spLocks noGrp="1"/>
           </p:cNvSpPr>
@@ -2952,8 +3667,8 @@
         </p:nvSpPr>
         <p:spPr>
           <a:xfrm>
-            <a:off x="1993680" y="-360"/>
-            <a:ext cx="6832800" cy="858960"/>
+            <a:off x="1854360" y="-173520"/>
+            <a:ext cx="6832440" cy="859320"/>
           </a:xfrm>
           <a:prstGeom prst="rect">
             <a:avLst/>
@@ -2964,7 +3679,7 @@
           </a:ln>
         </p:spPr>
         <p:txBody>
-          <a:bodyPr lIns="0" rIns="0" tIns="0" bIns="0" anchor="ctr" anchorCtr="1">
+          <a:bodyPr lIns="0" tIns="0" rIns="0" bIns="0" anchor="ctr" anchorCtr="1">
             <a:spAutoFit/>
           </a:bodyPr>
           <a:p>
@@ -2974,13 +3689,13 @@
               </a:lnSpc>
               <a:buNone/>
               <a:tabLst>
-                <a:tab algn="l" pos="0"/>
+                <a:tab pos="0" algn="l"/>
               </a:tabLst>
             </a:pPr>
             <a:r>
-              <a:rPr b="0" lang="ru-RU" sz="2400" strike="noStrike" u="none">
-                <a:solidFill>
-                  <a:srgbClr val="0081a0"/>
+              <a:rPr lang="ru-RU" sz="2400" b="0" u="none" strike="noStrike">
+                <a:solidFill>
+                  <a:srgbClr val="0081A0"/>
                 </a:solidFill>
                 <a:effectLst/>
                 <a:uFillTx/>
@@ -2988,7 +3703,7 @@
               </a:rPr>
               <a:t>Работа в НПО Криста</a:t>
             </a:r>
-            <a:endParaRPr b="0" lang="en-US" sz="2400" strike="noStrike" u="none">
+            <a:endParaRPr lang="en-US" sz="2400" b="0" u="none" strike="noStrike">
               <a:solidFill>
                 <a:srgbClr val="000000"/>
               </a:solidFill>
@@ -3001,7 +3716,7 @@
       </p:sp>
       <p:sp>
         <p:nvSpPr>
-          <p:cNvPr id="46" name="PlaceHolder 2"/>
+          <p:cNvPr id="64" name="PlaceHolder 2"/>
           <p:cNvSpPr>
             <a:spLocks noGrp="1"/>
           </p:cNvSpPr>
@@ -3012,7 +3727,7 @@
         <p:spPr>
           <a:xfrm>
             <a:off x="457200" y="965520"/>
-            <a:ext cx="8228880" cy="3585240"/>
+            <a:ext cx="8228520" cy="3584880"/>
           </a:xfrm>
           <a:prstGeom prst="rect">
             <a:avLst/>
@@ -3023,7 +3738,7 @@
           </a:ln>
         </p:spPr>
         <p:txBody>
-          <a:bodyPr lIns="0" rIns="0" tIns="0" bIns="0" anchor="t">
+          <a:bodyPr lIns="0" tIns="0" rIns="0" bIns="0" anchor="t">
             <a:normAutofit/>
           </a:bodyPr>
           <a:p>
@@ -3041,7 +3756,7 @@
               <a:buChar char="►"/>
             </a:pPr>
             <a:r>
-              <a:rPr b="1" lang="ru-RU" sz="1800" strike="noStrike" u="none">
+              <a:rPr lang="ru-RU" sz="1800" b="1" u="none" strike="noStrike">
                 <a:solidFill>
                   <a:srgbClr val="000000"/>
                 </a:solidFill>
@@ -3052,7 +3767,7 @@
               <a:t>2015 г.</a:t>
             </a:r>
             <a:r>
-              <a:rPr b="0" lang="ru-RU" sz="1800" strike="noStrike" u="none">
+              <a:rPr lang="ru-RU" sz="1800" b="0" u="none" strike="noStrike">
                 <a:solidFill>
                   <a:srgbClr val="000000"/>
                 </a:solidFill>
@@ -3063,7 +3778,7 @@
               <a:t> - </a:t>
             </a:r>
             <a:r>
-              <a:rPr b="0" lang="en-US" sz="1800" strike="noStrike" u="none">
+              <a:rPr lang="en-US" sz="1800" b="0" u="none" strike="noStrike">
                 <a:solidFill>
                   <a:srgbClr val="000000"/>
                 </a:solidFill>
@@ -3073,7 +3788,7 @@
               </a:rPr>
               <a:t>НПО Криста, проект “Планирование бюджета”</a:t>
             </a:r>
-            <a:endParaRPr b="0" lang="en-US" sz="1800" strike="noStrike" u="none">
+            <a:endParaRPr lang="en-US" sz="1800" b="0" u="none" strike="noStrike">
               <a:solidFill>
                 <a:srgbClr val="000000"/>
               </a:solidFill>
@@ -3097,7 +3812,7 @@
               <a:buChar char="►"/>
             </a:pPr>
             <a:r>
-              <a:rPr b="1" lang="en-US" sz="1800" strike="noStrike" u="none">
+              <a:rPr lang="en-US" sz="1800" b="1" u="none" strike="noStrike">
                 <a:solidFill>
                   <a:srgbClr val="000000"/>
                 </a:solidFill>
@@ -3108,7 +3823,7 @@
               <a:t>2016 г.</a:t>
             </a:r>
             <a:r>
-              <a:rPr b="0" lang="en-US" sz="1800" strike="noStrike" u="none">
+              <a:rPr lang="en-US" sz="1800" b="0" u="none" strike="noStrike">
                 <a:solidFill>
                   <a:srgbClr val="000000"/>
                 </a:solidFill>
@@ -3118,7 +3833,7 @@
               </a:rPr>
               <a:t> - атестация на инженера системного программиста 1 кт.</a:t>
             </a:r>
-            <a:endParaRPr b="0" lang="en-US" sz="1800" strike="noStrike" u="none">
+            <a:endParaRPr lang="en-US" sz="1800" b="0" u="none" strike="noStrike">
               <a:solidFill>
                 <a:srgbClr val="000000"/>
               </a:solidFill>
@@ -3142,7 +3857,7 @@
               <a:buChar char="►"/>
             </a:pPr>
             <a:r>
-              <a:rPr b="1" lang="en-US" sz="1800" strike="noStrike" u="none">
+              <a:rPr lang="en-US" sz="1800" b="1" u="none" strike="noStrike">
                 <a:solidFill>
                   <a:srgbClr val="000000"/>
                 </a:solidFill>
@@ -3153,7 +3868,7 @@
               <a:t>2017 г.</a:t>
             </a:r>
             <a:r>
-              <a:rPr b="0" lang="en-US" sz="1800" strike="noStrike" u="none">
+              <a:rPr lang="en-US" sz="1800" b="0" u="none" strike="noStrike">
                 <a:solidFill>
                   <a:srgbClr val="000000"/>
                 </a:solidFill>
@@ -3163,7 +3878,7 @@
               </a:rPr>
               <a:t> - разработка контролей по данным “Web-консолидации”</a:t>
             </a:r>
-            <a:endParaRPr b="0" lang="en-US" sz="1800" strike="noStrike" u="none">
+            <a:endParaRPr lang="en-US" sz="1800" b="0" u="none" strike="noStrike">
               <a:solidFill>
                 <a:srgbClr val="000000"/>
               </a:solidFill>
@@ -3187,7 +3902,7 @@
               <a:buChar char="►"/>
             </a:pPr>
             <a:r>
-              <a:rPr b="1" lang="en-US" sz="1800" strike="noStrike" u="none">
+              <a:rPr lang="en-US" sz="1800" b="1" u="none" strike="noStrike">
                 <a:solidFill>
                   <a:srgbClr val="000000"/>
                 </a:solidFill>
@@ -3198,7 +3913,7 @@
               <a:t>2018 г.</a:t>
             </a:r>
             <a:r>
-              <a:rPr b="0" lang="en-US" sz="1800" strike="noStrike" u="none">
+              <a:rPr lang="en-US" sz="1800" b="0" u="none" strike="noStrike">
                 <a:solidFill>
                   <a:srgbClr val="000000"/>
                 </a:solidFill>
@@ -3208,7 +3923,7 @@
               </a:rPr>
               <a:t> - доработка синхронизации с НСИ </a:t>
             </a:r>
-            <a:endParaRPr b="0" lang="en-US" sz="1800" strike="noStrike" u="none">
+            <a:endParaRPr lang="en-US" sz="1800" b="0" u="none" strike="noStrike">
               <a:solidFill>
                 <a:srgbClr val="000000"/>
               </a:solidFill>
@@ -3232,7 +3947,7 @@
               <a:buChar char="►"/>
             </a:pPr>
             <a:r>
-              <a:rPr b="1" lang="en-US" sz="1800" strike="noStrike" u="none">
+              <a:rPr lang="en-US" sz="1800" b="1" u="none" strike="noStrike">
                 <a:solidFill>
                   <a:srgbClr val="000000"/>
                 </a:solidFill>
@@ -3243,7 +3958,7 @@
               <a:t>2021 г.</a:t>
             </a:r>
             <a:r>
-              <a:rPr b="0" lang="en-US" sz="1800" strike="noStrike" u="none">
+              <a:rPr lang="en-US" sz="1800" b="0" u="none" strike="noStrike">
                 <a:solidFill>
                   <a:srgbClr val="000000"/>
                 </a:solidFill>
@@ -3253,7 +3968,7 @@
               </a:rPr>
               <a:t> - аттестация на старшего инженера системного программиста</a:t>
             </a:r>
-            <a:endParaRPr b="0" lang="en-US" sz="1800" strike="noStrike" u="none">
+            <a:endParaRPr lang="en-US" sz="1800" b="0" u="none" strike="noStrike">
               <a:solidFill>
                 <a:srgbClr val="000000"/>
               </a:solidFill>
@@ -3263,7 +3978,7 @@
             </a:endParaRPr>
           </a:p>
           <a:p>
-            <a:pPr marL="432000" indent="0">
+            <a:pPr marL="432000" indent="0" algn="l">
               <a:lnSpc>
                 <a:spcPct val="100000"/>
               </a:lnSpc>
@@ -3272,10 +3987,10 @@
               </a:spcBef>
               <a:buNone/>
               <a:tabLst>
-                <a:tab algn="l" pos="0"/>
+                <a:tab pos="0" algn="l"/>
               </a:tabLst>
             </a:pPr>
-            <a:endParaRPr b="0" lang="en-US" sz="1800" strike="noStrike" u="none">
+            <a:endParaRPr lang="en-US" sz="1800" b="0" u="none" strike="noStrike">
               <a:solidFill>
                 <a:srgbClr val="000000"/>
               </a:solidFill>
@@ -3300,7 +4015,7 @@
         <p:txBody>
           <a:bodyPr/>
           <a:p>
-            <a:fld id="{E2F40925-00BB-45C8-BB40-03691353217B}" type="slidenum">
+            <a:fld id="{B9E7F585-6FEE-4AA4-A7F3-7B089411D85C}" type="slidenum">
               <a:t>2</a:t>
             </a:fld>
           </a:p>
@@ -3338,7 +4053,7 @@
       </p:grpSpPr>
       <p:sp>
         <p:nvSpPr>
-          <p:cNvPr id="47" name="PlaceHolder 1"/>
+          <p:cNvPr id="65" name="PlaceHolder 1"/>
           <p:cNvSpPr>
             <a:spLocks noGrp="1"/>
           </p:cNvSpPr>
@@ -3348,8 +4063,8 @@
         </p:nvSpPr>
         <p:spPr>
           <a:xfrm>
-            <a:off x="1851480" y="-70920"/>
-            <a:ext cx="7010280" cy="858960"/>
+            <a:off x="1828800" y="-173520"/>
+            <a:ext cx="7009920" cy="859320"/>
           </a:xfrm>
           <a:prstGeom prst="rect">
             <a:avLst/>
@@ -3360,7 +4075,7 @@
           </a:ln>
         </p:spPr>
         <p:txBody>
-          <a:bodyPr lIns="0" rIns="0" tIns="0" bIns="0" anchor="ctr" anchorCtr="1">
+          <a:bodyPr lIns="0" tIns="0" rIns="0" bIns="0" anchor="ctr" anchorCtr="1">
             <a:spAutoFit/>
           </a:bodyPr>
           <a:p>
@@ -3370,13 +4085,13 @@
               </a:lnSpc>
               <a:buNone/>
               <a:tabLst>
-                <a:tab algn="l" pos="0"/>
+                <a:tab pos="0" algn="l"/>
               </a:tabLst>
             </a:pPr>
             <a:r>
-              <a:rPr b="0" lang="ru-RU" sz="2400" strike="noStrike" u="none">
-                <a:solidFill>
-                  <a:srgbClr val="0081a0"/>
+              <a:rPr lang="ru-RU" sz="2400" b="0" u="none" strike="noStrike">
+                <a:solidFill>
+                  <a:srgbClr val="0081A0"/>
                 </a:solidFill>
                 <a:effectLst/>
                 <a:uFillTx/>
@@ -3384,7 +4099,7 @@
               </a:rPr>
               <a:t>Архитектура “Планирования бюджета”</a:t>
             </a:r>
-            <a:endParaRPr b="0" lang="en-US" sz="2400" strike="noStrike" u="none">
+            <a:endParaRPr lang="en-US" sz="2400" b="0" u="none" strike="noStrike">
               <a:solidFill>
                 <a:srgbClr val="000000"/>
               </a:solidFill>
@@ -3397,7 +4112,7 @@
       </p:sp>
       <p:pic>
         <p:nvPicPr>
-          <p:cNvPr id="48" name="" descr=""/>
+          <p:cNvPr id="66" name=""/>
           <p:cNvPicPr/>
           <p:nvPr/>
         </p:nvPicPr>
@@ -3407,8 +4122,8 @@
         </p:blipFill>
         <p:spPr>
           <a:xfrm>
-            <a:off x="14040" y="536760"/>
-            <a:ext cx="9143280" cy="4552560"/>
+            <a:off x="0" y="698400"/>
+            <a:ext cx="8928360" cy="4445280"/>
           </a:xfrm>
           <a:prstGeom prst="rect">
             <a:avLst/>
@@ -3433,7 +4148,7 @@
         <p:txBody>
           <a:bodyPr/>
           <a:p>
-            <a:fld id="{F27556F5-0FC4-40DC-90E5-531215FE45AF}" type="slidenum">
+            <a:fld id="{F4FBEE45-CCBF-4911-B5DB-9675DD983F1F}" type="slidenum">
               <a:t>3</a:t>
             </a:fld>
           </a:p>
@@ -3471,7 +4186,7 @@
       </p:grpSpPr>
       <p:sp>
         <p:nvSpPr>
-          <p:cNvPr id="49" name="PlaceHolder 1"/>
+          <p:cNvPr id="67" name="PlaceHolder 1"/>
           <p:cNvSpPr>
             <a:spLocks noGrp="1"/>
           </p:cNvSpPr>
@@ -3481,8 +4196,8 @@
         </p:nvSpPr>
         <p:spPr>
           <a:xfrm>
-            <a:off x="2037960" y="106560"/>
-            <a:ext cx="6832800" cy="858960"/>
+            <a:off x="1854360" y="55080"/>
+            <a:ext cx="6832440" cy="859320"/>
           </a:xfrm>
           <a:prstGeom prst="rect">
             <a:avLst/>
@@ -3493,7 +4208,7 @@
           </a:ln>
         </p:spPr>
         <p:txBody>
-          <a:bodyPr lIns="0" rIns="0" tIns="0" bIns="0" anchor="ctr" anchorCtr="1">
+          <a:bodyPr lIns="0" tIns="0" rIns="0" bIns="0" anchor="ctr" anchorCtr="1">
             <a:spAutoFit/>
           </a:bodyPr>
           <a:p>
@@ -3509,13 +4224,13 @@
               </a:spcAft>
               <a:buNone/>
               <a:tabLst>
-                <a:tab algn="l" pos="0"/>
+                <a:tab pos="0" algn="l"/>
               </a:tabLst>
             </a:pPr>
             <a:r>
-              <a:rPr b="0" lang="en-US" sz="2200" strike="noStrike" u="none">
-                <a:solidFill>
-                  <a:srgbClr val="0081a0"/>
+              <a:rPr lang="en-US" sz="2200" b="0" u="none" strike="noStrike">
+                <a:solidFill>
+                  <a:srgbClr val="0081A0"/>
                 </a:solidFill>
                 <a:effectLst/>
                 <a:uFillTx/>
@@ -3526,7 +4241,7 @@
             <a:br>
               <a:rPr sz="2200"/>
             </a:br>
-            <a:endParaRPr b="0" lang="en-US" sz="2200" strike="noStrike" u="none">
+            <a:endParaRPr lang="en-US" sz="2200" b="0" u="none" strike="noStrike">
               <a:solidFill>
                 <a:srgbClr val="000000"/>
               </a:solidFill>
@@ -3539,7 +4254,7 @@
       </p:sp>
       <p:sp>
         <p:nvSpPr>
-          <p:cNvPr id="50" name="PlaceHolder 2"/>
+          <p:cNvPr id="68" name="PlaceHolder 2"/>
           <p:cNvSpPr>
             <a:spLocks noGrp="1"/>
           </p:cNvSpPr>
@@ -3550,7 +4265,7 @@
         <p:spPr>
           <a:xfrm>
             <a:off x="457200" y="965520"/>
-            <a:ext cx="8228880" cy="3585240"/>
+            <a:ext cx="8228520" cy="3584880"/>
           </a:xfrm>
           <a:prstGeom prst="rect">
             <a:avLst/>
@@ -3561,7 +4276,7 @@
           </a:ln>
         </p:spPr>
         <p:txBody>
-          <a:bodyPr lIns="0" rIns="0" tIns="0" bIns="0" anchor="t">
+          <a:bodyPr lIns="0" tIns="0" rIns="0" bIns="0" anchor="t">
             <a:normAutofit/>
           </a:bodyPr>
           <a:p>
@@ -3579,7 +4294,7 @@
               <a:buChar char="►"/>
             </a:pPr>
             <a:r>
-              <a:rPr b="0" lang="en-US" sz="1800" strike="noStrike" u="none">
+              <a:rPr lang="en-US" sz="1800" b="0" u="none" strike="noStrike">
                 <a:solidFill>
                   <a:srgbClr val="000000"/>
                 </a:solidFill>
@@ -3589,7 +4304,7 @@
               </a:rPr>
               <a:t>источник данных методик ОБАС</a:t>
             </a:r>
-            <a:endParaRPr b="0" lang="en-US" sz="1800" strike="noStrike" u="none">
+            <a:endParaRPr lang="en-US" sz="1800" b="0" u="none" strike="noStrike">
               <a:solidFill>
                 <a:srgbClr val="000000"/>
               </a:solidFill>
@@ -3613,7 +4328,7 @@
               <a:buChar char="►"/>
             </a:pPr>
             <a:r>
-              <a:rPr b="0" lang="en-US" sz="1800" strike="noStrike" u="none">
+              <a:rPr lang="en-US" sz="1800" b="0" u="none" strike="noStrike">
                 <a:solidFill>
                   <a:srgbClr val="000000"/>
                 </a:solidFill>
@@ -3623,7 +4338,7 @@
               </a:rPr>
               <a:t>синхронизация с НСИ для Росгвардии</a:t>
             </a:r>
-            <a:endParaRPr b="0" lang="en-US" sz="1800" strike="noStrike" u="none">
+            <a:endParaRPr lang="en-US" sz="1800" b="0" u="none" strike="noStrike">
               <a:solidFill>
                 <a:srgbClr val="000000"/>
               </a:solidFill>
@@ -3647,7 +4362,7 @@
               <a:buChar char="►"/>
             </a:pPr>
             <a:r>
-              <a:rPr b="0" lang="en-US" sz="1800" strike="noStrike" u="none">
+              <a:rPr lang="en-US" sz="1800" b="0" u="none" strike="noStrike">
                 <a:solidFill>
                   <a:srgbClr val="000000"/>
                 </a:solidFill>
@@ -3657,7 +4372,7 @@
               </a:rPr>
               <a:t>блок "Перспективный финансовый план"</a:t>
             </a:r>
-            <a:endParaRPr b="0" lang="en-US" sz="1800" strike="noStrike" u="none">
+            <a:endParaRPr lang="en-US" sz="1800" b="0" u="none" strike="noStrike">
               <a:solidFill>
                 <a:srgbClr val="000000"/>
               </a:solidFill>
@@ -3681,7 +4396,7 @@
               <a:buChar char="►"/>
             </a:pPr>
             <a:r>
-              <a:rPr b="0" lang="en-US" sz="1800" strike="noStrike" u="none">
+              <a:rPr lang="en-US" sz="1800" b="0" u="none" strike="noStrike">
                 <a:solidFill>
                   <a:srgbClr val="000000"/>
                 </a:solidFill>
@@ -3690,20 +4405,9 @@
                 <a:latin typeface="Arial"/>
                 <a:ea typeface="Microsoft YaHei"/>
               </a:rPr>
-              <a:t>визуализации факта подписания заявок на внесение изменений для </a:t>
-            </a:r>
-            <a:r>
-              <a:rPr b="0" lang="en-US" sz="1800" strike="noStrike" u="none">
-                <a:solidFill>
-                  <a:srgbClr val="000000"/>
-                </a:solidFill>
-                <a:effectLst/>
-                <a:uFillTx/>
-                <a:latin typeface="Arial"/>
-              </a:rPr>
-              <a:t>на Омской области</a:t>
-            </a:r>
-            <a:endParaRPr b="0" lang="en-US" sz="1800" strike="noStrike" u="none">
+              <a:t>визуализации факта подписания заявок на внесение изменений для  Омской области</a:t>
+            </a:r>
+            <a:endParaRPr lang="en-US" sz="1800" b="0" u="none" strike="noStrike">
               <a:solidFill>
                 <a:srgbClr val="000000"/>
               </a:solidFill>
@@ -3727,7 +4431,7 @@
               <a:buChar char="►"/>
             </a:pPr>
             <a:r>
-              <a:rPr b="0" lang="en-US" sz="1800" strike="noStrike" u="none">
+              <a:rPr lang="en-US" sz="1800" b="0" u="none" strike="noStrike">
                 <a:solidFill>
                   <a:srgbClr val="000000"/>
                 </a:solidFill>
@@ -3736,20 +4440,9 @@
                 <a:latin typeface="Arial"/>
                 <a:ea typeface="Microsoft YaHei"/>
               </a:rPr>
-              <a:t>адаптивный источник данных </a:t>
-            </a:r>
-            <a:r>
-              <a:rPr b="0" lang="en-US" sz="1800" strike="noStrike" u="none">
-                <a:solidFill>
-                  <a:srgbClr val="000000"/>
-                </a:solidFill>
-                <a:effectLst/>
-                <a:uFillTx/>
-                <a:latin typeface="Arial"/>
-              </a:rPr>
-              <a:t>для Алтайского края на основе базового, обогащенного данными из таблицы сопоставления</a:t>
-            </a:r>
-            <a:endParaRPr b="0" lang="en-US" sz="1800" strike="noStrike" u="none">
+              <a:t>адаптивный источник данных для Алтайского края на основе базового, обогащенного данными из таблицы сопоставления</a:t>
+            </a:r>
+            <a:endParaRPr lang="en-US" sz="1800" b="0" u="none" strike="noStrike">
               <a:solidFill>
                 <a:srgbClr val="000000"/>
               </a:solidFill>
@@ -3759,7 +4452,7 @@
             </a:endParaRPr>
           </a:p>
           <a:p>
-            <a:pPr marL="432000" indent="0">
+            <a:pPr marL="432000" indent="0" algn="l">
               <a:lnSpc>
                 <a:spcPct val="100000"/>
               </a:lnSpc>
@@ -3768,10 +4461,10 @@
               </a:spcBef>
               <a:buNone/>
               <a:tabLst>
-                <a:tab algn="l" pos="0"/>
+                <a:tab pos="0" algn="l"/>
               </a:tabLst>
             </a:pPr>
-            <a:endParaRPr b="0" lang="en-US" sz="1800" strike="noStrike" u="none">
+            <a:endParaRPr lang="en-US" sz="1800" b="0" u="none" strike="noStrike">
               <a:solidFill>
                 <a:srgbClr val="000000"/>
               </a:solidFill>
@@ -3796,7 +4489,7 @@
         <p:txBody>
           <a:bodyPr/>
           <a:p>
-            <a:fld id="{A9615430-C6D0-4B79-B8E6-7A9E36B2ED2A}" type="slidenum">
+            <a:fld id="{D7D62251-B6D2-4319-89B5-0FC6600153BE}" type="slidenum">
               <a:t>4</a:t>
             </a:fld>
           </a:p>
@@ -3834,7 +4527,7 @@
       </p:grpSpPr>
       <p:sp>
         <p:nvSpPr>
-          <p:cNvPr id="51" name="PlaceHolder 1"/>
+          <p:cNvPr id="69" name="PlaceHolder 1"/>
           <p:cNvSpPr>
             <a:spLocks noGrp="1"/>
           </p:cNvSpPr>
@@ -3844,8 +4537,8 @@
         </p:nvSpPr>
         <p:spPr>
           <a:xfrm>
-            <a:off x="2037960" y="106560"/>
-            <a:ext cx="6832800" cy="858960"/>
+            <a:off x="3429000" y="55080"/>
+            <a:ext cx="5257800" cy="859320"/>
           </a:xfrm>
           <a:prstGeom prst="rect">
             <a:avLst/>
@@ -3856,7 +4549,7 @@
           </a:ln>
         </p:spPr>
         <p:txBody>
-          <a:bodyPr lIns="0" rIns="0" tIns="0" bIns="0" anchor="ctr" anchorCtr="1">
+          <a:bodyPr lIns="0" tIns="0" rIns="0" bIns="0" anchor="ctr" anchorCtr="1">
             <a:spAutoFit/>
           </a:bodyPr>
           <a:p>
@@ -3872,13 +4565,13 @@
               </a:spcAft>
               <a:buNone/>
               <a:tabLst>
-                <a:tab algn="l" pos="0"/>
+                <a:tab pos="0" algn="l"/>
               </a:tabLst>
             </a:pPr>
             <a:r>
-              <a:rPr b="0" lang="en-US" sz="2200" strike="noStrike" u="none">
-                <a:solidFill>
-                  <a:srgbClr val="0081a0"/>
+              <a:rPr lang="en-US" sz="2200" b="0" u="none" strike="noStrike">
+                <a:solidFill>
+                  <a:srgbClr val="0081A0"/>
                 </a:solidFill>
                 <a:effectLst/>
                 <a:uFillTx/>
@@ -3889,7 +4582,7 @@
             <a:br>
               <a:rPr sz="2200"/>
             </a:br>
-            <a:endParaRPr b="0" lang="en-US" sz="2200" strike="noStrike" u="none">
+            <a:endParaRPr lang="en-US" sz="2200" b="0" u="none" strike="noStrike">
               <a:solidFill>
                 <a:srgbClr val="000000"/>
               </a:solidFill>
@@ -3902,7 +4595,7 @@
       </p:sp>
       <p:sp>
         <p:nvSpPr>
-          <p:cNvPr id="52" name="PlaceHolder 2"/>
+          <p:cNvPr id="70" name="PlaceHolder 2"/>
           <p:cNvSpPr>
             <a:spLocks noGrp="1"/>
           </p:cNvSpPr>
@@ -3913,7 +4606,7 @@
         <p:spPr>
           <a:xfrm>
             <a:off x="457200" y="965520"/>
-            <a:ext cx="8228880" cy="3585240"/>
+            <a:ext cx="8228520" cy="3584880"/>
           </a:xfrm>
           <a:prstGeom prst="rect">
             <a:avLst/>
@@ -3924,7 +4617,7 @@
           </a:ln>
         </p:spPr>
         <p:txBody>
-          <a:bodyPr lIns="0" rIns="0" tIns="0" bIns="0" anchor="t">
+          <a:bodyPr lIns="0" tIns="0" rIns="0" bIns="0" anchor="t">
             <a:normAutofit/>
           </a:bodyPr>
           <a:p>
@@ -3942,7 +4635,7 @@
               <a:buChar char="►"/>
             </a:pPr>
             <a:r>
-              <a:rPr b="0" lang="en-US" sz="1800" strike="noStrike" u="none">
+              <a:rPr lang="en-US" sz="1800" b="0" u="none" strike="noStrike">
                 <a:solidFill>
                   <a:srgbClr val="000000"/>
                 </a:solidFill>
@@ -3952,7 +4645,7 @@
               </a:rPr>
               <a:t>индикация состояний документов</a:t>
             </a:r>
-            <a:endParaRPr b="0" lang="en-US" sz="1800" strike="noStrike" u="none">
+            <a:endParaRPr lang="en-US" sz="1800" b="0" u="none" strike="noStrike">
               <a:solidFill>
                 <a:srgbClr val="000000"/>
               </a:solidFill>
@@ -3976,7 +4669,7 @@
               <a:buChar char="►"/>
             </a:pPr>
             <a:r>
-              <a:rPr b="0" lang="en-US" sz="1800" strike="noStrike" u="none">
+              <a:rPr lang="en-US" sz="1800" b="0" u="none" strike="noStrike">
                 <a:solidFill>
                   <a:srgbClr val="000000"/>
                 </a:solidFill>
@@ -3987,7 +4680,7 @@
               </a:rPr>
               <a:t>конфигурация стадий/статусов документов</a:t>
             </a:r>
-            <a:endParaRPr b="0" lang="en-US" sz="1800" strike="noStrike" u="none">
+            <a:endParaRPr lang="en-US" sz="1800" b="0" u="none" strike="noStrike">
               <a:solidFill>
                 <a:srgbClr val="000000"/>
               </a:solidFill>
@@ -4011,17 +4704,18 @@
               <a:buChar char="►"/>
             </a:pPr>
             <a:r>
-              <a:rPr b="0" lang="en-US" sz="1800" strike="noStrike" u="none">
-                <a:solidFill>
-                  <a:srgbClr val="000000"/>
-                </a:solidFill>
-                <a:effectLst/>
-                <a:uFillTx/>
-                <a:latin typeface="Arial"/>
+              <a:rPr lang="en-US" sz="1800" b="0" u="none" strike="noStrike">
+                <a:solidFill>
+                  <a:srgbClr val="000000"/>
+                </a:solidFill>
+                <a:effectLst/>
+                <a:uFillTx/>
+                <a:latin typeface="Arial"/>
+                <a:ea typeface="Microsoft YaHei"/>
               </a:rPr>
               <a:t>механизм сериализации/десериализации данных в формат json в контексте протокола выполнения бизнес операций</a:t>
             </a:r>
-            <a:endParaRPr b="0" lang="en-US" sz="1800" strike="noStrike" u="none">
+            <a:endParaRPr lang="en-US" sz="1800" b="0" u="none" strike="noStrike">
               <a:solidFill>
                 <a:srgbClr val="000000"/>
               </a:solidFill>
@@ -4045,17 +4739,18 @@
               <a:buChar char="►"/>
             </a:pPr>
             <a:r>
-              <a:rPr b="0" lang="en-US" sz="1800" strike="noStrike" u="none">
-                <a:solidFill>
-                  <a:srgbClr val="000000"/>
-                </a:solidFill>
-                <a:effectLst/>
-                <a:uFillTx/>
-                <a:latin typeface="Arial"/>
-              </a:rPr>
-              <a:t>рефакторинг операций блока РРО</a:t>
-            </a:r>
-            <a:endParaRPr b="0" lang="en-US" sz="1800" strike="noStrike" u="none">
+              <a:rPr lang="en-US" sz="1800" b="0" u="none" strike="noStrike">
+                <a:solidFill>
+                  <a:srgbClr val="000000"/>
+                </a:solidFill>
+                <a:effectLst/>
+                <a:uFillTx/>
+                <a:latin typeface="Arial"/>
+                <a:ea typeface="Microsoft YaHei"/>
+              </a:rPr>
+              <a:t>рефакторинг операций блока “РРО”</a:t>
+            </a:r>
+            <a:endParaRPr lang="en-US" sz="1800" b="0" u="none" strike="noStrike">
               <a:solidFill>
                 <a:srgbClr val="000000"/>
               </a:solidFill>
@@ -4079,17 +4774,18 @@
               <a:buChar char="►"/>
             </a:pPr>
             <a:r>
-              <a:rPr b="0" lang="en-US" sz="1800" strike="noStrike" u="none">
-                <a:solidFill>
-                  <a:srgbClr val="000000"/>
-                </a:solidFill>
-                <a:effectLst/>
-                <a:uFillTx/>
-                <a:latin typeface="Arial"/>
-              </a:rPr>
-              <a:t>синхронизация с НСИ для Росгвардии</a:t>
-            </a:r>
-            <a:endParaRPr b="0" lang="en-US" sz="1800" strike="noStrike" u="none">
+              <a:rPr lang="en-US" sz="1800" b="0" u="none" strike="noStrike">
+                <a:solidFill>
+                  <a:srgbClr val="000000"/>
+                </a:solidFill>
+                <a:effectLst/>
+                <a:uFillTx/>
+                <a:latin typeface="Arial"/>
+                <a:ea typeface="Microsoft YaHei"/>
+              </a:rPr>
+              <a:t>поддержка источников данных для блока “Закон” </a:t>
+            </a:r>
+            <a:endParaRPr lang="en-US" sz="1800" b="0" u="none" strike="noStrike">
               <a:solidFill>
                 <a:srgbClr val="000000"/>
               </a:solidFill>
@@ -4113,17 +4809,18 @@
               <a:buChar char="►"/>
             </a:pPr>
             <a:r>
-              <a:rPr b="0" lang="en-US" sz="1800" strike="noStrike" u="none">
-                <a:solidFill>
-                  <a:srgbClr val="000000"/>
-                </a:solidFill>
-                <a:effectLst/>
-                <a:uFillTx/>
-                <a:latin typeface="Arial"/>
-              </a:rPr>
-              <a:t>функциональные тесты на gatling</a:t>
-            </a:r>
-            <a:endParaRPr b="0" lang="en-US" sz="1800" strike="noStrike" u="none">
+              <a:rPr lang="en-US" sz="1800" b="0" u="none" strike="noStrike">
+                <a:solidFill>
+                  <a:srgbClr val="000000"/>
+                </a:solidFill>
+                <a:effectLst/>
+                <a:uFillTx/>
+                <a:latin typeface="Arial"/>
+                <a:ea typeface="Microsoft YaHei"/>
+              </a:rPr>
+              <a:t>мониторинг логов</a:t>
+            </a:r>
+            <a:endParaRPr lang="en-US" sz="1800" b="0" u="none" strike="noStrike">
               <a:solidFill>
                 <a:srgbClr val="000000"/>
               </a:solidFill>
@@ -4133,7 +4830,7 @@
             </a:endParaRPr>
           </a:p>
           <a:p>
-            <a:pPr marL="432000" indent="0">
+            <a:pPr marL="432000" indent="0" algn="l">
               <a:lnSpc>
                 <a:spcPct val="100000"/>
               </a:lnSpc>
@@ -4142,10 +4839,10 @@
               </a:spcBef>
               <a:buNone/>
               <a:tabLst>
-                <a:tab algn="l" pos="0"/>
+                <a:tab pos="0" algn="l"/>
               </a:tabLst>
             </a:pPr>
-            <a:endParaRPr b="0" lang="en-US" sz="1800" strike="noStrike" u="none">
+            <a:endParaRPr lang="en-US" sz="1800" b="0" u="none" strike="noStrike">
               <a:solidFill>
                 <a:srgbClr val="000000"/>
               </a:solidFill>
@@ -4170,7 +4867,7 @@
         <p:txBody>
           <a:bodyPr/>
           <a:p>
-            <a:fld id="{8080873C-FC15-43CF-A3EB-65B0CA871390}" type="slidenum">
+            <a:fld id="{C69758A8-8A70-4FDD-B289-A2CE5411C32A}" type="slidenum">
               <a:t>5</a:t>
             </a:fld>
           </a:p>
@@ -4208,7 +4905,7 @@
       </p:grpSpPr>
       <p:sp>
         <p:nvSpPr>
-          <p:cNvPr id="53" name="PlaceHolder 1"/>
+          <p:cNvPr id="71" name="PlaceHolder 1"/>
           <p:cNvSpPr>
             <a:spLocks noGrp="1"/>
           </p:cNvSpPr>
@@ -4218,8 +4915,8 @@
         </p:nvSpPr>
         <p:spPr>
           <a:xfrm>
-            <a:off x="2037960" y="106560"/>
-            <a:ext cx="6832800" cy="858960"/>
+            <a:off x="3657600" y="0"/>
+            <a:ext cx="5029200" cy="859320"/>
           </a:xfrm>
           <a:prstGeom prst="rect">
             <a:avLst/>
@@ -4230,7 +4927,7 @@
           </a:ln>
         </p:spPr>
         <p:txBody>
-          <a:bodyPr lIns="0" rIns="0" tIns="0" bIns="0" anchor="ctr" anchorCtr="1">
+          <a:bodyPr lIns="0" tIns="0" rIns="0" bIns="0" anchor="ctr" anchorCtr="1">
             <a:spAutoFit/>
           </a:bodyPr>
           <a:p>
@@ -4246,13 +4943,13 @@
               </a:spcAft>
               <a:buNone/>
               <a:tabLst>
-                <a:tab algn="l" pos="0"/>
+                <a:tab pos="0" algn="l"/>
               </a:tabLst>
             </a:pPr>
             <a:r>
-              <a:rPr b="0" lang="en-US" sz="2200" strike="noStrike" u="none">
-                <a:solidFill>
-                  <a:srgbClr val="0081a0"/>
+              <a:rPr lang="en-US" sz="2200" b="0" u="none" strike="noStrike">
+                <a:solidFill>
+                  <a:srgbClr val="0081A0"/>
                 </a:solidFill>
                 <a:effectLst/>
                 <a:uFillTx/>
@@ -4263,7 +4960,7 @@
             <a:br>
               <a:rPr sz="2200"/>
             </a:br>
-            <a:endParaRPr b="0" lang="en-US" sz="2200" strike="noStrike" u="none">
+            <a:endParaRPr lang="en-US" sz="2200" b="0" u="none" strike="noStrike">
               <a:solidFill>
                 <a:srgbClr val="000000"/>
               </a:solidFill>
@@ -4276,7 +4973,7 @@
       </p:sp>
       <p:sp>
         <p:nvSpPr>
-          <p:cNvPr id="54" name="PlaceHolder 2"/>
+          <p:cNvPr id="72" name="PlaceHolder 2"/>
           <p:cNvSpPr>
             <a:spLocks noGrp="1"/>
           </p:cNvSpPr>
@@ -4287,7 +4984,7 @@
         <p:spPr>
           <a:xfrm>
             <a:off x="457200" y="965520"/>
-            <a:ext cx="8228880" cy="3585240"/>
+            <a:ext cx="8228520" cy="3584880"/>
           </a:xfrm>
           <a:prstGeom prst="rect">
             <a:avLst/>
@@ -4298,7 +4995,7 @@
           </a:ln>
         </p:spPr>
         <p:txBody>
-          <a:bodyPr lIns="0" rIns="0" tIns="0" bIns="0" anchor="t">
+          <a:bodyPr lIns="0" tIns="0" rIns="0" bIns="0" anchor="t">
             <a:normAutofit/>
           </a:bodyPr>
           <a:p>
@@ -4310,9 +5007,12 @@
                 <a:spcPts val="1417"/>
               </a:spcBef>
               <a:buNone/>
-            </a:pPr>
-            <a:r>
-              <a:rPr b="0" lang="en-US" sz="1800" strike="noStrike" u="none">
+              <a:tabLst>
+                <a:tab pos="0" algn="l"/>
+              </a:tabLst>
+            </a:pPr>
+            <a:r>
+              <a:rPr lang="en-US" sz="1800" b="0" u="none" strike="noStrike">
                 <a:solidFill>
                   <a:srgbClr val="000000"/>
                 </a:solidFill>
@@ -4322,7 +5022,7 @@
               </a:rPr>
               <a:t> </a:t>
             </a:r>
-            <a:endParaRPr b="0" lang="en-US" sz="1800" strike="noStrike" u="none">
+            <a:endParaRPr lang="en-US" sz="1800" b="0" u="none" strike="noStrike">
               <a:solidFill>
                 <a:srgbClr val="000000"/>
               </a:solidFill>
@@ -4332,7 +5032,7 @@
             </a:endParaRPr>
           </a:p>
           <a:p>
-            <a:pPr marL="432000" indent="0">
+            <a:pPr marL="432000" indent="0" algn="l">
               <a:lnSpc>
                 <a:spcPct val="100000"/>
               </a:lnSpc>
@@ -4341,10 +5041,10 @@
               </a:spcBef>
               <a:buNone/>
               <a:tabLst>
-                <a:tab algn="l" pos="0"/>
+                <a:tab pos="0" algn="l"/>
               </a:tabLst>
             </a:pPr>
-            <a:endParaRPr b="0" lang="en-US" sz="1800" strike="noStrike" u="none">
+            <a:endParaRPr lang="en-US" sz="1800" b="0" u="none" strike="noStrike">
               <a:solidFill>
                 <a:srgbClr val="000000"/>
               </a:solidFill>
@@ -4355,6 +5055,30 @@
           </a:p>
         </p:txBody>
       </p:sp>
+      <p:pic>
+        <p:nvPicPr>
+          <p:cNvPr id="73" name=""/>
+          <p:cNvPicPr/>
+          <p:nvPr/>
+        </p:nvPicPr>
+        <p:blipFill>
+          <a:blip r:embed="rId1"/>
+          <a:stretch/>
+        </p:blipFill>
+        <p:spPr>
+          <a:xfrm>
+            <a:off x="643320" y="906840"/>
+            <a:ext cx="7886520" cy="3342960"/>
+          </a:xfrm>
+          <a:prstGeom prst="rect">
+            <a:avLst/>
+          </a:prstGeom>
+          <a:noFill/>
+          <a:ln w="0">
+            <a:noFill/>
+          </a:ln>
+        </p:spPr>
+      </p:pic>
       <p:sp>
         <p:nvSpPr>
           <p:cNvPr id="4" name="PlaceHolder 3"/>
@@ -4369,8 +5093,150 @@
         <p:txBody>
           <a:bodyPr/>
           <a:p>
-            <a:fld id="{DC9457E4-D2C3-436E-9777-933920AD88D7}" type="slidenum">
+            <a:fld id="{7CC8A1C3-3B18-4AAB-895E-8C6BB1166EC6}" type="slidenum">
               <a:t>6</a:t>
+            </a:fld>
+          </a:p>
+        </p:txBody>
+      </p:sp>
+    </p:spTree>
+  </p:cSld>
+  <mc:AlternateContent>
+    <mc:Choice Requires="p14">
+      <p:transition spd="slow" p14:dur="2000"/>
+    </mc:Choice>
+    <mc:Fallback>
+      <p:transition spd="slow"/>
+    </mc:Fallback>
+  </mc:AlternateContent>
+</p:sld>
+</file>
+
+<file path=ppt/slides/slide7.xml><?xml version="1.0" encoding="utf-8"?>
+<p:sld xmlns:a="http://schemas.openxmlformats.org/drawingml/2006/main" xmlns:p="http://schemas.openxmlformats.org/presentationml/2006/main" xmlns:r="http://schemas.openxmlformats.org/officeDocument/2006/relationships" xmlns:p14="http://schemas.microsoft.com/office/powerpoint/2010/main" xmlns:p15="http://schemas.microsoft.com/office/powerpoint/2012/main" xmlns:mc="http://schemas.openxmlformats.org/markup-compatibility/2006">
+  <p:cSld>
+    <p:spTree>
+      <p:nvGrpSpPr>
+        <p:cNvPr id="1" name=""/>
+        <p:cNvGrpSpPr/>
+        <p:nvPr/>
+      </p:nvGrpSpPr>
+      <p:grpSpPr>
+        <a:xfrm>
+          <a:off x="0" y="0"/>
+          <a:ext cx="0" cy="0"/>
+          <a:chOff x="0" y="0"/>
+          <a:chExt cx="0" cy="0"/>
+        </a:xfrm>
+      </p:grpSpPr>
+      <p:sp>
+        <p:nvSpPr>
+          <p:cNvPr id="74" name="PlaceHolder 1"/>
+          <p:cNvSpPr>
+            <a:spLocks noGrp="1"/>
+          </p:cNvSpPr>
+          <p:nvPr>
+            <p:ph type="title"/>
+          </p:nvPr>
+        </p:nvSpPr>
+        <p:spPr>
+          <a:xfrm>
+            <a:off x="1784520" y="93240"/>
+            <a:ext cx="7009920" cy="670680"/>
+          </a:xfrm>
+          <a:prstGeom prst="rect">
+            <a:avLst/>
+          </a:prstGeom>
+          <a:noFill/>
+          <a:ln w="0">
+            <a:noFill/>
+          </a:ln>
+        </p:spPr>
+        <p:txBody>
+          <a:bodyPr lIns="0" tIns="0" rIns="0" bIns="0" anchor="ctr" anchorCtr="1">
+            <a:spAutoFit/>
+          </a:bodyPr>
+          <a:p>
+            <a:pPr indent="0" algn="r">
+              <a:lnSpc>
+                <a:spcPct val="100000"/>
+              </a:lnSpc>
+              <a:spcBef>
+                <a:spcPts val="1191"/>
+              </a:spcBef>
+              <a:spcAft>
+                <a:spcPts val="992"/>
+              </a:spcAft>
+              <a:buNone/>
+              <a:tabLst>
+                <a:tab pos="0" algn="l"/>
+              </a:tabLst>
+            </a:pPr>
+            <a:r>
+              <a:rPr lang="en-US" sz="2200" b="0" u="none" strike="noStrike">
+                <a:solidFill>
+                  <a:srgbClr val="0081A0"/>
+                </a:solidFill>
+                <a:effectLst/>
+                <a:uFillTx/>
+                <a:latin typeface="Arial"/>
+              </a:rPr>
+              <a:t>Индикация состояний документов</a:t>
+            </a:r>
+            <a:br>
+              <a:rPr sz="2200"/>
+            </a:br>
+            <a:endParaRPr lang="en-US" sz="2200" b="0" u="none" strike="noStrike">
+              <a:solidFill>
+                <a:srgbClr val="000000"/>
+              </a:solidFill>
+              <a:effectLst/>
+              <a:uFillTx/>
+              <a:latin typeface="Arial"/>
+            </a:endParaRPr>
+          </a:p>
+        </p:txBody>
+      </p:sp>
+      <p:pic>
+        <p:nvPicPr>
+          <p:cNvPr id="75" name=""/>
+          <p:cNvPicPr/>
+          <p:nvPr/>
+        </p:nvPicPr>
+        <p:blipFill>
+          <a:blip r:embed="rId1"/>
+          <a:stretch/>
+        </p:blipFill>
+        <p:spPr>
+          <a:xfrm>
+            <a:off x="2337840" y="571680"/>
+            <a:ext cx="4520160" cy="4228920"/>
+          </a:xfrm>
+          <a:prstGeom prst="rect">
+            <a:avLst/>
+          </a:prstGeom>
+          <a:noFill/>
+          <a:ln w="0">
+            <a:noFill/>
+          </a:ln>
+        </p:spPr>
+      </p:pic>
+      <p:sp>
+        <p:nvSpPr>
+          <p:cNvPr id="3" name="PlaceHolder 2"/>
+          <p:cNvSpPr>
+            <a:spLocks noGrp="1"/>
+          </p:cNvSpPr>
+          <p:nvPr>
+            <p:ph type="sldNum" idx="3"/>
+          </p:nvPr>
+        </p:nvSpPr>
+        <p:spPr/>
+        <p:txBody>
+          <a:bodyPr/>
+          <a:p>
+            <a:fld id="{3BF0B48D-0D1A-469D-8C26-7EBFD77F80EC}" type="slidenum">
+              <a:t>7</a:t>
             </a:fld>
           </a:p>
         </p:txBody>
@@ -4396,34 +5262,34 @@
         <a:srgbClr val="000000"/>
       </a:dk1>
       <a:lt1>
-        <a:srgbClr val="ffffff"/>
+        <a:srgbClr val="FFFFFF"/>
       </a:lt1>
       <a:dk2>
-        <a:srgbClr val="1f497d"/>
+        <a:srgbClr val="1F497D"/>
       </a:dk2>
       <a:lt2>
-        <a:srgbClr val="eeece1"/>
+        <a:srgbClr val="EEECE1"/>
       </a:lt2>
       <a:accent1>
-        <a:srgbClr val="4f81bd"/>
+        <a:srgbClr val="4F81BD"/>
       </a:accent1>
       <a:accent2>
-        <a:srgbClr val="c0504d"/>
+        <a:srgbClr val="C0504D"/>
       </a:accent2>
       <a:accent3>
-        <a:srgbClr val="9bbb59"/>
+        <a:srgbClr val="9BBB59"/>
       </a:accent3>
       <a:accent4>
-        <a:srgbClr val="8064a2"/>
+        <a:srgbClr val="8064A2"/>
       </a:accent4>
       <a:accent5>
-        <a:srgbClr val="4bacc6"/>
+        <a:srgbClr val="4BACC6"/>
       </a:accent5>
       <a:accent6>
-        <a:srgbClr val="f79646"/>
+        <a:srgbClr val="F79646"/>
       </a:accent6>
       <a:hlink>
-        <a:srgbClr val="0000ff"/>
+        <a:srgbClr val="0000FF"/>
       </a:hlink>
       <a:folHlink>
         <a:srgbClr val="800080"/>
@@ -4571,34 +5437,34 @@
         <a:srgbClr val="000000"/>
       </a:dk1>
       <a:lt1>
-        <a:srgbClr val="ffffff"/>
+        <a:srgbClr val="FFFFFF"/>
       </a:lt1>
       <a:dk2>
-        <a:srgbClr val="1f497d"/>
+        <a:srgbClr val="1F497D"/>
       </a:dk2>
       <a:lt2>
-        <a:srgbClr val="eeece1"/>
+        <a:srgbClr val="EEECE1"/>
       </a:lt2>
       <a:accent1>
-        <a:srgbClr val="4f81bd"/>
+        <a:srgbClr val="4F81BD"/>
       </a:accent1>
       <a:accent2>
-        <a:srgbClr val="c0504d"/>
+        <a:srgbClr val="C0504D"/>
       </a:accent2>
       <a:accent3>
-        <a:srgbClr val="9bbb59"/>
+        <a:srgbClr val="9BBB59"/>
       </a:accent3>
       <a:accent4>
-        <a:srgbClr val="8064a2"/>
+        <a:srgbClr val="8064A2"/>
       </a:accent4>
       <a:accent5>
-        <a:srgbClr val="4bacc6"/>
+        <a:srgbClr val="4BACC6"/>
       </a:accent5>
       <a:accent6>
-        <a:srgbClr val="f79646"/>
+        <a:srgbClr val="F79646"/>
       </a:accent6>
       <a:hlink>
-        <a:srgbClr val="0000ff"/>
+        <a:srgbClr val="0000FF"/>
       </a:hlink>
       <a:folHlink>
         <a:srgbClr val="800080"/>
@@ -4746,37 +5612,37 @@
         <a:srgbClr val="000000"/>
       </a:dk1>
       <a:lt1>
-        <a:srgbClr val="ffffff"/>
+        <a:srgbClr val="FFFFFF"/>
       </a:lt1>
       <a:dk2>
         <a:srgbClr val="000000"/>
       </a:dk2>
       <a:lt2>
-        <a:srgbClr val="ffffff"/>
+        <a:srgbClr val="FFFFFF"/>
       </a:lt2>
       <a:accent1>
-        <a:srgbClr val="18a303"/>
+        <a:srgbClr val="18A303"/>
       </a:accent1>
       <a:accent2>
-        <a:srgbClr val="0369a3"/>
+        <a:srgbClr val="0369A3"/>
       </a:accent2>
       <a:accent3>
-        <a:srgbClr val="a33e03"/>
+        <a:srgbClr val="A33E03"/>
       </a:accent3>
       <a:accent4>
-        <a:srgbClr val="8e03a3"/>
+        <a:srgbClr val="8E03A3"/>
       </a:accent4>
       <a:accent5>
-        <a:srgbClr val="c99c00"/>
+        <a:srgbClr val="C99C00"/>
       </a:accent5>
       <a:accent6>
-        <a:srgbClr val="c9211e"/>
+        <a:srgbClr val="C9211E"/>
       </a:accent6>
       <a:hlink>
-        <a:srgbClr val="0000ee"/>
+        <a:srgbClr val="0000EE"/>
       </a:hlink>
       <a:folHlink>
-        <a:srgbClr val="551a8b"/>
+        <a:srgbClr val="551A8B"/>
       </a:folHlink>
     </a:clrScheme>
     <a:fontScheme name="Office">
